--- a/proposals/2026-11_nlrc-ai-labor-commission/nlrc_제안요약서.pptx
+++ b/proposals/2026-11_nlrc-ai-labor-commission/nlrc_제안요약서.pptx
@@ -28,6 +28,7 @@
     <p:sldId id="7502" r:id="rId30"/>
     <p:sldId id="7503" r:id="rId31"/>
     <p:sldId id="7504" r:id="rId32"/>
+    <p:sldId id="7505" r:id="rId33"/>
   </p:sldIdLst>
   <p:sldSz cx="6858000" cy="9906000" type="A4"/>
   <p:notesSz cx="7104063" cy="10234613"/>
@@ -12104,6 +12105,2106 @@
                 <a:cs typeface="맑은 고딕" panose="00000600000000000000" pitchFamily="2" charset="-127"/>
                 <a:sym typeface="Monotype Sorts"/>
               </a:rPr>
+              <a:t>2.1.2 1차 대비 2차 사업 · 산출물 인수 · 3차 연계</a:t>
+            </a:r>
+          </a:p>
+        </p:txBody>
+      </p:sp>
+      <p:sp>
+        <p:nvSpPr>
+          <p:cNvPr id="3" name="직사각형 2">
+            <a:extLst>
+              <a:ext uri="{FF2B5EF4-FFF2-40B4-BE49-F238E27FC236}">
+                <a16:creationId xmlns:a16="http://schemas.microsoft.com/office/drawing/2014/main" id="{D2CE8A46-6233-C6A4-2BE2-039EC8621B50}"/>
+              </a:ext>
+            </a:extLst>
+          </p:cNvPr>
+          <p:cNvSpPr/>
+          <p:nvPr/>
+        </p:nvSpPr>
+        <p:spPr bwMode="auto">
+          <a:xfrm>
+            <a:off x="509839" y="698078"/>
+            <a:ext cx="5838321" cy="230831"/>
+          </a:xfrm>
+          <a:prstGeom prst="rect">
+            <a:avLst/>
+          </a:prstGeom>
+          <a:ln>
+            <a:noFill/>
+          </a:ln>
+        </p:spPr>
+        <p:txBody>
+          <a:bodyPr wrap="square" lIns="0" tIns="0" rIns="0" bIns="0" anchor="b" anchorCtr="0">
+            <a:spAutoFit/>
+          </a:bodyPr>
+          <a:lstStyle/>
+          <a:p>
+            <a:pPr marL="0" lvl="1" fontAlgn="base">
+              <a:spcBef>
+                <a:spcPts val="188"/>
+              </a:spcBef>
+              <a:buClr>
+                <a:prstClr val="white">
+                  <a:lumMod val="50000"/>
+                </a:prstClr>
+              </a:buClr>
+              <a:buSzPct val="100000"/>
+              <a:defRPr/>
+            </a:pPr>
+            <a:r>
+              <a:rPr kumimoji="0" lang="en-US" altLang="ko-KR" sz="1500" b="1" i="0" u="none" strike="noStrike" kern="1200" cap="none" normalizeH="0" baseline="0" noProof="0">
+                <a:ln w="3175">
+                  <a:solidFill>
+                    <a:srgbClr val="D0D5DB">
+                      <a:alpha val="0"/>
+                    </a:srgbClr>
+                  </a:solidFill>
+                </a:ln>
+                <a:effectLst/>
+                <a:uLnTx/>
+                <a:uFillTx/>
+                <a:latin typeface="맑은 고딕" panose="00000800000000000000" pitchFamily="2" charset="-127"/>
+                <a:ea typeface="맑은 고딕" panose="00000800000000000000" pitchFamily="2" charset="-127"/>
+                <a:cs typeface="맑은 고딕" panose="00000800000000000000" pitchFamily="2" charset="-127"/>
+                <a:sym typeface="Monotype Sorts"/>
+              </a:rPr>
+              <a:t>2.1 사업 이해</a:t>
+            </a:r>
+          </a:p>
+        </p:txBody>
+      </p:sp>
+      <p:sp>
+        <p:nvSpPr>
+          <p:cNvPr id="4" name="사각형: 둥근 모서리 3">
+            <a:extLst>
+              <a:ext uri="{FF2B5EF4-FFF2-40B4-BE49-F238E27FC236}">
+                <a16:creationId xmlns:a16="http://schemas.microsoft.com/office/drawing/2014/main" id="{BE032AD2-3F32-1F05-D1B6-C16ED22DC291}"/>
+              </a:ext>
+            </a:extLst>
+          </p:cNvPr>
+          <p:cNvSpPr/>
+          <p:nvPr/>
+        </p:nvSpPr>
+        <p:spPr>
+          <a:xfrm>
+            <a:off x="279083" y="1371599"/>
+            <a:ext cx="6331426" cy="862661"/>
+          </a:xfrm>
+          <a:prstGeom prst="roundRect">
+            <a:avLst>
+              <a:gd name="adj" fmla="val 5153"/>
+            </a:avLst>
+          </a:prstGeom>
+          <a:solidFill>
+            <a:schemeClr val="accent5">
+              <a:lumMod val="20000"/>
+              <a:lumOff val="80000"/>
+              <a:alpha val="70000"/>
+            </a:schemeClr>
+          </a:solidFill>
+          <a:ln w="12700" cap="flat" cmpd="sng" algn="ctr">
+            <a:noFill/>
+            <a:prstDash val="solid"/>
+            <a:miter lim="800000"/>
+          </a:ln>
+          <a:effectLst/>
+        </p:spPr>
+        <p:txBody>
+          <a:bodyPr lIns="72000" tIns="72000" rIns="72000" bIns="72000" rtlCol="0" anchor="ctr"/>
+          <a:lstStyle/>
+          <a:p>
+            <a:pPr>
+              <a:lnSpc>
+                <a:spcPts val="1700"/>
+              </a:lnSpc>
+            </a:pPr>
+            <a:r>
+              <a:rPr lang="ko-KR" altLang="en-US" sz="1200" b="1">
+                <a:ln w="12700">
+                  <a:solidFill>
+                    <a:schemeClr val="tx1">
+                      <a:alpha val="0"/>
+                    </a:schemeClr>
+                  </a:solidFill>
+                </a:ln>
+                <a:latin typeface="맑은 고딕" panose="00000800000000000000" pitchFamily="2" charset="-127"/>
+                <a:ea typeface="맑은 고딕" panose="00000800000000000000" pitchFamily="2" charset="-127"/>
+                <a:cs typeface="맑은 고딕" panose="00000800000000000000" pitchFamily="2" charset="-127"/>
+              </a:rPr>
+              <a:t>(같은 자원 · 4배 넘는 기능) GPU 80GB 7장과 기존 LLM을 그대로 쓰면서 </a:t>
+            </a:r>
+            <a:r>
+              <a:rPr lang="ko-KR" altLang="en-US" sz="1200" b="1">
+                <a:ln w="12700">
+                  <a:solidFill>
+                    <a:schemeClr val="tx1">
+                      <a:alpha val="0"/>
+                    </a:schemeClr>
+                  </a:solidFill>
+                </a:ln>
+                <a:solidFill>
+                  <a:srgbClr val="0462DA"/>
+                </a:solidFill>
+                <a:latin typeface="맑은 고딕" panose="00000800000000000000" pitchFamily="2" charset="-127"/>
+                <a:ea typeface="맑은 고딕" panose="00000800000000000000" pitchFamily="2" charset="-127"/>
+                <a:cs typeface="맑은 고딕" panose="00000800000000000000" pitchFamily="2" charset="-127"/>
+              </a:rPr>
+              <a:t>기능 7개 → 29개, 처리시간 30% 단축</a:t>
+            </a:r>
+            <a:r>
+              <a:rPr lang="ko-KR" altLang="en-US" sz="1200" b="1">
+                <a:ln w="12700">
+                  <a:solidFill>
+                    <a:schemeClr val="tx1">
+                      <a:alpha val="0"/>
+                    </a:schemeClr>
+                  </a:solidFill>
+                </a:ln>
+                <a:latin typeface="맑은 고딕" panose="00000800000000000000" pitchFamily="2" charset="-127"/>
+                <a:ea typeface="맑은 고딕" panose="00000800000000000000" pitchFamily="2" charset="-127"/>
+                <a:cs typeface="맑은 고딕" panose="00000800000000000000" pitchFamily="2" charset="-127"/>
+              </a:rPr>
+              <a:t>을 달성하고, 1차 산출물을 인수해 3차 사업계획까지 이어 감 (→ 17, 22, 30, 85)</a:t>
+            </a:r>
+          </a:p>
+        </p:txBody>
+      </p:sp>
+      <p:graphicFrame>
+        <p:nvGraphicFramePr>
+          <p:cNvPr id="30" name="Table 29"/>
+          <p:cNvGraphicFramePr>
+            <a:graphicFrameLocks noGrp="1"/>
+          </p:cNvGraphicFramePr>
+          <p:nvPr/>
+        </p:nvGraphicFramePr>
+        <p:xfrm>
+          <a:off x="316800" y="2358000"/>
+          <a:ext cx="6260400" cy="4507538"/>
+        </p:xfrm>
+        <a:graphic>
+          <a:graphicData uri="http://schemas.openxmlformats.org/drawingml/2006/table">
+            <a:tbl>
+              <a:tblPr firstRow="0" bandRow="0"/>
+              <a:tblGrid>
+                <a:gridCol w="1095570"/>
+                <a:gridCol w="2425905"/>
+                <a:gridCol w="2738925"/>
+              </a:tblGrid>
+              <a:tr h="594000">
+                <a:tc>
+                  <a:txBody>
+                    <a:bodyPr wrap="square"/>
+                    <a:lstStyle/>
+                    <a:p>
+                      <a:pPr algn="ctr">
+                        <a:lnSpc>
+                          <a:spcPct val="115000"/>
+                        </a:lnSpc>
+                        <a:spcBef>
+                          <a:spcPts val="0"/>
+                        </a:spcBef>
+                        <a:spcAft>
+                          <a:spcPts val="0"/>
+                        </a:spcAft>
+                      </a:pPr>
+                      <a:r>
+                        <a:rPr sz="1200" b="1">
+                          <a:solidFill>
+                            <a:srgbClr val="FFFFFF"/>
+                          </a:solidFill>
+                          <a:latin typeface="맑은 고딕"/>
+                          <a:ea typeface="맑은 고딕"/>
+                          <a:cs typeface="맑은 고딕"/>
+                        </a:rPr>
+                        <a:t>구분</a:t>
+                      </a:r>
+                    </a:p>
+                  </a:txBody>
+                  <a:tcPr marL="36000" marR="36000" marT="18000" marB="18000" anchor="ctr">
+                    <a:lnL w="10160">
+                      <a:solidFill>
+                        <a:srgbClr val="C8D3E0"/>
+                      </a:solidFill>
+                    </a:lnL>
+                    <a:lnR w="10160">
+                      <a:solidFill>
+                        <a:srgbClr val="C8D3E0"/>
+                      </a:solidFill>
+                    </a:lnR>
+                    <a:lnT w="10160">
+                      <a:solidFill>
+                        <a:srgbClr val="C8D3E0"/>
+                      </a:solidFill>
+                    </a:lnT>
+                    <a:lnB w="10160">
+                      <a:solidFill>
+                        <a:srgbClr val="C8D3E0"/>
+                      </a:solidFill>
+                    </a:lnB>
+                    <a:solidFill>
+                      <a:srgbClr val="0462DA"/>
+                    </a:solidFill>
+                  </a:tcPr>
+                </a:tc>
+                <a:tc>
+                  <a:txBody>
+                    <a:bodyPr wrap="square"/>
+                    <a:lstStyle/>
+                    <a:p>
+                      <a:pPr algn="ctr">
+                        <a:lnSpc>
+                          <a:spcPct val="115000"/>
+                        </a:lnSpc>
+                        <a:spcBef>
+                          <a:spcPts val="0"/>
+                        </a:spcBef>
+                        <a:spcAft>
+                          <a:spcPts val="0"/>
+                        </a:spcAft>
+                      </a:pPr>
+                      <a:r>
+                        <a:rPr sz="1200" b="1">
+                          <a:solidFill>
+                            <a:srgbClr val="FFFFFF"/>
+                          </a:solidFill>
+                          <a:latin typeface="맑은 고딕"/>
+                          <a:ea typeface="맑은 고딕"/>
+                          <a:cs typeface="맑은 고딕"/>
+                        </a:rPr>
+                        <a:t>1차 사업</a:t>
+                      </a:r>
+                    </a:p>
+                  </a:txBody>
+                  <a:tcPr marL="36000" marR="36000" marT="18000" marB="18000" anchor="ctr">
+                    <a:lnL w="10160">
+                      <a:solidFill>
+                        <a:srgbClr val="C8D3E0"/>
+                      </a:solidFill>
+                    </a:lnL>
+                    <a:lnR w="10160">
+                      <a:solidFill>
+                        <a:srgbClr val="C8D3E0"/>
+                      </a:solidFill>
+                    </a:lnR>
+                    <a:lnT w="10160">
+                      <a:solidFill>
+                        <a:srgbClr val="C8D3E0"/>
+                      </a:solidFill>
+                    </a:lnT>
+                    <a:lnB w="10160">
+                      <a:solidFill>
+                        <a:srgbClr val="C8D3E0"/>
+                      </a:solidFill>
+                    </a:lnB>
+                    <a:solidFill>
+                      <a:srgbClr val="0462DA"/>
+                    </a:solidFill>
+                  </a:tcPr>
+                </a:tc>
+                <a:tc>
+                  <a:txBody>
+                    <a:bodyPr wrap="square"/>
+                    <a:lstStyle/>
+                    <a:p>
+                      <a:pPr algn="ctr">
+                        <a:lnSpc>
+                          <a:spcPct val="115000"/>
+                        </a:lnSpc>
+                        <a:spcBef>
+                          <a:spcPts val="0"/>
+                        </a:spcBef>
+                        <a:spcAft>
+                          <a:spcPts val="0"/>
+                        </a:spcAft>
+                      </a:pPr>
+                      <a:r>
+                        <a:rPr sz="1200" b="1">
+                          <a:solidFill>
+                            <a:srgbClr val="FFFFFF"/>
+                          </a:solidFill>
+                          <a:latin typeface="맑은 고딕"/>
+                          <a:ea typeface="맑은 고딕"/>
+                          <a:cs typeface="맑은 고딕"/>
+                        </a:rPr>
+                        <a:t>2차 사업 (본 사업)</a:t>
+                      </a:r>
+                    </a:p>
+                  </a:txBody>
+                  <a:tcPr marL="36000" marR="36000" marT="18000" marB="18000" anchor="ctr">
+                    <a:lnL w="10160">
+                      <a:solidFill>
+                        <a:srgbClr val="C8D3E0"/>
+                      </a:solidFill>
+                    </a:lnL>
+                    <a:lnR w="10160">
+                      <a:solidFill>
+                        <a:srgbClr val="C8D3E0"/>
+                      </a:solidFill>
+                    </a:lnR>
+                    <a:lnT w="10160">
+                      <a:solidFill>
+                        <a:srgbClr val="C8D3E0"/>
+                      </a:solidFill>
+                    </a:lnT>
+                    <a:lnB w="10160">
+                      <a:solidFill>
+                        <a:srgbClr val="C8D3E0"/>
+                      </a:solidFill>
+                    </a:lnB>
+                    <a:solidFill>
+                      <a:srgbClr val="0462DA"/>
+                    </a:solidFill>
+                  </a:tcPr>
+                </a:tc>
+              </a:tr>
+              <a:tr h="630000">
+                <a:tc>
+                  <a:txBody>
+                    <a:bodyPr wrap="square"/>
+                    <a:lstStyle/>
+                    <a:p>
+                      <a:pPr algn="ctr">
+                        <a:lnSpc>
+                          <a:spcPct val="115000"/>
+                        </a:lnSpc>
+                        <a:spcBef>
+                          <a:spcPts val="0"/>
+                        </a:spcBef>
+                        <a:spcAft>
+                          <a:spcPts val="0"/>
+                        </a:spcAft>
+                      </a:pPr>
+                      <a:r>
+                        <a:rPr sz="1150" b="1">
+                          <a:solidFill>
+                            <a:srgbClr val="222222"/>
+                          </a:solidFill>
+                          <a:latin typeface="맑은 고딕"/>
+                          <a:ea typeface="맑은 고딕"/>
+                          <a:cs typeface="맑은 고딕"/>
+                        </a:rPr>
+                        <a:t>규모 · 기간</a:t>
+                      </a:r>
+                    </a:p>
+                  </a:txBody>
+                  <a:tcPr marL="36000" marR="36000" marT="18000" marB="18000" anchor="ctr">
+                    <a:lnL w="10160">
+                      <a:solidFill>
+                        <a:srgbClr val="C8D3E0"/>
+                      </a:solidFill>
+                    </a:lnL>
+                    <a:lnR w="10160">
+                      <a:solidFill>
+                        <a:srgbClr val="C8D3E0"/>
+                      </a:solidFill>
+                    </a:lnR>
+                    <a:lnT w="10160">
+                      <a:solidFill>
+                        <a:srgbClr val="C8D3E0"/>
+                      </a:solidFill>
+                    </a:lnT>
+                    <a:lnB w="10160">
+                      <a:solidFill>
+                        <a:srgbClr val="C8D3E0"/>
+                      </a:solidFill>
+                    </a:lnB>
+                    <a:solidFill>
+                      <a:srgbClr val="EEF3F9"/>
+                    </a:solidFill>
+                  </a:tcPr>
+                </a:tc>
+                <a:tc>
+                  <a:txBody>
+                    <a:bodyPr wrap="square"/>
+                    <a:lstStyle/>
+                    <a:p>
+                      <a:pPr algn="ctr">
+                        <a:lnSpc>
+                          <a:spcPct val="115000"/>
+                        </a:lnSpc>
+                        <a:spcBef>
+                          <a:spcPts val="0"/>
+                        </a:spcBef>
+                        <a:spcAft>
+                          <a:spcPts val="0"/>
+                        </a:spcAft>
+                      </a:pPr>
+                      <a:r>
+                        <a:rPr sz="1150" b="0">
+                          <a:solidFill>
+                            <a:srgbClr val="222222"/>
+                          </a:solidFill>
+                          <a:latin typeface="맑은 고딕"/>
+                          <a:ea typeface="맑은 고딕"/>
+                          <a:cs typeface="맑은 고딕"/>
+                        </a:rPr>
+                        <a:t>15.33억 원 · 12개월</a:t>
+                      </a:r>
+                    </a:p>
+                  </a:txBody>
+                  <a:tcPr marL="36000" marR="36000" marT="18000" marB="18000" anchor="ctr">
+                    <a:lnL w="10160">
+                      <a:solidFill>
+                        <a:srgbClr val="C8D3E0"/>
+                      </a:solidFill>
+                    </a:lnL>
+                    <a:lnR w="10160">
+                      <a:solidFill>
+                        <a:srgbClr val="C8D3E0"/>
+                      </a:solidFill>
+                    </a:lnR>
+                    <a:lnT w="10160">
+                      <a:solidFill>
+                        <a:srgbClr val="C8D3E0"/>
+                      </a:solidFill>
+                    </a:lnT>
+                    <a:lnB w="10160">
+                      <a:solidFill>
+                        <a:srgbClr val="C8D3E0"/>
+                      </a:solidFill>
+                    </a:lnB>
+                    <a:solidFill>
+                      <a:srgbClr val="FFFFFF"/>
+                    </a:solidFill>
+                  </a:tcPr>
+                </a:tc>
+                <a:tc>
+                  <a:txBody>
+                    <a:bodyPr wrap="square"/>
+                    <a:lstStyle/>
+                    <a:p>
+                      <a:pPr algn="l">
+                        <a:lnSpc>
+                          <a:spcPct val="115000"/>
+                        </a:lnSpc>
+                        <a:spcBef>
+                          <a:spcPts val="0"/>
+                        </a:spcBef>
+                        <a:spcAft>
+                          <a:spcPts val="0"/>
+                        </a:spcAft>
+                      </a:pPr>
+                      <a:r>
+                        <a:rPr sz="1150" b="0">
+                          <a:solidFill>
+                            <a:srgbClr val="222222"/>
+                          </a:solidFill>
+                          <a:latin typeface="맑은 고딕"/>
+                          <a:ea typeface="맑은 고딕"/>
+                          <a:cs typeface="맑은 고딕"/>
+                        </a:rPr>
+                        <a:t>11.35억 원 · 10개월</a:t>
+                      </a:r>
+                    </a:p>
+                  </a:txBody>
+                  <a:tcPr marL="36000" marR="36000" marT="18000" marB="18000" anchor="ctr">
+                    <a:lnL w="10160">
+                      <a:solidFill>
+                        <a:srgbClr val="C8D3E0"/>
+                      </a:solidFill>
+                    </a:lnL>
+                    <a:lnR w="10160">
+                      <a:solidFill>
+                        <a:srgbClr val="C8D3E0"/>
+                      </a:solidFill>
+                    </a:lnR>
+                    <a:lnT w="10160">
+                      <a:solidFill>
+                        <a:srgbClr val="C8D3E0"/>
+                      </a:solidFill>
+                    </a:lnT>
+                    <a:lnB w="10160">
+                      <a:solidFill>
+                        <a:srgbClr val="C8D3E0"/>
+                      </a:solidFill>
+                    </a:lnB>
+                    <a:solidFill>
+                      <a:srgbClr val="FFFFFF"/>
+                    </a:solidFill>
+                  </a:tcPr>
+                </a:tc>
+              </a:tr>
+              <a:tr h="696769">
+                <a:tc>
+                  <a:txBody>
+                    <a:bodyPr wrap="square"/>
+                    <a:lstStyle/>
+                    <a:p>
+                      <a:pPr algn="ctr">
+                        <a:lnSpc>
+                          <a:spcPct val="115000"/>
+                        </a:lnSpc>
+                        <a:spcBef>
+                          <a:spcPts val="0"/>
+                        </a:spcBef>
+                        <a:spcAft>
+                          <a:spcPts val="0"/>
+                        </a:spcAft>
+                      </a:pPr>
+                      <a:r>
+                        <a:rPr sz="1150" b="1">
+                          <a:solidFill>
+                            <a:srgbClr val="222222"/>
+                          </a:solidFill>
+                          <a:latin typeface="맑은 고딕"/>
+                          <a:ea typeface="맑은 고딕"/>
+                          <a:cs typeface="맑은 고딕"/>
+                        </a:rPr>
+                        <a:t>GPU</a:t>
+                      </a:r>
+                    </a:p>
+                  </a:txBody>
+                  <a:tcPr marL="36000" marR="36000" marT="18000" marB="18000" anchor="ctr">
+                    <a:lnL w="10160">
+                      <a:solidFill>
+                        <a:srgbClr val="C8D3E0"/>
+                      </a:solidFill>
+                    </a:lnL>
+                    <a:lnR w="10160">
+                      <a:solidFill>
+                        <a:srgbClr val="C8D3E0"/>
+                      </a:solidFill>
+                    </a:lnR>
+                    <a:lnT w="10160">
+                      <a:solidFill>
+                        <a:srgbClr val="C8D3E0"/>
+                      </a:solidFill>
+                    </a:lnT>
+                    <a:lnB w="10160">
+                      <a:solidFill>
+                        <a:srgbClr val="C8D3E0"/>
+                      </a:solidFill>
+                    </a:lnB>
+                    <a:solidFill>
+                      <a:srgbClr val="EEF3F9"/>
+                    </a:solidFill>
+                  </a:tcPr>
+                </a:tc>
+                <a:tc>
+                  <a:txBody>
+                    <a:bodyPr wrap="square"/>
+                    <a:lstStyle/>
+                    <a:p>
+                      <a:pPr algn="ctr">
+                        <a:lnSpc>
+                          <a:spcPct val="115000"/>
+                        </a:lnSpc>
+                        <a:spcBef>
+                          <a:spcPts val="0"/>
+                        </a:spcBef>
+                        <a:spcAft>
+                          <a:spcPts val="0"/>
+                        </a:spcAft>
+                      </a:pPr>
+                      <a:r>
+                        <a:rPr sz="1150" b="0">
+                          <a:solidFill>
+                            <a:srgbClr val="222222"/>
+                          </a:solidFill>
+                          <a:latin typeface="맑은 고딕"/>
+                          <a:ea typeface="맑은 고딕"/>
+                          <a:cs typeface="맑은 고딕"/>
+                        </a:rPr>
+                        <a:t>80GB 7장 (국가정보자원관리원 대전센터)</a:t>
+                      </a:r>
+                    </a:p>
+                  </a:txBody>
+                  <a:tcPr marL="36000" marR="36000" marT="18000" marB="18000" anchor="ctr">
+                    <a:lnL w="10160">
+                      <a:solidFill>
+                        <a:srgbClr val="C8D3E0"/>
+                      </a:solidFill>
+                    </a:lnL>
+                    <a:lnR w="10160">
+                      <a:solidFill>
+                        <a:srgbClr val="C8D3E0"/>
+                      </a:solidFill>
+                    </a:lnR>
+                    <a:lnT w="10160">
+                      <a:solidFill>
+                        <a:srgbClr val="C8D3E0"/>
+                      </a:solidFill>
+                    </a:lnT>
+                    <a:lnB w="10160">
+                      <a:solidFill>
+                        <a:srgbClr val="C8D3E0"/>
+                      </a:solidFill>
+                    </a:lnB>
+                    <a:solidFill>
+                      <a:srgbClr val="FFFFFF"/>
+                    </a:solidFill>
+                  </a:tcPr>
+                </a:tc>
+                <a:tc>
+                  <a:txBody>
+                    <a:bodyPr wrap="square"/>
+                    <a:lstStyle/>
+                    <a:p>
+                      <a:pPr algn="l">
+                        <a:lnSpc>
+                          <a:spcPct val="115000"/>
+                        </a:lnSpc>
+                        <a:spcBef>
+                          <a:spcPts val="0"/>
+                        </a:spcBef>
+                        <a:spcAft>
+                          <a:spcPts val="0"/>
+                        </a:spcAft>
+                      </a:pPr>
+                      <a:r>
+                        <a:rPr sz="1150" b="0">
+                          <a:solidFill>
+                            <a:srgbClr val="222222"/>
+                          </a:solidFill>
+                          <a:latin typeface="맑은 고딕"/>
+                          <a:ea typeface="맑은 고딕"/>
+                          <a:cs typeface="맑은 고딕"/>
+                        </a:rPr>
+                        <a:t>동일 환경 · 추가 H/W 없음 (VLM은 배치, 그래프는 CPU)</a:t>
+                      </a:r>
+                    </a:p>
+                  </a:txBody>
+                  <a:tcPr marL="36000" marR="36000" marT="18000" marB="18000" anchor="ctr">
+                    <a:lnL w="10160">
+                      <a:solidFill>
+                        <a:srgbClr val="C8D3E0"/>
+                      </a:solidFill>
+                    </a:lnL>
+                    <a:lnR w="10160">
+                      <a:solidFill>
+                        <a:srgbClr val="C8D3E0"/>
+                      </a:solidFill>
+                    </a:lnR>
+                    <a:lnT w="10160">
+                      <a:solidFill>
+                        <a:srgbClr val="C8D3E0"/>
+                      </a:solidFill>
+                    </a:lnT>
+                    <a:lnB w="10160">
+                      <a:solidFill>
+                        <a:srgbClr val="C8D3E0"/>
+                      </a:solidFill>
+                    </a:lnB>
+                    <a:solidFill>
+                      <a:srgbClr val="FFFFFF"/>
+                    </a:solidFill>
+                  </a:tcPr>
+                </a:tc>
+              </a:tr>
+              <a:tr h="630000">
+                <a:tc>
+                  <a:txBody>
+                    <a:bodyPr wrap="square"/>
+                    <a:lstStyle/>
+                    <a:p>
+                      <a:pPr algn="ctr">
+                        <a:lnSpc>
+                          <a:spcPct val="115000"/>
+                        </a:lnSpc>
+                        <a:spcBef>
+                          <a:spcPts val="0"/>
+                        </a:spcBef>
+                        <a:spcAft>
+                          <a:spcPts val="0"/>
+                        </a:spcAft>
+                      </a:pPr>
+                      <a:r>
+                        <a:rPr sz="1150" b="1">
+                          <a:solidFill>
+                            <a:srgbClr val="222222"/>
+                          </a:solidFill>
+                          <a:latin typeface="맑은 고딕"/>
+                          <a:ea typeface="맑은 고딕"/>
+                          <a:cs typeface="맑은 고딕"/>
+                        </a:rPr>
+                        <a:t>언어모델</a:t>
+                      </a:r>
+                    </a:p>
+                  </a:txBody>
+                  <a:tcPr marL="36000" marR="36000" marT="18000" marB="18000" anchor="ctr">
+                    <a:lnL w="10160">
+                      <a:solidFill>
+                        <a:srgbClr val="C8D3E0"/>
+                      </a:solidFill>
+                    </a:lnL>
+                    <a:lnR w="10160">
+                      <a:solidFill>
+                        <a:srgbClr val="C8D3E0"/>
+                      </a:solidFill>
+                    </a:lnR>
+                    <a:lnT w="10160">
+                      <a:solidFill>
+                        <a:srgbClr val="C8D3E0"/>
+                      </a:solidFill>
+                    </a:lnT>
+                    <a:lnB w="10160">
+                      <a:solidFill>
+                        <a:srgbClr val="C8D3E0"/>
+                      </a:solidFill>
+                    </a:lnB>
+                    <a:solidFill>
+                      <a:srgbClr val="EEF3F9"/>
+                    </a:solidFill>
+                  </a:tcPr>
+                </a:tc>
+                <a:tc>
+                  <a:txBody>
+                    <a:bodyPr wrap="square"/>
+                    <a:lstStyle/>
+                    <a:p>
+                      <a:pPr algn="ctr">
+                        <a:lnSpc>
+                          <a:spcPct val="115000"/>
+                        </a:lnSpc>
+                        <a:spcBef>
+                          <a:spcPts val="0"/>
+                        </a:spcBef>
+                        <a:spcAft>
+                          <a:spcPts val="0"/>
+                        </a:spcAft>
+                      </a:pPr>
+                      <a:r>
+                        <a:rPr sz="1150" b="0">
+                          <a:solidFill>
+                            <a:srgbClr val="222222"/>
+                          </a:solidFill>
+                          <a:latin typeface="맑은 고딕"/>
+                          <a:ea typeface="맑은 고딕"/>
+                          <a:cs typeface="맑은 고딕"/>
+                        </a:rPr>
+                        <a:t>27B 이상 온프레미스</a:t>
+                      </a:r>
+                    </a:p>
+                  </a:txBody>
+                  <a:tcPr marL="36000" marR="36000" marT="18000" marB="18000" anchor="ctr">
+                    <a:lnL w="10160">
+                      <a:solidFill>
+                        <a:srgbClr val="C8D3E0"/>
+                      </a:solidFill>
+                    </a:lnL>
+                    <a:lnR w="10160">
+                      <a:solidFill>
+                        <a:srgbClr val="C8D3E0"/>
+                      </a:solidFill>
+                    </a:lnR>
+                    <a:lnT w="10160">
+                      <a:solidFill>
+                        <a:srgbClr val="C8D3E0"/>
+                      </a:solidFill>
+                    </a:lnT>
+                    <a:lnB w="10160">
+                      <a:solidFill>
+                        <a:srgbClr val="C8D3E0"/>
+                      </a:solidFill>
+                    </a:lnB>
+                    <a:solidFill>
+                      <a:srgbClr val="FFFFFF"/>
+                    </a:solidFill>
+                  </a:tcPr>
+                </a:tc>
+                <a:tc>
+                  <a:txBody>
+                    <a:bodyPr wrap="square"/>
+                    <a:lstStyle/>
+                    <a:p>
+                      <a:pPr algn="l">
+                        <a:lnSpc>
+                          <a:spcPct val="115000"/>
+                        </a:lnSpc>
+                        <a:spcBef>
+                          <a:spcPts val="0"/>
+                        </a:spcBef>
+                        <a:spcAft>
+                          <a:spcPts val="0"/>
+                        </a:spcAft>
+                      </a:pPr>
+                      <a:r>
+                        <a:rPr sz="1150" b="0">
+                          <a:solidFill>
+                            <a:srgbClr val="222222"/>
+                          </a:solidFill>
+                          <a:latin typeface="맑은 고딕"/>
+                          <a:ea typeface="맑은 고딕"/>
+                          <a:cs typeface="맑은 고딕"/>
+                        </a:rPr>
+                        <a:t>기존 모델 고도화 · 동일 GPU 수용</a:t>
+                      </a:r>
+                    </a:p>
+                  </a:txBody>
+                  <a:tcPr marL="36000" marR="36000" marT="18000" marB="18000" anchor="ctr">
+                    <a:lnL w="10160">
+                      <a:solidFill>
+                        <a:srgbClr val="C8D3E0"/>
+                      </a:solidFill>
+                    </a:lnL>
+                    <a:lnR w="10160">
+                      <a:solidFill>
+                        <a:srgbClr val="C8D3E0"/>
+                      </a:solidFill>
+                    </a:lnR>
+                    <a:lnT w="10160">
+                      <a:solidFill>
+                        <a:srgbClr val="C8D3E0"/>
+                      </a:solidFill>
+                    </a:lnT>
+                    <a:lnB w="10160">
+                      <a:solidFill>
+                        <a:srgbClr val="C8D3E0"/>
+                      </a:solidFill>
+                    </a:lnB>
+                    <a:solidFill>
+                      <a:srgbClr val="FFFFFF"/>
+                    </a:solidFill>
+                  </a:tcPr>
+                </a:tc>
+              </a:tr>
+              <a:tr h="696769">
+                <a:tc>
+                  <a:txBody>
+                    <a:bodyPr wrap="square"/>
+                    <a:lstStyle/>
+                    <a:p>
+                      <a:pPr algn="ctr">
+                        <a:lnSpc>
+                          <a:spcPct val="115000"/>
+                        </a:lnSpc>
+                        <a:spcBef>
+                          <a:spcPts val="0"/>
+                        </a:spcBef>
+                        <a:spcAft>
+                          <a:spcPts val="0"/>
+                        </a:spcAft>
+                      </a:pPr>
+                      <a:r>
+                        <a:rPr sz="1150" b="1">
+                          <a:solidFill>
+                            <a:srgbClr val="222222"/>
+                          </a:solidFill>
+                          <a:latin typeface="맑은 고딕"/>
+                          <a:ea typeface="맑은 고딕"/>
+                          <a:cs typeface="맑은 고딕"/>
+                        </a:rPr>
+                        <a:t>응답 성능</a:t>
+                      </a:r>
+                    </a:p>
+                  </a:txBody>
+                  <a:tcPr marL="36000" marR="36000" marT="18000" marB="18000" anchor="ctr">
+                    <a:lnL w="10160">
+                      <a:solidFill>
+                        <a:srgbClr val="C8D3E0"/>
+                      </a:solidFill>
+                    </a:lnL>
+                    <a:lnR w="10160">
+                      <a:solidFill>
+                        <a:srgbClr val="C8D3E0"/>
+                      </a:solidFill>
+                    </a:lnR>
+                    <a:lnT w="10160">
+                      <a:solidFill>
+                        <a:srgbClr val="C8D3E0"/>
+                      </a:solidFill>
+                    </a:lnT>
+                    <a:lnB w="10160">
+                      <a:solidFill>
+                        <a:srgbClr val="C8D3E0"/>
+                      </a:solidFill>
+                    </a:lnB>
+                    <a:solidFill>
+                      <a:srgbClr val="EEF3F9"/>
+                    </a:solidFill>
+                  </a:tcPr>
+                </a:tc>
+                <a:tc>
+                  <a:txBody>
+                    <a:bodyPr wrap="square"/>
+                    <a:lstStyle/>
+                    <a:p>
+                      <a:pPr algn="ctr">
+                        <a:lnSpc>
+                          <a:spcPct val="115000"/>
+                        </a:lnSpc>
+                        <a:spcBef>
+                          <a:spcPts val="0"/>
+                        </a:spcBef>
+                        <a:spcAft>
+                          <a:spcPts val="0"/>
+                        </a:spcAft>
+                      </a:pPr>
+                      <a:r>
+                        <a:rPr sz="1150" b="0">
+                          <a:solidFill>
+                            <a:srgbClr val="222222"/>
+                          </a:solidFill>
+                          <a:latin typeface="맑은 고딕"/>
+                          <a:ea typeface="맑은 고딕"/>
+                          <a:cs typeface="맑은 고딕"/>
+                        </a:rPr>
+                        <a:t>응답 시작 3초 · 초안 5초 · 요약 3초</a:t>
+                      </a:r>
+                    </a:p>
+                  </a:txBody>
+                  <a:tcPr marL="36000" marR="36000" marT="18000" marB="18000" anchor="ctr">
+                    <a:lnL w="10160">
+                      <a:solidFill>
+                        <a:srgbClr val="C8D3E0"/>
+                      </a:solidFill>
+                    </a:lnL>
+                    <a:lnR w="10160">
+                      <a:solidFill>
+                        <a:srgbClr val="C8D3E0"/>
+                      </a:solidFill>
+                    </a:lnR>
+                    <a:lnT w="10160">
+                      <a:solidFill>
+                        <a:srgbClr val="C8D3E0"/>
+                      </a:solidFill>
+                    </a:lnT>
+                    <a:lnB w="10160">
+                      <a:solidFill>
+                        <a:srgbClr val="C8D3E0"/>
+                      </a:solidFill>
+                    </a:lnB>
+                    <a:solidFill>
+                      <a:srgbClr val="FFFFFF"/>
+                    </a:solidFill>
+                  </a:tcPr>
+                </a:tc>
+                <a:tc>
+                  <a:txBody>
+                    <a:bodyPr wrap="square"/>
+                    <a:lstStyle/>
+                    <a:p>
+                      <a:pPr algn="l">
+                        <a:lnSpc>
+                          <a:spcPct val="115000"/>
+                        </a:lnSpc>
+                        <a:spcBef>
+                          <a:spcPts val="0"/>
+                        </a:spcBef>
+                        <a:spcAft>
+                          <a:spcPts val="0"/>
+                        </a:spcAft>
+                      </a:pPr>
+                      <a:r>
+                        <a:rPr sz="1150" b="0">
+                          <a:solidFill>
+                            <a:srgbClr val="222222"/>
+                          </a:solidFill>
+                          <a:latin typeface="맑은 고딕"/>
+                          <a:ea typeface="맑은 고딕"/>
+                          <a:cs typeface="맑은 고딕"/>
+                        </a:rPr>
+                        <a:t>1차 실측 대비 30% 이상 단축</a:t>
+                      </a:r>
+                    </a:p>
+                  </a:txBody>
+                  <a:tcPr marL="36000" marR="36000" marT="18000" marB="18000" anchor="ctr">
+                    <a:lnL w="10160">
+                      <a:solidFill>
+                        <a:srgbClr val="C8D3E0"/>
+                      </a:solidFill>
+                    </a:lnL>
+                    <a:lnR w="10160">
+                      <a:solidFill>
+                        <a:srgbClr val="C8D3E0"/>
+                      </a:solidFill>
+                    </a:lnR>
+                    <a:lnT w="10160">
+                      <a:solidFill>
+                        <a:srgbClr val="C8D3E0"/>
+                      </a:solidFill>
+                    </a:lnT>
+                    <a:lnB w="10160">
+                      <a:solidFill>
+                        <a:srgbClr val="C8D3E0"/>
+                      </a:solidFill>
+                    </a:lnB>
+                    <a:solidFill>
+                      <a:srgbClr val="FFFFFF"/>
+                    </a:solidFill>
+                  </a:tcPr>
+                </a:tc>
+              </a:tr>
+              <a:tr h="630000">
+                <a:tc>
+                  <a:txBody>
+                    <a:bodyPr wrap="square"/>
+                    <a:lstStyle/>
+                    <a:p>
+                      <a:pPr algn="ctr">
+                        <a:lnSpc>
+                          <a:spcPct val="115000"/>
+                        </a:lnSpc>
+                        <a:spcBef>
+                          <a:spcPts val="0"/>
+                        </a:spcBef>
+                        <a:spcAft>
+                          <a:spcPts val="0"/>
+                        </a:spcAft>
+                      </a:pPr>
+                      <a:r>
+                        <a:rPr sz="1150" b="1">
+                          <a:solidFill>
+                            <a:srgbClr val="222222"/>
+                          </a:solidFill>
+                          <a:latin typeface="맑은 고딕"/>
+                          <a:ea typeface="맑은 고딕"/>
+                          <a:cs typeface="맑은 고딕"/>
+                        </a:rPr>
+                        <a:t>첨부 · 기능</a:t>
+                      </a:r>
+                    </a:p>
+                  </a:txBody>
+                  <a:tcPr marL="36000" marR="36000" marT="18000" marB="18000" anchor="ctr">
+                    <a:lnL w="10160">
+                      <a:solidFill>
+                        <a:srgbClr val="C8D3E0"/>
+                      </a:solidFill>
+                    </a:lnL>
+                    <a:lnR w="10160">
+                      <a:solidFill>
+                        <a:srgbClr val="C8D3E0"/>
+                      </a:solidFill>
+                    </a:lnR>
+                    <a:lnT w="10160">
+                      <a:solidFill>
+                        <a:srgbClr val="C8D3E0"/>
+                      </a:solidFill>
+                    </a:lnT>
+                    <a:lnB w="10160">
+                      <a:solidFill>
+                        <a:srgbClr val="C8D3E0"/>
+                      </a:solidFill>
+                    </a:lnB>
+                    <a:solidFill>
+                      <a:srgbClr val="EEF3F9"/>
+                    </a:solidFill>
+                  </a:tcPr>
+                </a:tc>
+                <a:tc>
+                  <a:txBody>
+                    <a:bodyPr wrap="square"/>
+                    <a:lstStyle/>
+                    <a:p>
+                      <a:pPr algn="ctr">
+                        <a:lnSpc>
+                          <a:spcPct val="115000"/>
+                        </a:lnSpc>
+                        <a:spcBef>
+                          <a:spcPts val="0"/>
+                        </a:spcBef>
+                        <a:spcAft>
+                          <a:spcPts val="0"/>
+                        </a:spcAft>
+                      </a:pPr>
+                      <a:r>
+                        <a:rPr sz="1150" b="0">
+                          <a:solidFill>
+                            <a:srgbClr val="222222"/>
+                          </a:solidFill>
+                          <a:latin typeface="맑은 고딕"/>
+                          <a:ea typeface="맑은 고딕"/>
+                          <a:cs typeface="맑은 고딕"/>
+                        </a:rPr>
+                        <a:t>7개 · 500MB / 7개 기능</a:t>
+                      </a:r>
+                    </a:p>
+                  </a:txBody>
+                  <a:tcPr marL="36000" marR="36000" marT="18000" marB="18000" anchor="ctr">
+                    <a:lnL w="10160">
+                      <a:solidFill>
+                        <a:srgbClr val="C8D3E0"/>
+                      </a:solidFill>
+                    </a:lnL>
+                    <a:lnR w="10160">
+                      <a:solidFill>
+                        <a:srgbClr val="C8D3E0"/>
+                      </a:solidFill>
+                    </a:lnR>
+                    <a:lnT w="10160">
+                      <a:solidFill>
+                        <a:srgbClr val="C8D3E0"/>
+                      </a:solidFill>
+                    </a:lnT>
+                    <a:lnB w="10160">
+                      <a:solidFill>
+                        <a:srgbClr val="C8D3E0"/>
+                      </a:solidFill>
+                    </a:lnB>
+                    <a:solidFill>
+                      <a:srgbClr val="FFFFFF"/>
+                    </a:solidFill>
+                  </a:tcPr>
+                </a:tc>
+                <a:tc>
+                  <a:txBody>
+                    <a:bodyPr wrap="square"/>
+                    <a:lstStyle/>
+                    <a:p>
+                      <a:pPr algn="l">
+                        <a:lnSpc>
+                          <a:spcPct val="115000"/>
+                        </a:lnSpc>
+                        <a:spcBef>
+                          <a:spcPts val="0"/>
+                        </a:spcBef>
+                        <a:spcAft>
+                          <a:spcPts val="0"/>
+                        </a:spcAft>
+                      </a:pPr>
+                      <a:r>
+                        <a:rPr sz="1150" b="0">
+                          <a:solidFill>
+                            <a:srgbClr val="222222"/>
+                          </a:solidFill>
+                          <a:latin typeface="맑은 고딕"/>
+                          <a:ea typeface="맑은 고딕"/>
+                          <a:cs typeface="맑은 고딕"/>
+                        </a:rPr>
+                        <a:t>10개 · 1GB / 29개 기능</a:t>
+                      </a:r>
+                    </a:p>
+                  </a:txBody>
+                  <a:tcPr marL="36000" marR="36000" marT="18000" marB="18000" anchor="ctr">
+                    <a:lnL w="10160">
+                      <a:solidFill>
+                        <a:srgbClr val="C8D3E0"/>
+                      </a:solidFill>
+                    </a:lnL>
+                    <a:lnR w="10160">
+                      <a:solidFill>
+                        <a:srgbClr val="C8D3E0"/>
+                      </a:solidFill>
+                    </a:lnR>
+                    <a:lnT w="10160">
+                      <a:solidFill>
+                        <a:srgbClr val="C8D3E0"/>
+                      </a:solidFill>
+                    </a:lnT>
+                    <a:lnB w="10160">
+                      <a:solidFill>
+                        <a:srgbClr val="C8D3E0"/>
+                      </a:solidFill>
+                    </a:lnB>
+                    <a:solidFill>
+                      <a:srgbClr val="FFFFFF"/>
+                    </a:solidFill>
+                  </a:tcPr>
+                </a:tc>
+              </a:tr>
+              <a:tr h="630000">
+                <a:tc>
+                  <a:txBody>
+                    <a:bodyPr wrap="square"/>
+                    <a:lstStyle/>
+                    <a:p>
+                      <a:pPr algn="ctr">
+                        <a:lnSpc>
+                          <a:spcPct val="115000"/>
+                        </a:lnSpc>
+                        <a:spcBef>
+                          <a:spcPts val="0"/>
+                        </a:spcBef>
+                        <a:spcAft>
+                          <a:spcPts val="0"/>
+                        </a:spcAft>
+                      </a:pPr>
+                      <a:r>
+                        <a:rPr sz="1150" b="1">
+                          <a:solidFill>
+                            <a:srgbClr val="222222"/>
+                          </a:solidFill>
+                          <a:latin typeface="맑은 고딕"/>
+                          <a:ea typeface="맑은 고딕"/>
+                          <a:cs typeface="맑은 고딕"/>
+                        </a:rPr>
+                        <a:t>평가셋</a:t>
+                      </a:r>
+                    </a:p>
+                  </a:txBody>
+                  <a:tcPr marL="36000" marR="36000" marT="18000" marB="18000" anchor="ctr">
+                    <a:lnL w="10160">
+                      <a:solidFill>
+                        <a:srgbClr val="C8D3E0"/>
+                      </a:solidFill>
+                    </a:lnL>
+                    <a:lnR w="10160">
+                      <a:solidFill>
+                        <a:srgbClr val="C8D3E0"/>
+                      </a:solidFill>
+                    </a:lnR>
+                    <a:lnT w="10160">
+                      <a:solidFill>
+                        <a:srgbClr val="C8D3E0"/>
+                      </a:solidFill>
+                    </a:lnT>
+                    <a:lnB w="10160">
+                      <a:solidFill>
+                        <a:srgbClr val="C8D3E0"/>
+                      </a:solidFill>
+                    </a:lnB>
+                    <a:solidFill>
+                      <a:srgbClr val="EEF3F9"/>
+                    </a:solidFill>
+                  </a:tcPr>
+                </a:tc>
+                <a:tc>
+                  <a:txBody>
+                    <a:bodyPr wrap="square"/>
+                    <a:lstStyle/>
+                    <a:p>
+                      <a:pPr algn="ctr">
+                        <a:lnSpc>
+                          <a:spcPct val="115000"/>
+                        </a:lnSpc>
+                        <a:spcBef>
+                          <a:spcPts val="0"/>
+                        </a:spcBef>
+                        <a:spcAft>
+                          <a:spcPts val="0"/>
+                        </a:spcAft>
+                      </a:pPr>
+                      <a:r>
+                        <a:rPr sz="1150" b="0">
+                          <a:solidFill>
+                            <a:srgbClr val="222222"/>
+                          </a:solidFill>
+                          <a:latin typeface="맑은 고딕"/>
+                          <a:ea typeface="맑은 고딕"/>
+                          <a:cs typeface="맑은 고딕"/>
+                        </a:rPr>
+                        <a:t>RAG 평가셋 약 100건</a:t>
+                      </a:r>
+                    </a:p>
+                  </a:txBody>
+                  <a:tcPr marL="36000" marR="36000" marT="18000" marB="18000" anchor="ctr">
+                    <a:lnL w="10160">
+                      <a:solidFill>
+                        <a:srgbClr val="C8D3E0"/>
+                      </a:solidFill>
+                    </a:lnL>
+                    <a:lnR w="10160">
+                      <a:solidFill>
+                        <a:srgbClr val="C8D3E0"/>
+                      </a:solidFill>
+                    </a:lnR>
+                    <a:lnT w="10160">
+                      <a:solidFill>
+                        <a:srgbClr val="C8D3E0"/>
+                      </a:solidFill>
+                    </a:lnT>
+                    <a:lnB w="10160">
+                      <a:solidFill>
+                        <a:srgbClr val="C8D3E0"/>
+                      </a:solidFill>
+                    </a:lnB>
+                    <a:solidFill>
+                      <a:srgbClr val="FFFFFF"/>
+                    </a:solidFill>
+                  </a:tcPr>
+                </a:tc>
+                <a:tc>
+                  <a:txBody>
+                    <a:bodyPr wrap="square"/>
+                    <a:lstStyle/>
+                    <a:p>
+                      <a:pPr algn="l">
+                        <a:lnSpc>
+                          <a:spcPct val="115000"/>
+                        </a:lnSpc>
+                        <a:spcBef>
+                          <a:spcPts val="0"/>
+                        </a:spcBef>
+                        <a:spcAft>
+                          <a:spcPts val="0"/>
+                        </a:spcAft>
+                      </a:pPr>
+                      <a:r>
+                        <a:rPr sz="1150" b="0">
+                          <a:solidFill>
+                            <a:srgbClr val="222222"/>
+                          </a:solidFill>
+                          <a:latin typeface="맑은 고딕"/>
+                          <a:ea typeface="맑은 고딕"/>
+                          <a:cs typeface="맑은 고딕"/>
+                        </a:rPr>
+                        <a:t>자체 통합테스트 1,250건 이상</a:t>
+                      </a:r>
+                    </a:p>
+                  </a:txBody>
+                  <a:tcPr marL="36000" marR="36000" marT="18000" marB="18000" anchor="ctr">
+                    <a:lnL w="10160">
+                      <a:solidFill>
+                        <a:srgbClr val="C8D3E0"/>
+                      </a:solidFill>
+                    </a:lnL>
+                    <a:lnR w="10160">
+                      <a:solidFill>
+                        <a:srgbClr val="C8D3E0"/>
+                      </a:solidFill>
+                    </a:lnR>
+                    <a:lnT w="10160">
+                      <a:solidFill>
+                        <a:srgbClr val="C8D3E0"/>
+                      </a:solidFill>
+                    </a:lnT>
+                    <a:lnB w="10160">
+                      <a:solidFill>
+                        <a:srgbClr val="C8D3E0"/>
+                      </a:solidFill>
+                    </a:lnB>
+                    <a:solidFill>
+                      <a:srgbClr val="FFFFFF"/>
+                    </a:solidFill>
+                  </a:tcPr>
+                </a:tc>
+              </a:tr>
+            </a:tbl>
+          </a:graphicData>
+        </a:graphic>
+      </p:graphicFrame>
+      <p:sp>
+        <p:nvSpPr>
+          <p:cNvPr id="31" name="Rectangle 30"/>
+          <p:cNvSpPr/>
+          <p:nvPr/>
+        </p:nvSpPr>
+        <p:spPr>
+          <a:xfrm>
+            <a:off x="316800" y="6973538"/>
+            <a:ext cx="2026800" cy="1332000"/>
+          </a:xfrm>
+          <a:prstGeom prst="rect">
+            <a:avLst/>
+          </a:prstGeom>
+          <a:solidFill>
+            <a:srgbClr val="F4F8FC"/>
+          </a:solidFill>
+          <a:ln w="12700">
+            <a:solidFill>
+              <a:srgbClr val="BADBE8"/>
+            </a:solidFill>
+          </a:ln>
+          <a:effectLst/>
+        </p:spPr>
+        <p:style>
+          <a:lnRef idx="1">
+            <a:schemeClr val="accent1"/>
+          </a:lnRef>
+          <a:fillRef idx="3">
+            <a:schemeClr val="accent1"/>
+          </a:fillRef>
+          <a:effectRef idx="2">
+            <a:schemeClr val="accent1"/>
+          </a:effectRef>
+          <a:fontRef idx="minor">
+            <a:schemeClr val="lt1"/>
+          </a:fontRef>
+        </p:style>
+        <p:txBody>
+          <a:bodyPr rtlCol="0" anchor="ctr" wrap="square"/>
+          <a:lstStyle/>
+          <a:p>
+            <a:pPr algn="ctr"/>
+          </a:p>
+        </p:txBody>
+      </p:sp>
+      <p:sp>
+        <p:nvSpPr>
+          <p:cNvPr id="32" name="Rectangle 31"/>
+          <p:cNvSpPr/>
+          <p:nvPr/>
+        </p:nvSpPr>
+        <p:spPr>
+          <a:xfrm>
+            <a:off x="316800" y="6973538"/>
+            <a:ext cx="2026800" cy="234000"/>
+          </a:xfrm>
+          <a:prstGeom prst="rect">
+            <a:avLst/>
+          </a:prstGeom>
+          <a:solidFill>
+            <a:srgbClr val="DCE9F7"/>
+          </a:solidFill>
+          <a:ln>
+            <a:noFill/>
+          </a:ln>
+          <a:effectLst/>
+        </p:spPr>
+        <p:style>
+          <a:lnRef idx="1">
+            <a:schemeClr val="accent1"/>
+          </a:lnRef>
+          <a:fillRef idx="3">
+            <a:schemeClr val="accent1"/>
+          </a:fillRef>
+          <a:effectRef idx="2">
+            <a:schemeClr val="accent1"/>
+          </a:effectRef>
+          <a:fontRef idx="minor">
+            <a:schemeClr val="lt1"/>
+          </a:fontRef>
+        </p:style>
+        <p:txBody>
+          <a:bodyPr rtlCol="0" anchor="ctr" wrap="square" lIns="43200" rIns="43200" tIns="43200" bIns="43200"/>
+          <a:lstStyle/>
+          <a:p>
+            <a:pPr algn="ctr">
+              <a:lnSpc>
+                <a:spcPct val="115000"/>
+              </a:lnSpc>
+              <a:spcBef>
+                <a:spcPts val="0"/>
+              </a:spcBef>
+              <a:spcAft>
+                <a:spcPts val="0"/>
+              </a:spcAft>
+            </a:pPr>
+            <a:r>
+              <a:rPr sz="1000" b="1">
+                <a:solidFill>
+                  <a:srgbClr val="194EA7"/>
+                </a:solidFill>
+                <a:latin typeface="맑은 고딕"/>
+                <a:ea typeface="맑은 고딕"/>
+                <a:cs typeface="맑은 고딕"/>
+              </a:rPr>
+              <a:t>1차 산출물 인수 (착수 2주)</a:t>
+            </a:r>
+          </a:p>
+        </p:txBody>
+      </p:sp>
+      <p:sp>
+        <p:nvSpPr>
+          <p:cNvPr id="33" name="TextBox 32"/>
+          <p:cNvSpPr txBox="1"/>
+          <p:nvPr/>
+        </p:nvSpPr>
+        <p:spPr>
+          <a:xfrm>
+            <a:off x="352800" y="7232738"/>
+            <a:ext cx="1954800" cy="1080000"/>
+          </a:xfrm>
+          <a:prstGeom prst="rect">
+            <a:avLst/>
+          </a:prstGeom>
+          <a:noFill/>
+        </p:spPr>
+        <p:txBody>
+          <a:bodyPr wrap="square" lIns="18000" rIns="18000" tIns="18000" bIns="18000" anchor="t">
+            <a:noAutofit/>
+          </a:bodyPr>
+          <a:lstStyle/>
+          <a:p>
+            <a:pPr>
+              <a:lnSpc>
+                <a:spcPct val="130000"/>
+              </a:lnSpc>
+              <a:spcBef>
+                <a:spcPts val="0"/>
+              </a:spcBef>
+              <a:spcAft>
+                <a:spcPts val="200"/>
+              </a:spcAft>
+            </a:pPr>
+            <a:r>
+              <a:rPr sz="1200" b="0">
+                <a:solidFill>
+                  <a:srgbClr val="000000"/>
+                </a:solidFill>
+                <a:latin typeface="맑은 고딕"/>
+                <a:ea typeface="맑은 고딕"/>
+                <a:cs typeface="맑은 고딕"/>
+              </a:rPr>
+              <a:t>소스 · 설계서 · 모델 · 프롬프트 · 평가셋 · 라이선스 현황 점검, 형상 기준선 등록</a:t>
+            </a:r>
+          </a:p>
+        </p:txBody>
+      </p:sp>
+      <p:sp>
+        <p:nvSpPr>
+          <p:cNvPr id="34" name="Rectangle 33"/>
+          <p:cNvSpPr/>
+          <p:nvPr/>
+        </p:nvSpPr>
+        <p:spPr>
+          <a:xfrm>
+            <a:off x="2433600" y="6973538"/>
+            <a:ext cx="2026800" cy="1332000"/>
+          </a:xfrm>
+          <a:prstGeom prst="rect">
+            <a:avLst/>
+          </a:prstGeom>
+          <a:solidFill>
+            <a:srgbClr val="F4F8FC"/>
+          </a:solidFill>
+          <a:ln w="12700">
+            <a:solidFill>
+              <a:srgbClr val="BADBE8"/>
+            </a:solidFill>
+          </a:ln>
+          <a:effectLst/>
+        </p:spPr>
+        <p:style>
+          <a:lnRef idx="1">
+            <a:schemeClr val="accent1"/>
+          </a:lnRef>
+          <a:fillRef idx="3">
+            <a:schemeClr val="accent1"/>
+          </a:fillRef>
+          <a:effectRef idx="2">
+            <a:schemeClr val="accent1"/>
+          </a:effectRef>
+          <a:fontRef idx="minor">
+            <a:schemeClr val="lt1"/>
+          </a:fontRef>
+        </p:style>
+        <p:txBody>
+          <a:bodyPr rtlCol="0" anchor="ctr" wrap="square"/>
+          <a:lstStyle/>
+          <a:p>
+            <a:pPr algn="ctr"/>
+          </a:p>
+        </p:txBody>
+      </p:sp>
+      <p:sp>
+        <p:nvSpPr>
+          <p:cNvPr id="35" name="Rectangle 34"/>
+          <p:cNvSpPr/>
+          <p:nvPr/>
+        </p:nvSpPr>
+        <p:spPr>
+          <a:xfrm>
+            <a:off x="2433600" y="6973538"/>
+            <a:ext cx="2026800" cy="234000"/>
+          </a:xfrm>
+          <a:prstGeom prst="rect">
+            <a:avLst/>
+          </a:prstGeom>
+          <a:solidFill>
+            <a:srgbClr val="DCE9F7"/>
+          </a:solidFill>
+          <a:ln>
+            <a:noFill/>
+          </a:ln>
+          <a:effectLst/>
+        </p:spPr>
+        <p:style>
+          <a:lnRef idx="1">
+            <a:schemeClr val="accent1"/>
+          </a:lnRef>
+          <a:fillRef idx="3">
+            <a:schemeClr val="accent1"/>
+          </a:fillRef>
+          <a:effectRef idx="2">
+            <a:schemeClr val="accent1"/>
+          </a:effectRef>
+          <a:fontRef idx="minor">
+            <a:schemeClr val="lt1"/>
+          </a:fontRef>
+        </p:style>
+        <p:txBody>
+          <a:bodyPr rtlCol="0" anchor="ctr" wrap="square" lIns="43200" rIns="43200" tIns="43200" bIns="43200"/>
+          <a:lstStyle/>
+          <a:p>
+            <a:pPr algn="ctr">
+              <a:lnSpc>
+                <a:spcPct val="115000"/>
+              </a:lnSpc>
+              <a:spcBef>
+                <a:spcPts val="0"/>
+              </a:spcBef>
+              <a:spcAft>
+                <a:spcPts val="0"/>
+              </a:spcAft>
+            </a:pPr>
+            <a:r>
+              <a:rPr sz="1000" b="1">
+                <a:solidFill>
+                  <a:srgbClr val="194EA7"/>
+                </a:solidFill>
+                <a:latin typeface="맑은 고딕"/>
+                <a:ea typeface="맑은 고딕"/>
+                <a:cs typeface="맑은 고딕"/>
+              </a:rPr>
+              <a:t>책임 구분</a:t>
+            </a:r>
+          </a:p>
+        </p:txBody>
+      </p:sp>
+      <p:sp>
+        <p:nvSpPr>
+          <p:cNvPr id="36" name="TextBox 35"/>
+          <p:cNvSpPr txBox="1"/>
+          <p:nvPr/>
+        </p:nvSpPr>
+        <p:spPr>
+          <a:xfrm>
+            <a:off x="2469600" y="7232738"/>
+            <a:ext cx="1954800" cy="1080000"/>
+          </a:xfrm>
+          <a:prstGeom prst="rect">
+            <a:avLst/>
+          </a:prstGeom>
+          <a:noFill/>
+        </p:spPr>
+        <p:txBody>
+          <a:bodyPr wrap="square" lIns="18000" rIns="18000" tIns="18000" bIns="18000" anchor="t">
+            <a:noAutofit/>
+          </a:bodyPr>
+          <a:lstStyle/>
+          <a:p>
+            <a:pPr>
+              <a:lnSpc>
+                <a:spcPct val="130000"/>
+              </a:lnSpc>
+              <a:spcBef>
+                <a:spcPts val="0"/>
+              </a:spcBef>
+              <a:spcAft>
+                <a:spcPts val="200"/>
+              </a:spcAft>
+            </a:pPr>
+            <a:r>
+              <a:rPr sz="1200" b="0">
+                <a:solidFill>
+                  <a:srgbClr val="000000"/>
+                </a:solidFill>
+                <a:latin typeface="맑은 고딕"/>
+                <a:ea typeface="맑은 고딕"/>
+                <a:cs typeface="맑은 고딕"/>
+              </a:rPr>
+              <a:t>기준선 이전 결함은 1차 하자보수, 2차 변경분은 당사 조치</a:t>
+            </a:r>
+          </a:p>
+        </p:txBody>
+      </p:sp>
+      <p:sp>
+        <p:nvSpPr>
+          <p:cNvPr id="37" name="Rectangle 36"/>
+          <p:cNvSpPr/>
+          <p:nvPr/>
+        </p:nvSpPr>
+        <p:spPr>
+          <a:xfrm>
+            <a:off x="4550400" y="6973538"/>
+            <a:ext cx="2026800" cy="1332000"/>
+          </a:xfrm>
+          <a:prstGeom prst="rect">
+            <a:avLst/>
+          </a:prstGeom>
+          <a:solidFill>
+            <a:srgbClr val="F4F8FC"/>
+          </a:solidFill>
+          <a:ln w="12700">
+            <a:solidFill>
+              <a:srgbClr val="BADBE8"/>
+            </a:solidFill>
+          </a:ln>
+          <a:effectLst/>
+        </p:spPr>
+        <p:style>
+          <a:lnRef idx="1">
+            <a:schemeClr val="accent1"/>
+          </a:lnRef>
+          <a:fillRef idx="3">
+            <a:schemeClr val="accent1"/>
+          </a:fillRef>
+          <a:effectRef idx="2">
+            <a:schemeClr val="accent1"/>
+          </a:effectRef>
+          <a:fontRef idx="minor">
+            <a:schemeClr val="lt1"/>
+          </a:fontRef>
+        </p:style>
+        <p:txBody>
+          <a:bodyPr rtlCol="0" anchor="ctr" wrap="square"/>
+          <a:lstStyle/>
+          <a:p>
+            <a:pPr algn="ctr"/>
+          </a:p>
+        </p:txBody>
+      </p:sp>
+      <p:sp>
+        <p:nvSpPr>
+          <p:cNvPr id="38" name="Rectangle 37"/>
+          <p:cNvSpPr/>
+          <p:nvPr/>
+        </p:nvSpPr>
+        <p:spPr>
+          <a:xfrm>
+            <a:off x="4550400" y="6973538"/>
+            <a:ext cx="2026800" cy="234000"/>
+          </a:xfrm>
+          <a:prstGeom prst="rect">
+            <a:avLst/>
+          </a:prstGeom>
+          <a:solidFill>
+            <a:srgbClr val="DCE9F7"/>
+          </a:solidFill>
+          <a:ln>
+            <a:noFill/>
+          </a:ln>
+          <a:effectLst/>
+        </p:spPr>
+        <p:style>
+          <a:lnRef idx="1">
+            <a:schemeClr val="accent1"/>
+          </a:lnRef>
+          <a:fillRef idx="3">
+            <a:schemeClr val="accent1"/>
+          </a:fillRef>
+          <a:effectRef idx="2">
+            <a:schemeClr val="accent1"/>
+          </a:effectRef>
+          <a:fontRef idx="minor">
+            <a:schemeClr val="lt1"/>
+          </a:fontRef>
+        </p:style>
+        <p:txBody>
+          <a:bodyPr rtlCol="0" anchor="ctr" wrap="square" lIns="43200" rIns="43200" tIns="43200" bIns="43200"/>
+          <a:lstStyle/>
+          <a:p>
+            <a:pPr algn="ctr">
+              <a:lnSpc>
+                <a:spcPct val="115000"/>
+              </a:lnSpc>
+              <a:spcBef>
+                <a:spcPts val="0"/>
+              </a:spcBef>
+              <a:spcAft>
+                <a:spcPts val="0"/>
+              </a:spcAft>
+            </a:pPr>
+            <a:r>
+              <a:rPr sz="1000" b="1">
+                <a:solidFill>
+                  <a:srgbClr val="194EA7"/>
+                </a:solidFill>
+                <a:latin typeface="맑은 고딕"/>
+                <a:ea typeface="맑은 고딕"/>
+                <a:cs typeface="맑은 고딕"/>
+              </a:rPr>
+              <a:t>3차 연계 (CSR-001)</a:t>
+            </a:r>
+          </a:p>
+        </p:txBody>
+      </p:sp>
+      <p:sp>
+        <p:nvSpPr>
+          <p:cNvPr id="39" name="TextBox 38"/>
+          <p:cNvSpPr txBox="1"/>
+          <p:nvPr/>
+        </p:nvSpPr>
+        <p:spPr>
+          <a:xfrm>
+            <a:off x="4586400" y="7232738"/>
+            <a:ext cx="1954800" cy="1080000"/>
+          </a:xfrm>
+          <a:prstGeom prst="rect">
+            <a:avLst/>
+          </a:prstGeom>
+          <a:noFill/>
+        </p:spPr>
+        <p:txBody>
+          <a:bodyPr wrap="square" lIns="18000" rIns="18000" tIns="18000" bIns="18000" anchor="t">
+            <a:noAutofit/>
+          </a:bodyPr>
+          <a:lstStyle/>
+          <a:p>
+            <a:pPr>
+              <a:lnSpc>
+                <a:spcPct val="130000"/>
+              </a:lnSpc>
+              <a:spcBef>
+                <a:spcPts val="0"/>
+              </a:spcBef>
+              <a:spcAft>
+                <a:spcPts val="200"/>
+              </a:spcAft>
+            </a:pPr>
+            <a:r>
+              <a:rPr sz="1200" b="0">
+                <a:solidFill>
+                  <a:srgbClr val="000000"/>
+                </a:solidFill>
+                <a:latin typeface="맑은 고딕"/>
+                <a:ea typeface="맑은 고딕"/>
+                <a:cs typeface="맑은 고딕"/>
+              </a:rPr>
+              <a:t>개선 요구 · 성능 결과 분석 → 3차 사업계획 · 제안요청서(안) 작성</a:t>
+            </a:r>
+          </a:p>
+        </p:txBody>
+      </p:sp>
+      <p:sp>
+        <p:nvSpPr>
+          <p:cNvPr id="40" name="Rectangle 39"/>
+          <p:cNvSpPr/>
+          <p:nvPr/>
+        </p:nvSpPr>
+        <p:spPr>
+          <a:xfrm>
+            <a:off x="2988000" y="9630000"/>
+            <a:ext cx="882000" cy="270000"/>
+          </a:xfrm>
+          <a:prstGeom prst="rect">
+            <a:avLst/>
+          </a:prstGeom>
+          <a:solidFill>
+            <a:srgbClr val="FFFFFF"/>
+          </a:solidFill>
+          <a:ln>
+            <a:noFill/>
+          </a:ln>
+          <a:effectLst/>
+        </p:spPr>
+        <p:style>
+          <a:lnRef idx="1">
+            <a:schemeClr val="accent1"/>
+          </a:lnRef>
+          <a:fillRef idx="3">
+            <a:schemeClr val="accent1"/>
+          </a:fillRef>
+          <a:effectRef idx="2">
+            <a:schemeClr val="accent1"/>
+          </a:effectRef>
+          <a:fontRef idx="minor">
+            <a:schemeClr val="lt1"/>
+          </a:fontRef>
+        </p:style>
+        <p:txBody>
+          <a:bodyPr rtlCol="0" anchor="ctr" wrap="square"/>
+          <a:lstStyle/>
+          <a:p>
+            <a:pPr algn="ctr"/>
+          </a:p>
+        </p:txBody>
+      </p:sp>
+      <p:sp>
+        <p:nvSpPr>
+          <p:cNvPr id="41" name="TextBox 40"/>
+          <p:cNvSpPr txBox="1"/>
+          <p:nvPr/>
+        </p:nvSpPr>
+        <p:spPr>
+          <a:xfrm>
+            <a:off x="2700000" y="9648000"/>
+            <a:ext cx="1458000" cy="234000"/>
+          </a:xfrm>
+          <a:prstGeom prst="rect">
+            <a:avLst/>
+          </a:prstGeom>
+          <a:noFill/>
+        </p:spPr>
+        <p:txBody>
+          <a:bodyPr wrap="square" lIns="0" rIns="0" tIns="0" bIns="0" anchor="ctr">
+            <a:noAutofit/>
+          </a:bodyPr>
+          <a:lstStyle/>
+          <a:p>
+            <a:pPr algn="ctr">
+              <a:lnSpc>
+                <a:spcPct val="120000"/>
+              </a:lnSpc>
+              <a:spcBef>
+                <a:spcPts val="0"/>
+              </a:spcBef>
+              <a:spcAft>
+                <a:spcPts val="0"/>
+              </a:spcAft>
+            </a:pPr>
+            <a:r>
+              <a:rPr sz="1000" b="0">
+                <a:solidFill>
+                  <a:srgbClr val="404040"/>
+                </a:solidFill>
+                <a:latin typeface="맑은 고딕"/>
+                <a:ea typeface="맑은 고딕"/>
+                <a:cs typeface="맑은 고딕"/>
+              </a:rPr>
+              <a:t>6</a:t>
+            </a:r>
+          </a:p>
+        </p:txBody>
+      </p:sp>
+    </p:spTree>
+  </p:cSld>
+  <p:clrMapOvr>
+    <a:masterClrMapping/>
+  </p:clrMapOvr>
+</p:sld>
+</file>
+
+<file path=ppt/slides/slide12.xml><?xml version="1.0" encoding="utf-8"?>
+<p:sld xmlns:a="http://schemas.openxmlformats.org/drawingml/2006/main" xmlns:p="http://schemas.openxmlformats.org/presentationml/2006/main" xmlns:r="http://schemas.openxmlformats.org/officeDocument/2006/relationships">
+  <p:cSld>
+    <p:spTree>
+      <p:nvGrpSpPr>
+        <p:cNvPr id="1" name=""/>
+        <p:cNvGrpSpPr/>
+        <p:nvPr/>
+      </p:nvGrpSpPr>
+      <p:grpSpPr/>
+      <p:sp>
+        <p:nvSpPr>
+          <p:cNvPr id="10" name="텍스트 개체 틀 9">
+            <a:extLst>
+              <a:ext uri="{FF2B5EF4-FFF2-40B4-BE49-F238E27FC236}">
+                <a16:creationId xmlns:a16="http://schemas.microsoft.com/office/drawing/2014/main" id="{D9F520BA-26D9-1D94-37C1-390B16677E03}"/>
+              </a:ext>
+            </a:extLst>
+          </p:cNvPr>
+          <p:cNvSpPr>
+            <a:spLocks noGrp="1"/>
+          </p:cNvSpPr>
+          <p:nvPr>
+            <p:ph type="body" sz="quarter" idx="10"/>
+          </p:nvPr>
+        </p:nvSpPr>
+        <p:spPr>
+          <a:xfrm>
+            <a:off x="302559" y="229408"/>
+            <a:ext cx="5318423" cy="320088"/>
+          </a:xfrm>
+        </p:spPr>
+        <p:txBody>
+          <a:bodyPr/>
+          <a:lstStyle/>
+          <a:p>
+            <a:r>
+              <a:rPr lang="en-US" altLang="ko-KR" sz="1600">
+                <a:solidFill>
+                  <a:schemeClr val="tx1"/>
+                </a:solidFill>
+              </a:rPr>
+              <a:t>2. 사업 이해 및 목표시스템</a:t>
+            </a:r>
+          </a:p>
+        </p:txBody>
+      </p:sp>
+      <p:sp>
+        <p:nvSpPr>
+          <p:cNvPr id="29" name="TextBox 28">
+            <a:extLst>
+              <a:ext uri="{FF2B5EF4-FFF2-40B4-BE49-F238E27FC236}">
+                <a16:creationId xmlns:a16="http://schemas.microsoft.com/office/drawing/2014/main" id="{30F69D74-9EAF-CEEE-AF7B-E2FF8AD04DB7}"/>
+              </a:ext>
+            </a:extLst>
+          </p:cNvPr>
+          <p:cNvSpPr txBox="1"/>
+          <p:nvPr/>
+        </p:nvSpPr>
+        <p:spPr>
+          <a:xfrm>
+            <a:off x="3895725" y="298577"/>
+            <a:ext cx="2823819" cy="276999"/>
+          </a:xfrm>
+          <a:prstGeom prst="rect">
+            <a:avLst/>
+          </a:prstGeom>
+          <a:noFill/>
+        </p:spPr>
+        <p:txBody>
+          <a:bodyPr wrap="square">
+            <a:spAutoFit/>
+          </a:bodyPr>
+          <a:lstStyle/>
+          <a:p>
+            <a:pPr marR="0" lvl="0" algn="r" defTabSz="914400" rtl="0" eaLnBrk="1" fontAlgn="auto" latinLnBrk="1" hangingPunct="1">
+              <a:lnSpc>
+                <a:spcPct val="100000"/>
+              </a:lnSpc>
+              <a:spcBef>
+                <a:spcPts val="600"/>
+              </a:spcBef>
+              <a:spcAft>
+                <a:spcPts val="0"/>
+              </a:spcAft>
+              <a:buClrTx/>
+              <a:buSzTx/>
+              <a:tabLst/>
+              <a:defRPr/>
+            </a:pPr>
+            <a:r>
+              <a:rPr lang="en-US" altLang="ko-KR" sz="1200" b="1">
+                <a:ln>
+                  <a:solidFill>
+                    <a:srgbClr val="4472C4">
+                      <a:shade val="50000"/>
+                      <a:alpha val="0"/>
+                    </a:srgbClr>
+                  </a:solidFill>
+                </a:ln>
+                <a:latin typeface="맑은 고딕" panose="00000800000000000000" pitchFamily="2" charset="-127"/>
+                <a:ea typeface="맑은 고딕" panose="00000800000000000000" pitchFamily="2" charset="-127"/>
+                <a:cs typeface="맑은 고딕" panose="00000800000000000000" pitchFamily="2" charset="-127"/>
+              </a:rPr>
+              <a:t>Ⅰ. 제안사 및 사업 이해</a:t>
+            </a:r>
+          </a:p>
+        </p:txBody>
+      </p:sp>
+      <p:sp>
+        <p:nvSpPr>
+          <p:cNvPr id="2" name="직사각형 1">
+            <a:extLst>
+              <a:ext uri="{FF2B5EF4-FFF2-40B4-BE49-F238E27FC236}">
+                <a16:creationId xmlns:a16="http://schemas.microsoft.com/office/drawing/2014/main" id="{40C64E1C-7DCB-6DC9-8F48-316B5313706F}"/>
+              </a:ext>
+            </a:extLst>
+          </p:cNvPr>
+          <p:cNvSpPr/>
+          <p:nvPr/>
+        </p:nvSpPr>
+        <p:spPr bwMode="auto">
+          <a:xfrm>
+            <a:off x="588602" y="1003444"/>
+            <a:ext cx="5940000" cy="215442"/>
+          </a:xfrm>
+          <a:prstGeom prst="rect">
+            <a:avLst/>
+          </a:prstGeom>
+          <a:ln>
+            <a:noFill/>
+          </a:ln>
+        </p:spPr>
+        <p:txBody>
+          <a:bodyPr wrap="square" lIns="0" tIns="0" rIns="0" bIns="0" anchor="b" anchorCtr="0">
+            <a:spAutoFit/>
+          </a:bodyPr>
+          <a:lstStyle/>
+          <a:p>
+            <a:pPr marL="0" lvl="1" fontAlgn="base">
+              <a:spcBef>
+                <a:spcPct val="0"/>
+              </a:spcBef>
+              <a:buClr>
+                <a:prstClr val="white">
+                  <a:lumMod val="50000"/>
+                </a:prstClr>
+              </a:buClr>
+              <a:buSzPct val="100000"/>
+              <a:defRPr/>
+            </a:pPr>
+            <a:r>
+              <a:rPr kumimoji="0" lang="en-US" altLang="ko-KR" sz="1400" b="0" i="0" u="none" strike="noStrike" kern="1200" cap="none" normalizeH="0" baseline="0" noProof="0">
+                <a:ln>
+                  <a:solidFill>
+                    <a:srgbClr val="D0D5DB">
+                      <a:alpha val="0"/>
+                    </a:srgbClr>
+                  </a:solidFill>
+                </a:ln>
+                <a:effectLst/>
+                <a:uLnTx/>
+                <a:uFillTx/>
+                <a:latin typeface="맑은 고딕" panose="00000600000000000000" pitchFamily="2" charset="-127"/>
+                <a:ea typeface="맑은 고딕" panose="00000600000000000000" pitchFamily="2" charset="-127"/>
+                <a:cs typeface="맑은 고딕" panose="00000600000000000000" pitchFamily="2" charset="-127"/>
+                <a:sym typeface="Monotype Sorts"/>
+              </a:rPr>
               <a:t>2.2.1 목표시스템 구성 및 추진전략</a:t>
             </a:r>
           </a:p>
@@ -12264,7 +14365,7 @@
                 <a:ea typeface="맑은 고딕" panose="00000800000000000000" pitchFamily="2" charset="-127"/>
                 <a:cs typeface="맑은 고딕" panose="00000800000000000000" pitchFamily="2" charset="-127"/>
               </a:rPr>
-              <a:t>를 나누고, 기준선 측정부터 시작하는 4대 전략으로 추진함 (→ 18~21)</a:t>
+              <a:t>를 나누고, 기준선 측정부터 시작하는 4대 전략으로 추진함 (→ 19~23)</a:t>
             </a:r>
           </a:p>
         </p:txBody>
@@ -15388,7 +17489,7 @@
                 <a:ea typeface="맑은 고딕"/>
                 <a:cs typeface="맑은 고딕"/>
               </a:rPr>
-              <a:t>6</a:t>
+              <a:t>7</a:t>
             </a:r>
           </a:p>
         </p:txBody>
@@ -15401,7 +17502,7 @@
 </p:sld>
 </file>
 
-<file path=ppt/slides/slide12.xml><?xml version="1.0" encoding="utf-8"?>
+<file path=ppt/slides/slide13.xml><?xml version="1.0" encoding="utf-8"?>
 <p:sld xmlns:a="http://schemas.openxmlformats.org/drawingml/2006/main" xmlns:p="http://schemas.openxmlformats.org/presentationml/2006/main" xmlns:r="http://schemas.openxmlformats.org/officeDocument/2006/relationships">
   <p:cSld>
     <p:spTree>
@@ -15754,7 +17855,7 @@
 </p:sld>
 </file>
 
-<file path=ppt/slides/slide13.xml><?xml version="1.0" encoding="utf-8"?>
+<file path=ppt/slides/slide14.xml><?xml version="1.0" encoding="utf-8"?>
 <p:sld xmlns:a="http://schemas.openxmlformats.org/drawingml/2006/main" xmlns:p="http://schemas.openxmlformats.org/presentationml/2006/main" xmlns:r="http://schemas.openxmlformats.org/officeDocument/2006/relationships">
   <p:cSld>
     <p:spTree>
@@ -16082,7 +18183,7 @@
                 <a:ea typeface="맑은 고딕" panose="00000800000000000000" pitchFamily="2" charset="-127"/>
                 <a:cs typeface="맑은 고딕" panose="00000800000000000000" pitchFamily="2" charset="-127"/>
               </a:rPr>
-              <a:t> 지식을 만들고, 직권조사 계획서와 판정서 검증에 함께 활용함 (→ 28~31)</a:t>
+              <a:t> 지식을 만들고, 직권조사 계획서와 판정서 검증에 함께 활용함 (→ 31~34)</a:t>
             </a:r>
           </a:p>
         </p:txBody>
@@ -18428,7 +20529,7 @@
                 <a:ea typeface="맑은 고딕"/>
                 <a:cs typeface="맑은 고딕"/>
               </a:rPr>
-              <a:t>8</a:t>
+              <a:t>9</a:t>
             </a:r>
           </a:p>
         </p:txBody>
@@ -18441,7 +20542,7 @@
 </p:sld>
 </file>
 
-<file path=ppt/slides/slide14.xml><?xml version="1.0" encoding="utf-8"?>
+<file path=ppt/slides/slide15.xml><?xml version="1.0" encoding="utf-8"?>
 <p:sld xmlns:a="http://schemas.openxmlformats.org/drawingml/2006/main" xmlns:p="http://schemas.openxmlformats.org/presentationml/2006/main" xmlns:r="http://schemas.openxmlformats.org/officeDocument/2006/relationships">
   <p:cSld>
     <p:spTree>
@@ -18769,7 +20870,7 @@
                 <a:ea typeface="맑은 고딕" panose="00000800000000000000" pitchFamily="2" charset="-127"/>
                 <a:cs typeface="맑은 고딕" panose="00000800000000000000" pitchFamily="2" charset="-127"/>
               </a:rPr>
-              <a:t>까지 넓힘 (→ 32~38)</a:t>
+              <a:t>까지 넓힘 (→ 35~41)</a:t>
             </a:r>
           </a:p>
         </p:txBody>
@@ -20337,7 +22438,7 @@
                 <a:ea typeface="맑은 고딕"/>
                 <a:cs typeface="맑은 고딕"/>
               </a:rPr>
-              <a:t>9</a:t>
+              <a:t>10</a:t>
             </a:r>
           </a:p>
         </p:txBody>
@@ -20350,7 +22451,7 @@
 </p:sld>
 </file>
 
-<file path=ppt/slides/slide15.xml><?xml version="1.0" encoding="utf-8"?>
+<file path=ppt/slides/slide16.xml><?xml version="1.0" encoding="utf-8"?>
 <p:sld xmlns:a="http://schemas.openxmlformats.org/drawingml/2006/main" xmlns:p="http://schemas.openxmlformats.org/presentationml/2006/main" xmlns:r="http://schemas.openxmlformats.org/officeDocument/2006/relationships">
   <p:cSld>
     <p:spTree>
@@ -20678,7 +22779,7 @@
                 <a:ea typeface="맑은 고딕" panose="00000800000000000000" pitchFamily="2" charset="-127"/>
                 <a:cs typeface="맑은 고딕" panose="00000800000000000000" pitchFamily="2" charset="-127"/>
               </a:rPr>
-              <a:t>로 조사관 수작업을 줄임 (→ 39~45)</a:t>
+              <a:t>로 조사관 수작업을 줄임 (→ 42~48)</a:t>
             </a:r>
           </a:p>
         </p:txBody>
@@ -23120,7 +25221,7 @@
                 <a:ea typeface="맑은 고딕"/>
                 <a:cs typeface="맑은 고딕"/>
               </a:rPr>
-              <a:t>10</a:t>
+              <a:t>11</a:t>
             </a:r>
           </a:p>
         </p:txBody>
@@ -23133,7 +25234,7 @@
 </p:sld>
 </file>
 
-<file path=ppt/slides/slide16.xml><?xml version="1.0" encoding="utf-8"?>
+<file path=ppt/slides/slide17.xml><?xml version="1.0" encoding="utf-8"?>
 <p:sld xmlns:a="http://schemas.openxmlformats.org/drawingml/2006/main" xmlns:p="http://schemas.openxmlformats.org/presentationml/2006/main" xmlns:r="http://schemas.openxmlformats.org/officeDocument/2006/relationships">
   <p:cSld>
     <p:spTree>
@@ -23461,7 +25562,7 @@
                 <a:ea typeface="맑은 고딕" panose="00000800000000000000" pitchFamily="2" charset="-127"/>
                 <a:cs typeface="맑은 고딕" panose="00000800000000000000" pitchFamily="2" charset="-127"/>
               </a:rPr>
-              <a:t>하며, DA · DBA가 데이터 표준과 품질을 관리함 (→ 46~53)</a:t>
+              <a:t>하며, DA · DBA가 데이터 표준과 품질을 관리함 (→ 49~56)</a:t>
             </a:r>
           </a:p>
         </p:txBody>
@@ -25795,7 +27896,7 @@
                 <a:ea typeface="맑은 고딕"/>
                 <a:cs typeface="맑은 고딕"/>
               </a:rPr>
-              <a:t>11</a:t>
+              <a:t>12</a:t>
             </a:r>
           </a:p>
         </p:txBody>
@@ -25808,7 +27909,7 @@
 </p:sld>
 </file>
 
-<file path=ppt/slides/slide17.xml><?xml version="1.0" encoding="utf-8"?>
+<file path=ppt/slides/slide18.xml><?xml version="1.0" encoding="utf-8"?>
 <p:sld xmlns:a="http://schemas.openxmlformats.org/drawingml/2006/main" xmlns:p="http://schemas.openxmlformats.org/presentationml/2006/main" xmlns:r="http://schemas.openxmlformats.org/officeDocument/2006/relationships">
   <p:cSld>
     <p:spTree>
@@ -26127,7 +28228,7 @@
 </p:sld>
 </file>
 
-<file path=ppt/slides/slide18.xml><?xml version="1.0" encoding="utf-8"?>
+<file path=ppt/slides/slide19.xml><?xml version="1.0" encoding="utf-8"?>
 <p:sld xmlns:a="http://schemas.openxmlformats.org/drawingml/2006/main" xmlns:p="http://schemas.openxmlformats.org/presentationml/2006/main" xmlns:r="http://schemas.openxmlformats.org/officeDocument/2006/relationships">
   <p:cSld>
     <p:spTree>
@@ -26455,7 +28556,7 @@
                 <a:ea typeface="맑은 고딕" panose="00000800000000000000" pitchFamily="2" charset="-127"/>
                 <a:cs typeface="맑은 고딕" panose="00000800000000000000" pitchFamily="2" charset="-127"/>
               </a:rPr>
-              <a:t>로 제거하고, 구간 분할 처리로 대용량 첨부의 누락을 막음 (→ 55~57)</a:t>
+              <a:t>로 제거하고, 구간 분할 처리로 대용량 첨부의 누락을 막음 (→ 58~60)</a:t>
             </a:r>
           </a:p>
         </p:txBody>
@@ -27725,7 +29826,7 @@
                 <a:ea typeface="맑은 고딕"/>
                 <a:cs typeface="맑은 고딕"/>
               </a:rPr>
-              <a:t>13</a:t>
+              <a:t>14</a:t>
             </a:r>
           </a:p>
         </p:txBody>
@@ -27738,7 +29839,7 @@
 </p:sld>
 </file>
 
-<file path=ppt/slides/slide19.xml><?xml version="1.0" encoding="utf-8"?>
+<file path=ppt/slides/slide20.xml><?xml version="1.0" encoding="utf-8"?>
 <p:sld xmlns:a="http://schemas.openxmlformats.org/drawingml/2006/main" xmlns:p="http://schemas.openxmlformats.org/presentationml/2006/main" xmlns:r="http://schemas.openxmlformats.org/officeDocument/2006/relationships">
   <p:cSld>
     <p:spTree>
@@ -28066,7 +30167,7 @@
                 <a:ea typeface="맑은 고딕" panose="00000800000000000000" pitchFamily="2" charset="-127"/>
                 <a:cs typeface="맑은 고딕" panose="00000800000000000000" pitchFamily="2" charset="-127"/>
               </a:rPr>
-              <a:t>을 수행하고, 연계는 기관별 최적 방식(EAI · ESB · DB 복제 · API)을 적용함 (→ 58~63)</a:t>
+              <a:t>을 수행하고, 연계는 기관별 최적 방식(EAI · ESB · DB 복제 · API)을 적용함 (→ 61~66)</a:t>
             </a:r>
           </a:p>
         </p:txBody>
@@ -29601,7 +31702,7 @@
                 <a:ea typeface="맑은 고딕"/>
                 <a:cs typeface="맑은 고딕"/>
               </a:rPr>
-              <a:t>14</a:t>
+              <a:t>15</a:t>
             </a:r>
           </a:p>
         </p:txBody>
@@ -29614,7 +31715,7 @@
 </p:sld>
 </file>
 
-<file path=ppt/slides/slide20.xml><?xml version="1.0" encoding="utf-8"?>
+<file path=ppt/slides/slide21.xml><?xml version="1.0" encoding="utf-8"?>
 <p:sld xmlns:a="http://schemas.openxmlformats.org/drawingml/2006/main" xmlns:p="http://schemas.openxmlformats.org/presentationml/2006/main" xmlns:r="http://schemas.openxmlformats.org/officeDocument/2006/relationships">
   <p:cSld>
     <p:spTree>
@@ -29933,7 +32034,7 @@
 </p:sld>
 </file>
 
-<file path=ppt/slides/slide21.xml><?xml version="1.0" encoding="utf-8"?>
+<file path=ppt/slides/slide22.xml><?xml version="1.0" encoding="utf-8"?>
 <p:sld xmlns:a="http://schemas.openxmlformats.org/drawingml/2006/main" xmlns:p="http://schemas.openxmlformats.org/presentationml/2006/main" xmlns:r="http://schemas.openxmlformats.org/officeDocument/2006/relationships">
   <p:cSld>
     <p:spTree>
@@ -30261,7 +32362,7 @@
                 <a:ea typeface="맑은 고딕" panose="00000800000000000000" pitchFamily="2" charset="-127"/>
                 <a:cs typeface="맑은 고딕" panose="00000800000000000000" pitchFamily="2" charset="-127"/>
               </a:rPr>
-              <a:t>을 두고, 착수 · 중간 · 완료 보고회와 주간 · 월간 회의로 관리함 (→ 11~13, 65~70)</a:t>
+              <a:t>을 두고, 착수 · 중간 · 완료 보고회와 주간 · 월간 회의로 관리함 (→ 11~13, 68~73)</a:t>
             </a:r>
           </a:p>
         </p:txBody>
@@ -32941,7 +35042,7 @@
                 <a:ea typeface="맑은 고딕"/>
                 <a:cs typeface="맑은 고딕"/>
               </a:rPr>
-              <a:t>16</a:t>
+              <a:t>17</a:t>
             </a:r>
           </a:p>
         </p:txBody>
@@ -32954,7 +35055,7 @@
 </p:sld>
 </file>
 
-<file path=ppt/slides/slide22.xml><?xml version="1.0" encoding="utf-8"?>
+<file path=ppt/slides/slide23.xml><?xml version="1.0" encoding="utf-8"?>
 <p:sld xmlns:a="http://schemas.openxmlformats.org/drawingml/2006/main" xmlns:p="http://schemas.openxmlformats.org/presentationml/2006/main" xmlns:r="http://schemas.openxmlformats.org/officeDocument/2006/relationships">
   <p:cSld>
     <p:spTree>
@@ -33282,7 +35383,7 @@
                 <a:ea typeface="맑은 고딕" panose="00000800000000000000" pitchFamily="2" charset="-127"/>
                 <a:cs typeface="맑은 고딕" panose="00000800000000000000" pitchFamily="2" charset="-127"/>
               </a:rPr>
-              <a:t>, 인원 · 문서 · 장비 · 시스템 보안대책을 제공함 (→ 72~76)</a:t>
+              <a:t>, 인원 · 문서 · 장비 · 시스템 보안대책을 제공함 (→ 75~79)</a:t>
             </a:r>
           </a:p>
         </p:txBody>
@@ -34319,7 +36420,7 @@
                 <a:ea typeface="맑은 고딕"/>
                 <a:cs typeface="맑은 고딕"/>
               </a:rPr>
-              <a:t>17</a:t>
+              <a:t>18</a:t>
             </a:r>
           </a:p>
         </p:txBody>

--- a/proposals/2026-11_nlrc-ai-labor-commission/nlrc_제안요약서.pptx
+++ b/proposals/2026-11_nlrc-ai-labor-commission/nlrc_제안요약서.pptx
@@ -29,6 +29,7 @@
     <p:sldId id="7503" r:id="rId31"/>
     <p:sldId id="7504" r:id="rId32"/>
     <p:sldId id="7505" r:id="rId33"/>
+    <p:sldId id="7506" r:id="rId34"/>
   </p:sldIdLst>
   <p:sldSz cx="6858000" cy="9906000" type="A4"/>
   <p:notesSz cx="7104063" cy="10234613"/>
@@ -12265,7 +12266,7 @@
                 <a:ea typeface="맑은 고딕" panose="00000800000000000000" pitchFamily="2" charset="-127"/>
                 <a:cs typeface="맑은 고딕" panose="00000800000000000000" pitchFamily="2" charset="-127"/>
               </a:rPr>
-              <a:t>을 달성하고, 1차 산출물을 인수해 3차 사업계획까지 이어 감 (→ 17, 22, 30, 85)</a:t>
+              <a:t>을 달성하고, 1차 산출물을 인수해 3차 사업계획까지 이어 감 (→ 17, 22, 32, 87)</a:t>
             </a:r>
           </a:p>
         </p:txBody>
@@ -14365,7 +14366,7 @@
                 <a:ea typeface="맑은 고딕" panose="00000800000000000000" pitchFamily="2" charset="-127"/>
                 <a:cs typeface="맑은 고딕" panose="00000800000000000000" pitchFamily="2" charset="-127"/>
               </a:rPr>
-              <a:t>를 나누고, 기준선 측정부터 시작하는 4대 전략으로 추진함 (→ 19~23)</a:t>
+              <a:t>를 나누고, 기준선 측정부터 시작하는 4대 전략으로 추진함 (→ 19~25)</a:t>
             </a:r>
           </a:p>
         </p:txBody>
@@ -17503,6 +17504,1597 @@
 </file>
 
 <file path=ppt/slides/slide13.xml><?xml version="1.0" encoding="utf-8"?>
+<p:sld xmlns:a="http://schemas.openxmlformats.org/drawingml/2006/main" xmlns:p="http://schemas.openxmlformats.org/presentationml/2006/main" xmlns:r="http://schemas.openxmlformats.org/officeDocument/2006/relationships">
+  <p:cSld>
+    <p:spTree>
+      <p:nvGrpSpPr>
+        <p:cNvPr id="1" name=""/>
+        <p:cNvGrpSpPr/>
+        <p:nvPr/>
+      </p:nvGrpSpPr>
+      <p:grpSpPr/>
+      <p:sp>
+        <p:nvSpPr>
+          <p:cNvPr id="10" name="텍스트 개체 틀 9">
+            <a:extLst>
+              <a:ext uri="{FF2B5EF4-FFF2-40B4-BE49-F238E27FC236}">
+                <a16:creationId xmlns:a16="http://schemas.microsoft.com/office/drawing/2014/main" id="{D9F520BA-26D9-1D94-37C1-390B16677E03}"/>
+              </a:ext>
+            </a:extLst>
+          </p:cNvPr>
+          <p:cNvSpPr>
+            <a:spLocks noGrp="1"/>
+          </p:cNvSpPr>
+          <p:nvPr>
+            <p:ph type="body" sz="quarter" idx="10"/>
+          </p:nvPr>
+        </p:nvSpPr>
+        <p:spPr>
+          <a:xfrm>
+            <a:off x="302559" y="229408"/>
+            <a:ext cx="5318423" cy="320088"/>
+          </a:xfrm>
+        </p:spPr>
+        <p:txBody>
+          <a:bodyPr/>
+          <a:lstStyle/>
+          <a:p>
+            <a:r>
+              <a:rPr lang="en-US" altLang="ko-KR" sz="1600">
+                <a:solidFill>
+                  <a:schemeClr val="tx1"/>
+                </a:solidFill>
+              </a:rPr>
+              <a:t>2. 사업 이해 및 목표시스템</a:t>
+            </a:r>
+          </a:p>
+        </p:txBody>
+      </p:sp>
+      <p:sp>
+        <p:nvSpPr>
+          <p:cNvPr id="29" name="TextBox 28">
+            <a:extLst>
+              <a:ext uri="{FF2B5EF4-FFF2-40B4-BE49-F238E27FC236}">
+                <a16:creationId xmlns:a16="http://schemas.microsoft.com/office/drawing/2014/main" id="{30F69D74-9EAF-CEEE-AF7B-E2FF8AD04DB7}"/>
+              </a:ext>
+            </a:extLst>
+          </p:cNvPr>
+          <p:cNvSpPr txBox="1"/>
+          <p:nvPr/>
+        </p:nvSpPr>
+        <p:spPr>
+          <a:xfrm>
+            <a:off x="3895725" y="298577"/>
+            <a:ext cx="2823819" cy="276999"/>
+          </a:xfrm>
+          <a:prstGeom prst="rect">
+            <a:avLst/>
+          </a:prstGeom>
+          <a:noFill/>
+        </p:spPr>
+        <p:txBody>
+          <a:bodyPr wrap="square">
+            <a:spAutoFit/>
+          </a:bodyPr>
+          <a:lstStyle/>
+          <a:p>
+            <a:pPr marR="0" lvl="0" algn="r" defTabSz="914400" rtl="0" eaLnBrk="1" fontAlgn="auto" latinLnBrk="1" hangingPunct="1">
+              <a:lnSpc>
+                <a:spcPct val="100000"/>
+              </a:lnSpc>
+              <a:spcBef>
+                <a:spcPts val="600"/>
+              </a:spcBef>
+              <a:spcAft>
+                <a:spcPts val="0"/>
+              </a:spcAft>
+              <a:buClrTx/>
+              <a:buSzTx/>
+              <a:tabLst/>
+              <a:defRPr/>
+            </a:pPr>
+            <a:r>
+              <a:rPr lang="en-US" altLang="ko-KR" sz="1200" b="1">
+                <a:ln>
+                  <a:solidFill>
+                    <a:srgbClr val="4472C4">
+                      <a:shade val="50000"/>
+                      <a:alpha val="0"/>
+                    </a:srgbClr>
+                  </a:solidFill>
+                </a:ln>
+                <a:latin typeface="맑은 고딕" panose="00000800000000000000" pitchFamily="2" charset="-127"/>
+                <a:ea typeface="맑은 고딕" panose="00000800000000000000" pitchFamily="2" charset="-127"/>
+                <a:cs typeface="맑은 고딕" panose="00000800000000000000" pitchFamily="2" charset="-127"/>
+              </a:rPr>
+              <a:t>Ⅰ. 제안사 및 사업 이해</a:t>
+            </a:r>
+          </a:p>
+        </p:txBody>
+      </p:sp>
+      <p:sp>
+        <p:nvSpPr>
+          <p:cNvPr id="2" name="직사각형 1">
+            <a:extLst>
+              <a:ext uri="{FF2B5EF4-FFF2-40B4-BE49-F238E27FC236}">
+                <a16:creationId xmlns:a16="http://schemas.microsoft.com/office/drawing/2014/main" id="{40C64E1C-7DCB-6DC9-8F48-316B5313706F}"/>
+              </a:ext>
+            </a:extLst>
+          </p:cNvPr>
+          <p:cNvSpPr/>
+          <p:nvPr/>
+        </p:nvSpPr>
+        <p:spPr bwMode="auto">
+          <a:xfrm>
+            <a:off x="588602" y="1003444"/>
+            <a:ext cx="5940000" cy="215442"/>
+          </a:xfrm>
+          <a:prstGeom prst="rect">
+            <a:avLst/>
+          </a:prstGeom>
+          <a:ln>
+            <a:noFill/>
+          </a:ln>
+        </p:spPr>
+        <p:txBody>
+          <a:bodyPr wrap="square" lIns="0" tIns="0" rIns="0" bIns="0" anchor="b" anchorCtr="0">
+            <a:spAutoFit/>
+          </a:bodyPr>
+          <a:lstStyle/>
+          <a:p>
+            <a:pPr marL="0" lvl="1" fontAlgn="base">
+              <a:spcBef>
+                <a:spcPct val="0"/>
+              </a:spcBef>
+              <a:buClr>
+                <a:prstClr val="white">
+                  <a:lumMod val="50000"/>
+                </a:prstClr>
+              </a:buClr>
+              <a:buSzPct val="100000"/>
+              <a:defRPr/>
+            </a:pPr>
+            <a:r>
+              <a:rPr kumimoji="0" lang="en-US" altLang="ko-KR" sz="1400" b="0" i="0" u="none" strike="noStrike" kern="1200" cap="none" normalizeH="0" baseline="0" noProof="0">
+                <a:ln>
+                  <a:solidFill>
+                    <a:srgbClr val="D0D5DB">
+                      <a:alpha val="0"/>
+                    </a:srgbClr>
+                  </a:solidFill>
+                </a:ln>
+                <a:effectLst/>
+                <a:uLnTx/>
+                <a:uFillTx/>
+                <a:latin typeface="맑은 고딕" panose="00000600000000000000" pitchFamily="2" charset="-127"/>
+                <a:ea typeface="맑은 고딕" panose="00000600000000000000" pitchFamily="2" charset="-127"/>
+                <a:cs typeface="맑은 고딕" panose="00000600000000000000" pitchFamily="2" charset="-127"/>
+                <a:sym typeface="Monotype Sorts"/>
+              </a:rPr>
+              <a:t>2.2.2 미확정 조건별 대응 방안</a:t>
+            </a:r>
+          </a:p>
+        </p:txBody>
+      </p:sp>
+      <p:sp>
+        <p:nvSpPr>
+          <p:cNvPr id="3" name="직사각형 2">
+            <a:extLst>
+              <a:ext uri="{FF2B5EF4-FFF2-40B4-BE49-F238E27FC236}">
+                <a16:creationId xmlns:a16="http://schemas.microsoft.com/office/drawing/2014/main" id="{D2CE8A46-6233-C6A4-2BE2-039EC8621B50}"/>
+              </a:ext>
+            </a:extLst>
+          </p:cNvPr>
+          <p:cNvSpPr/>
+          <p:nvPr/>
+        </p:nvSpPr>
+        <p:spPr bwMode="auto">
+          <a:xfrm>
+            <a:off x="509839" y="698078"/>
+            <a:ext cx="5838321" cy="230831"/>
+          </a:xfrm>
+          <a:prstGeom prst="rect">
+            <a:avLst/>
+          </a:prstGeom>
+          <a:ln>
+            <a:noFill/>
+          </a:ln>
+        </p:spPr>
+        <p:txBody>
+          <a:bodyPr wrap="square" lIns="0" tIns="0" rIns="0" bIns="0" anchor="b" anchorCtr="0">
+            <a:spAutoFit/>
+          </a:bodyPr>
+          <a:lstStyle/>
+          <a:p>
+            <a:pPr marL="0" lvl="1" fontAlgn="base">
+              <a:spcBef>
+                <a:spcPts val="188"/>
+              </a:spcBef>
+              <a:buClr>
+                <a:prstClr val="white">
+                  <a:lumMod val="50000"/>
+                </a:prstClr>
+              </a:buClr>
+              <a:buSzPct val="100000"/>
+              <a:defRPr/>
+            </a:pPr>
+            <a:r>
+              <a:rPr kumimoji="0" lang="en-US" altLang="ko-KR" sz="1500" b="1" i="0" u="none" strike="noStrike" kern="1200" cap="none" normalizeH="0" baseline="0" noProof="0">
+                <a:ln w="3175">
+                  <a:solidFill>
+                    <a:srgbClr val="D0D5DB">
+                      <a:alpha val="0"/>
+                    </a:srgbClr>
+                  </a:solidFill>
+                </a:ln>
+                <a:effectLst/>
+                <a:uLnTx/>
+                <a:uFillTx/>
+                <a:latin typeface="맑은 고딕" panose="00000800000000000000" pitchFamily="2" charset="-127"/>
+                <a:ea typeface="맑은 고딕" panose="00000800000000000000" pitchFamily="2" charset="-127"/>
+                <a:cs typeface="맑은 고딕" panose="00000800000000000000" pitchFamily="2" charset="-127"/>
+                <a:sym typeface="Monotype Sorts"/>
+              </a:rPr>
+              <a:t>2.2 목표시스템</a:t>
+            </a:r>
+          </a:p>
+        </p:txBody>
+      </p:sp>
+      <p:sp>
+        <p:nvSpPr>
+          <p:cNvPr id="4" name="사각형: 둥근 모서리 3">
+            <a:extLst>
+              <a:ext uri="{FF2B5EF4-FFF2-40B4-BE49-F238E27FC236}">
+                <a16:creationId xmlns:a16="http://schemas.microsoft.com/office/drawing/2014/main" id="{BE032AD2-3F32-1F05-D1B6-C16ED22DC291}"/>
+              </a:ext>
+            </a:extLst>
+          </p:cNvPr>
+          <p:cNvSpPr/>
+          <p:nvPr/>
+        </p:nvSpPr>
+        <p:spPr>
+          <a:xfrm>
+            <a:off x="279083" y="1371599"/>
+            <a:ext cx="6331426" cy="862661"/>
+          </a:xfrm>
+          <a:prstGeom prst="roundRect">
+            <a:avLst>
+              <a:gd name="adj" fmla="val 5153"/>
+            </a:avLst>
+          </a:prstGeom>
+          <a:solidFill>
+            <a:schemeClr val="accent5">
+              <a:lumMod val="20000"/>
+              <a:lumOff val="80000"/>
+              <a:alpha val="70000"/>
+            </a:schemeClr>
+          </a:solidFill>
+          <a:ln w="12700" cap="flat" cmpd="sng" algn="ctr">
+            <a:noFill/>
+            <a:prstDash val="solid"/>
+            <a:miter lim="800000"/>
+          </a:ln>
+          <a:effectLst/>
+        </p:spPr>
+        <p:txBody>
+          <a:bodyPr lIns="72000" tIns="72000" rIns="72000" bIns="72000" rtlCol="0" anchor="ctr"/>
+          <a:lstStyle/>
+          <a:p>
+            <a:pPr>
+              <a:lnSpc>
+                <a:spcPts val="1700"/>
+              </a:lnSpc>
+            </a:pPr>
+            <a:r>
+              <a:rPr lang="ko-KR" altLang="en-US" sz="1200" b="1">
+                <a:ln w="12700">
+                  <a:solidFill>
+                    <a:schemeClr val="tx1">
+                      <a:alpha val="0"/>
+                    </a:schemeClr>
+                  </a:solidFill>
+                </a:ln>
+                <a:latin typeface="맑은 고딕" panose="00000800000000000000" pitchFamily="2" charset="-127"/>
+                <a:ea typeface="맑은 고딕" panose="00000800000000000000" pitchFamily="2" charset="-127"/>
+                <a:cs typeface="맑은 고딕" panose="00000800000000000000" pitchFamily="2" charset="-127"/>
+              </a:rPr>
+              <a:t>(어떤 조건이어도 목표 달성) GPU · 언어모델 권한 · 측정 조건 · 범위 · 작업장소가 </a:t>
+            </a:r>
+            <a:r>
+              <a:rPr lang="ko-KR" altLang="en-US" sz="1200" b="1">
+                <a:ln w="12700">
+                  <a:solidFill>
+                    <a:schemeClr val="tx1">
+                      <a:alpha val="0"/>
+                    </a:schemeClr>
+                  </a:solidFill>
+                </a:ln>
+                <a:solidFill>
+                  <a:srgbClr val="0462DA"/>
+                </a:solidFill>
+                <a:latin typeface="맑은 고딕" panose="00000800000000000000" pitchFamily="2" charset="-127"/>
+                <a:ea typeface="맑은 고딕" panose="00000800000000000000" pitchFamily="2" charset="-127"/>
+                <a:cs typeface="맑은 고딕" panose="00000800000000000000" pitchFamily="2" charset="-127"/>
+              </a:rPr>
+              <a:t>현장 확인 결과에 따라 달라져도</a:t>
+            </a:r>
+            <a:r>
+              <a:rPr lang="ko-KR" altLang="en-US" sz="1200" b="1">
+                <a:ln w="12700">
+                  <a:solidFill>
+                    <a:schemeClr val="tx1">
+                      <a:alpha val="0"/>
+                    </a:schemeClr>
+                  </a:solidFill>
+                </a:ln>
+                <a:latin typeface="맑은 고딕" panose="00000800000000000000" pitchFamily="2" charset="-127"/>
+                <a:ea typeface="맑은 고딕" panose="00000800000000000000" pitchFamily="2" charset="-127"/>
+                <a:cs typeface="맑은 고딕" panose="00000800000000000000" pitchFamily="2" charset="-127"/>
+              </a:rPr>
+              <a:t> 경우별 대응 경로를 미리 정해 두고 착수 2주 안에 확정함 (→ 24~25)</a:t>
+            </a:r>
+          </a:p>
+        </p:txBody>
+      </p:sp>
+      <p:graphicFrame>
+        <p:nvGraphicFramePr>
+          <p:cNvPr id="30" name="Table 29"/>
+          <p:cNvGraphicFramePr>
+            <a:graphicFrameLocks noGrp="1"/>
+          </p:cNvGraphicFramePr>
+          <p:nvPr/>
+        </p:nvGraphicFramePr>
+        <p:xfrm>
+          <a:off x="316800" y="2358000"/>
+          <a:ext cx="6260400" cy="5423696"/>
+        </p:xfrm>
+        <a:graphic>
+          <a:graphicData uri="http://schemas.openxmlformats.org/drawingml/2006/table">
+            <a:tbl>
+              <a:tblPr firstRow="0" bandRow="0"/>
+              <a:tblGrid>
+                <a:gridCol w="1252080"/>
+                <a:gridCol w="5008320"/>
+              </a:tblGrid>
+              <a:tr h="522000">
+                <a:tc>
+                  <a:txBody>
+                    <a:bodyPr wrap="square"/>
+                    <a:lstStyle/>
+                    <a:p>
+                      <a:pPr algn="ctr">
+                        <a:lnSpc>
+                          <a:spcPct val="115000"/>
+                        </a:lnSpc>
+                        <a:spcBef>
+                          <a:spcPts val="0"/>
+                        </a:spcBef>
+                        <a:spcAft>
+                          <a:spcPts val="0"/>
+                        </a:spcAft>
+                      </a:pPr>
+                      <a:r>
+                        <a:rPr sz="1100" b="1">
+                          <a:solidFill>
+                            <a:srgbClr val="FFFFFF"/>
+                          </a:solidFill>
+                          <a:latin typeface="맑은 고딕"/>
+                          <a:ea typeface="맑은 고딕"/>
+                          <a:cs typeface="맑은 고딕"/>
+                        </a:rPr>
+                        <a:t>확인 조건</a:t>
+                      </a:r>
+                    </a:p>
+                  </a:txBody>
+                  <a:tcPr marL="36000" marR="36000" marT="18000" marB="18000" anchor="ctr">
+                    <a:lnL w="10160">
+                      <a:solidFill>
+                        <a:srgbClr val="C8D3E0"/>
+                      </a:solidFill>
+                    </a:lnL>
+                    <a:lnR w="10160">
+                      <a:solidFill>
+                        <a:srgbClr val="C8D3E0"/>
+                      </a:solidFill>
+                    </a:lnR>
+                    <a:lnT w="10160">
+                      <a:solidFill>
+                        <a:srgbClr val="C8D3E0"/>
+                      </a:solidFill>
+                    </a:lnT>
+                    <a:lnB w="10160">
+                      <a:solidFill>
+                        <a:srgbClr val="C8D3E0"/>
+                      </a:solidFill>
+                    </a:lnB>
+                    <a:solidFill>
+                      <a:srgbClr val="0462DA"/>
+                    </a:solidFill>
+                  </a:tcPr>
+                </a:tc>
+                <a:tc>
+                  <a:txBody>
+                    <a:bodyPr wrap="square"/>
+                    <a:lstStyle/>
+                    <a:p>
+                      <a:pPr algn="ctr">
+                        <a:lnSpc>
+                          <a:spcPct val="115000"/>
+                        </a:lnSpc>
+                        <a:spcBef>
+                          <a:spcPts val="0"/>
+                        </a:spcBef>
+                        <a:spcAft>
+                          <a:spcPts val="0"/>
+                        </a:spcAft>
+                      </a:pPr>
+                      <a:r>
+                        <a:rPr sz="1100" b="1">
+                          <a:solidFill>
+                            <a:srgbClr val="FFFFFF"/>
+                          </a:solidFill>
+                          <a:latin typeface="맑은 고딕"/>
+                          <a:ea typeface="맑은 고딕"/>
+                          <a:cs typeface="맑은 고딕"/>
+                        </a:rPr>
+                        <a:t>경우별 대응</a:t>
+                      </a:r>
+                    </a:p>
+                  </a:txBody>
+                  <a:tcPr marL="36000" marR="36000" marT="18000" marB="18000" anchor="ctr">
+                    <a:lnL w="10160">
+                      <a:solidFill>
+                        <a:srgbClr val="C8D3E0"/>
+                      </a:solidFill>
+                    </a:lnL>
+                    <a:lnR w="10160">
+                      <a:solidFill>
+                        <a:srgbClr val="C8D3E0"/>
+                      </a:solidFill>
+                    </a:lnR>
+                    <a:lnT w="10160">
+                      <a:solidFill>
+                        <a:srgbClr val="C8D3E0"/>
+                      </a:solidFill>
+                    </a:lnT>
+                    <a:lnB w="10160">
+                      <a:solidFill>
+                        <a:srgbClr val="C8D3E0"/>
+                      </a:solidFill>
+                    </a:lnB>
+                    <a:solidFill>
+                      <a:srgbClr val="0462DA"/>
+                    </a:solidFill>
+                  </a:tcPr>
+                </a:tc>
+              </a:tr>
+              <a:tr h="620528">
+                <a:tc>
+                  <a:txBody>
+                    <a:bodyPr wrap="square"/>
+                    <a:lstStyle/>
+                    <a:p>
+                      <a:pPr algn="ctr">
+                        <a:lnSpc>
+                          <a:spcPct val="115000"/>
+                        </a:lnSpc>
+                        <a:spcBef>
+                          <a:spcPts val="0"/>
+                        </a:spcBef>
+                        <a:spcAft>
+                          <a:spcPts val="0"/>
+                        </a:spcAft>
+                      </a:pPr>
+                      <a:r>
+                        <a:rPr sz="1050" b="1">
+                          <a:solidFill>
+                            <a:srgbClr val="222222"/>
+                          </a:solidFill>
+                          <a:latin typeface="맑은 고딕"/>
+                          <a:ea typeface="맑은 고딕"/>
+                          <a:cs typeface="맑은 고딕"/>
+                        </a:rPr>
+                        <a:t>GPU 세대</a:t>
+                      </a:r>
+                    </a:p>
+                  </a:txBody>
+                  <a:tcPr marL="36000" marR="36000" marT="18000" marB="18000" anchor="ctr">
+                    <a:lnL w="10160">
+                      <a:solidFill>
+                        <a:srgbClr val="C8D3E0"/>
+                      </a:solidFill>
+                    </a:lnL>
+                    <a:lnR w="10160">
+                      <a:solidFill>
+                        <a:srgbClr val="C8D3E0"/>
+                      </a:solidFill>
+                    </a:lnR>
+                    <a:lnT w="10160">
+                      <a:solidFill>
+                        <a:srgbClr val="C8D3E0"/>
+                      </a:solidFill>
+                    </a:lnT>
+                    <a:lnB w="10160">
+                      <a:solidFill>
+                        <a:srgbClr val="C8D3E0"/>
+                      </a:solidFill>
+                    </a:lnB>
+                    <a:solidFill>
+                      <a:srgbClr val="EEF3F9"/>
+                    </a:solidFill>
+                  </a:tcPr>
+                </a:tc>
+                <a:tc>
+                  <a:txBody>
+                    <a:bodyPr wrap="square"/>
+                    <a:lstStyle/>
+                    <a:p>
+                      <a:pPr algn="l">
+                        <a:lnSpc>
+                          <a:spcPct val="115000"/>
+                        </a:lnSpc>
+                        <a:spcBef>
+                          <a:spcPts val="0"/>
+                        </a:spcBef>
+                        <a:spcAft>
+                          <a:spcPts val="0"/>
+                        </a:spcAft>
+                      </a:pPr>
+                      <a:r>
+                        <a:rPr sz="1050" b="0">
+                          <a:solidFill>
+                            <a:srgbClr val="222222"/>
+                          </a:solidFill>
+                          <a:latin typeface="맑은 고딕"/>
+                          <a:ea typeface="맑은 고딕"/>
+                          <a:cs typeface="맑은 고딕"/>
+                        </a:rPr>
+                        <a:t>A100급: 양자화 · 서빙 엔진 최적화 / H100급: 캐시 · 스트리밍 · 문서분할 등 처리 구조 개선</a:t>
+                      </a:r>
+                    </a:p>
+                  </a:txBody>
+                  <a:tcPr marL="36000" marR="36000" marT="18000" marB="18000" anchor="ctr">
+                    <a:lnL w="10160">
+                      <a:solidFill>
+                        <a:srgbClr val="C8D3E0"/>
+                      </a:solidFill>
+                    </a:lnL>
+                    <a:lnR w="10160">
+                      <a:solidFill>
+                        <a:srgbClr val="C8D3E0"/>
+                      </a:solidFill>
+                    </a:lnR>
+                    <a:lnT w="10160">
+                      <a:solidFill>
+                        <a:srgbClr val="C8D3E0"/>
+                      </a:solidFill>
+                    </a:lnT>
+                    <a:lnB w="10160">
+                      <a:solidFill>
+                        <a:srgbClr val="C8D3E0"/>
+                      </a:solidFill>
+                    </a:lnB>
+                    <a:solidFill>
+                      <a:srgbClr val="FFFFFF"/>
+                    </a:solidFill>
+                  </a:tcPr>
+                </a:tc>
+              </a:tr>
+              <a:tr h="620528">
+                <a:tc>
+                  <a:txBody>
+                    <a:bodyPr wrap="square"/>
+                    <a:lstStyle/>
+                    <a:p>
+                      <a:pPr algn="ctr">
+                        <a:lnSpc>
+                          <a:spcPct val="115000"/>
+                        </a:lnSpc>
+                        <a:spcBef>
+                          <a:spcPts val="0"/>
+                        </a:spcBef>
+                        <a:spcAft>
+                          <a:spcPts val="0"/>
+                        </a:spcAft>
+                      </a:pPr>
+                      <a:r>
+                        <a:rPr sz="1050" b="1">
+                          <a:solidFill>
+                            <a:srgbClr val="222222"/>
+                          </a:solidFill>
+                          <a:latin typeface="맑은 고딕"/>
+                          <a:ea typeface="맑은 고딕"/>
+                          <a:cs typeface="맑은 고딕"/>
+                        </a:rPr>
+                        <a:t>GPU 여유 자원</a:t>
+                      </a:r>
+                    </a:p>
+                  </a:txBody>
+                  <a:tcPr marL="36000" marR="36000" marT="18000" marB="18000" anchor="ctr">
+                    <a:lnL w="10160">
+                      <a:solidFill>
+                        <a:srgbClr val="C8D3E0"/>
+                      </a:solidFill>
+                    </a:lnL>
+                    <a:lnR w="10160">
+                      <a:solidFill>
+                        <a:srgbClr val="C8D3E0"/>
+                      </a:solidFill>
+                    </a:lnR>
+                    <a:lnT w="10160">
+                      <a:solidFill>
+                        <a:srgbClr val="C8D3E0"/>
+                      </a:solidFill>
+                    </a:lnT>
+                    <a:lnB w="10160">
+                      <a:solidFill>
+                        <a:srgbClr val="C8D3E0"/>
+                      </a:solidFill>
+                    </a:lnB>
+                    <a:solidFill>
+                      <a:srgbClr val="EEF3F9"/>
+                    </a:solidFill>
+                  </a:tcPr>
+                </a:tc>
+                <a:tc>
+                  <a:txBody>
+                    <a:bodyPr wrap="square"/>
+                    <a:lstStyle/>
+                    <a:p>
+                      <a:pPr algn="l">
+                        <a:lnSpc>
+                          <a:spcPct val="115000"/>
+                        </a:lnSpc>
+                        <a:spcBef>
+                          <a:spcPts val="0"/>
+                        </a:spcBef>
+                        <a:spcAft>
+                          <a:spcPts val="0"/>
+                        </a:spcAft>
+                      </a:pPr>
+                      <a:r>
+                        <a:rPr sz="1050" b="0">
+                          <a:solidFill>
+                            <a:srgbClr val="222222"/>
+                          </a:solidFill>
+                          <a:latin typeface="맑은 고딕"/>
+                          <a:ea typeface="맑은 고딕"/>
+                          <a:cs typeface="맑은 고딕"/>
+                        </a:rPr>
+                        <a:t>충분: 기존 서버 배치 / 부족: 경량화 · 야간 배치 · 동시 생성 조정 / 불가: 근거 보고 후 범위 협의 · 3차 반영</a:t>
+                      </a:r>
+                    </a:p>
+                  </a:txBody>
+                  <a:tcPr marL="36000" marR="36000" marT="18000" marB="18000" anchor="ctr">
+                    <a:lnL w="10160">
+                      <a:solidFill>
+                        <a:srgbClr val="C8D3E0"/>
+                      </a:solidFill>
+                    </a:lnL>
+                    <a:lnR w="10160">
+                      <a:solidFill>
+                        <a:srgbClr val="C8D3E0"/>
+                      </a:solidFill>
+                    </a:lnR>
+                    <a:lnT w="10160">
+                      <a:solidFill>
+                        <a:srgbClr val="C8D3E0"/>
+                      </a:solidFill>
+                    </a:lnT>
+                    <a:lnB w="10160">
+                      <a:solidFill>
+                        <a:srgbClr val="C8D3E0"/>
+                      </a:solidFill>
+                    </a:lnB>
+                    <a:solidFill>
+                      <a:srgbClr val="FFFFFF"/>
+                    </a:solidFill>
+                  </a:tcPr>
+                </a:tc>
+              </a:tr>
+              <a:tr h="620528">
+                <a:tc>
+                  <a:txBody>
+                    <a:bodyPr wrap="square"/>
+                    <a:lstStyle/>
+                    <a:p>
+                      <a:pPr algn="ctr">
+                        <a:lnSpc>
+                          <a:spcPct val="115000"/>
+                        </a:lnSpc>
+                        <a:spcBef>
+                          <a:spcPts val="0"/>
+                        </a:spcBef>
+                        <a:spcAft>
+                          <a:spcPts val="0"/>
+                        </a:spcAft>
+                      </a:pPr>
+                      <a:r>
+                        <a:rPr sz="1050" b="1">
+                          <a:solidFill>
+                            <a:srgbClr val="222222"/>
+                          </a:solidFill>
+                          <a:latin typeface="맑은 고딕"/>
+                          <a:ea typeface="맑은 고딕"/>
+                          <a:cs typeface="맑은 고딕"/>
+                        </a:rPr>
+                        <a:t>언어모델 권한</a:t>
+                      </a:r>
+                    </a:p>
+                  </a:txBody>
+                  <a:tcPr marL="36000" marR="36000" marT="18000" marB="18000" anchor="ctr">
+                    <a:lnL w="10160">
+                      <a:solidFill>
+                        <a:srgbClr val="C8D3E0"/>
+                      </a:solidFill>
+                    </a:lnL>
+                    <a:lnR w="10160">
+                      <a:solidFill>
+                        <a:srgbClr val="C8D3E0"/>
+                      </a:solidFill>
+                    </a:lnR>
+                    <a:lnT w="10160">
+                      <a:solidFill>
+                        <a:srgbClr val="C8D3E0"/>
+                      </a:solidFill>
+                    </a:lnT>
+                    <a:lnB w="10160">
+                      <a:solidFill>
+                        <a:srgbClr val="C8D3E0"/>
+                      </a:solidFill>
+                    </a:lnB>
+                    <a:solidFill>
+                      <a:srgbClr val="EEF3F9"/>
+                    </a:solidFill>
+                  </a:tcPr>
+                </a:tc>
+                <a:tc>
+                  <a:txBody>
+                    <a:bodyPr wrap="square"/>
+                    <a:lstStyle/>
+                    <a:p>
+                      <a:pPr algn="l">
+                        <a:lnSpc>
+                          <a:spcPct val="115000"/>
+                        </a:lnSpc>
+                        <a:spcBef>
+                          <a:spcPts val="0"/>
+                        </a:spcBef>
+                        <a:spcAft>
+                          <a:spcPts val="0"/>
+                        </a:spcAft>
+                      </a:pPr>
+                      <a:r>
+                        <a:rPr sz="1050" b="0">
+                          <a:solidFill>
+                            <a:srgbClr val="222222"/>
+                          </a:solidFill>
+                          <a:latin typeface="맑은 고딕"/>
+                          <a:ea typeface="맑은 고딕"/>
+                          <a:cs typeface="맑은 고딕"/>
+                        </a:rPr>
+                        <a:t>튜닝 가능: 1차 모델 추가 학습 / 제한: 지시문 · 검색 · 분할 · 서빙 개선 + 오픈소스 병행안 비교 (승인 후 교체)</a:t>
+                      </a:r>
+                    </a:p>
+                  </a:txBody>
+                  <a:tcPr marL="36000" marR="36000" marT="18000" marB="18000" anchor="ctr">
+                    <a:lnL w="10160">
+                      <a:solidFill>
+                        <a:srgbClr val="C8D3E0"/>
+                      </a:solidFill>
+                    </a:lnL>
+                    <a:lnR w="10160">
+                      <a:solidFill>
+                        <a:srgbClr val="C8D3E0"/>
+                      </a:solidFill>
+                    </a:lnR>
+                    <a:lnT w="10160">
+                      <a:solidFill>
+                        <a:srgbClr val="C8D3E0"/>
+                      </a:solidFill>
+                    </a:lnT>
+                    <a:lnB w="10160">
+                      <a:solidFill>
+                        <a:srgbClr val="C8D3E0"/>
+                      </a:solidFill>
+                    </a:lnB>
+                    <a:solidFill>
+                      <a:srgbClr val="FFFFFF"/>
+                    </a:solidFill>
+                  </a:tcPr>
+                </a:tc>
+              </a:tr>
+              <a:tr h="620528">
+                <a:tc>
+                  <a:txBody>
+                    <a:bodyPr wrap="square"/>
+                    <a:lstStyle/>
+                    <a:p>
+                      <a:pPr algn="ctr">
+                        <a:lnSpc>
+                          <a:spcPct val="115000"/>
+                        </a:lnSpc>
+                        <a:spcBef>
+                          <a:spcPts val="0"/>
+                        </a:spcBef>
+                        <a:spcAft>
+                          <a:spcPts val="0"/>
+                        </a:spcAft>
+                      </a:pPr>
+                      <a:r>
+                        <a:rPr sz="1050" b="1">
+                          <a:solidFill>
+                            <a:srgbClr val="222222"/>
+                          </a:solidFill>
+                          <a:latin typeface="맑은 고딕"/>
+                          <a:ea typeface="맑은 고딕"/>
+                          <a:cs typeface="맑은 고딕"/>
+                        </a:rPr>
+                        <a:t>30% 측정 조건</a:t>
+                      </a:r>
+                    </a:p>
+                  </a:txBody>
+                  <a:tcPr marL="36000" marR="36000" marT="18000" marB="18000" anchor="ctr">
+                    <a:lnL w="10160">
+                      <a:solidFill>
+                        <a:srgbClr val="C8D3E0"/>
+                      </a:solidFill>
+                    </a:lnL>
+                    <a:lnR w="10160">
+                      <a:solidFill>
+                        <a:srgbClr val="C8D3E0"/>
+                      </a:solidFill>
+                    </a:lnR>
+                    <a:lnT w="10160">
+                      <a:solidFill>
+                        <a:srgbClr val="C8D3E0"/>
+                      </a:solidFill>
+                    </a:lnT>
+                    <a:lnB w="10160">
+                      <a:solidFill>
+                        <a:srgbClr val="C8D3E0"/>
+                      </a:solidFill>
+                    </a:lnB>
+                    <a:solidFill>
+                      <a:srgbClr val="EEF3F9"/>
+                    </a:solidFill>
+                  </a:tcPr>
+                </a:tc>
+                <a:tc>
+                  <a:txBody>
+                    <a:bodyPr wrap="square"/>
+                    <a:lstStyle/>
+                    <a:p>
+                      <a:pPr algn="l">
+                        <a:lnSpc>
+                          <a:spcPct val="115000"/>
+                        </a:lnSpc>
+                        <a:spcBef>
+                          <a:spcPts val="0"/>
+                        </a:spcBef>
+                        <a:spcAft>
+                          <a:spcPts val="0"/>
+                        </a:spcAft>
+                      </a:pPr>
+                      <a:r>
+                        <a:rPr sz="1050" b="0">
+                          <a:solidFill>
+                            <a:srgbClr val="222222"/>
+                          </a:solidFill>
+                          <a:latin typeface="맑은 고딕"/>
+                          <a:ea typeface="맑은 고딕"/>
+                          <a:cs typeface="맑은 고딕"/>
+                        </a:rPr>
+                        <a:t>1차 조건: 서빙 최적화 · 캐시 · 스트리밍 / 2차 조건 · 동시 100명: 비동기 · 대기열 포함, 일반 · 최대 조건 분리 검증</a:t>
+                      </a:r>
+                    </a:p>
+                  </a:txBody>
+                  <a:tcPr marL="36000" marR="36000" marT="18000" marB="18000" anchor="ctr">
+                    <a:lnL w="10160">
+                      <a:solidFill>
+                        <a:srgbClr val="C8D3E0"/>
+                      </a:solidFill>
+                    </a:lnL>
+                    <a:lnR w="10160">
+                      <a:solidFill>
+                        <a:srgbClr val="C8D3E0"/>
+                      </a:solidFill>
+                    </a:lnR>
+                    <a:lnT w="10160">
+                      <a:solidFill>
+                        <a:srgbClr val="C8D3E0"/>
+                      </a:solidFill>
+                    </a:lnT>
+                    <a:lnB w="10160">
+                      <a:solidFill>
+                        <a:srgbClr val="C8D3E0"/>
+                      </a:solidFill>
+                    </a:lnB>
+                    <a:solidFill>
+                      <a:srgbClr val="FFFFFF"/>
+                    </a:solidFill>
+                  </a:tcPr>
+                </a:tc>
+              </a:tr>
+              <a:tr h="620528">
+                <a:tc>
+                  <a:txBody>
+                    <a:bodyPr wrap="square"/>
+                    <a:lstStyle/>
+                    <a:p>
+                      <a:pPr algn="ctr">
+                        <a:lnSpc>
+                          <a:spcPct val="115000"/>
+                        </a:lnSpc>
+                        <a:spcBef>
+                          <a:spcPts val="0"/>
+                        </a:spcBef>
+                        <a:spcAft>
+                          <a:spcPts val="0"/>
+                        </a:spcAft>
+                      </a:pPr>
+                      <a:r>
+                        <a:rPr sz="1050" b="1">
+                          <a:solidFill>
+                            <a:srgbClr val="222222"/>
+                          </a:solidFill>
+                          <a:latin typeface="맑은 고딕"/>
+                          <a:ea typeface="맑은 고딕"/>
+                          <a:cs typeface="맑은 고딕"/>
+                        </a:rPr>
+                        <a:t>첨부 제한 원인</a:t>
+                      </a:r>
+                    </a:p>
+                  </a:txBody>
+                  <a:tcPr marL="36000" marR="36000" marT="18000" marB="18000" anchor="ctr">
+                    <a:lnL w="10160">
+                      <a:solidFill>
+                        <a:srgbClr val="C8D3E0"/>
+                      </a:solidFill>
+                    </a:lnL>
+                    <a:lnR w="10160">
+                      <a:solidFill>
+                        <a:srgbClr val="C8D3E0"/>
+                      </a:solidFill>
+                    </a:lnR>
+                    <a:lnT w="10160">
+                      <a:solidFill>
+                        <a:srgbClr val="C8D3E0"/>
+                      </a:solidFill>
+                    </a:lnT>
+                    <a:lnB w="10160">
+                      <a:solidFill>
+                        <a:srgbClr val="C8D3E0"/>
+                      </a:solidFill>
+                    </a:lnB>
+                    <a:solidFill>
+                      <a:srgbClr val="EEF3F9"/>
+                    </a:solidFill>
+                  </a:tcPr>
+                </a:tc>
+                <a:tc>
+                  <a:txBody>
+                    <a:bodyPr wrap="square"/>
+                    <a:lstStyle/>
+                    <a:p>
+                      <a:pPr algn="l">
+                        <a:lnSpc>
+                          <a:spcPct val="115000"/>
+                        </a:lnSpc>
+                        <a:spcBef>
+                          <a:spcPts val="0"/>
+                        </a:spcBef>
+                        <a:spcAft>
+                          <a:spcPts val="0"/>
+                        </a:spcAft>
+                      </a:pPr>
+                      <a:r>
+                        <a:rPr sz="1050" b="0">
+                          <a:solidFill>
+                            <a:srgbClr val="222222"/>
+                          </a:solidFill>
+                          <a:latin typeface="맑은 고딕"/>
+                          <a:ea typeface="맑은 고딕"/>
+                          <a:cs typeface="맑은 고딕"/>
+                        </a:rPr>
+                        <a:t>설정 · 처리 시간: 설정 조정 · 비동기 처리 / 컨텍스트 · GPU 메모리: 구간 분할 · 요약 · 양자화</a:t>
+                      </a:r>
+                    </a:p>
+                  </a:txBody>
+                  <a:tcPr marL="36000" marR="36000" marT="18000" marB="18000" anchor="ctr">
+                    <a:lnL w="10160">
+                      <a:solidFill>
+                        <a:srgbClr val="C8D3E0"/>
+                      </a:solidFill>
+                    </a:lnL>
+                    <a:lnR w="10160">
+                      <a:solidFill>
+                        <a:srgbClr val="C8D3E0"/>
+                      </a:solidFill>
+                    </a:lnR>
+                    <a:lnT w="10160">
+                      <a:solidFill>
+                        <a:srgbClr val="C8D3E0"/>
+                      </a:solidFill>
+                    </a:lnT>
+                    <a:lnB w="10160">
+                      <a:solidFill>
+                        <a:srgbClr val="C8D3E0"/>
+                      </a:solidFill>
+                    </a:lnB>
+                    <a:solidFill>
+                      <a:srgbClr val="FFFFFF"/>
+                    </a:solidFill>
+                  </a:tcPr>
+                </a:tc>
+              </a:tr>
+              <a:tr h="620528">
+                <a:tc>
+                  <a:txBody>
+                    <a:bodyPr wrap="square"/>
+                    <a:lstStyle/>
+                    <a:p>
+                      <a:pPr algn="ctr">
+                        <a:lnSpc>
+                          <a:spcPct val="115000"/>
+                        </a:lnSpc>
+                        <a:spcBef>
+                          <a:spcPts val="0"/>
+                        </a:spcBef>
+                        <a:spcAft>
+                          <a:spcPts val="0"/>
+                        </a:spcAft>
+                      </a:pPr>
+                      <a:r>
+                        <a:rPr sz="1050" b="1">
+                          <a:solidFill>
+                            <a:srgbClr val="222222"/>
+                          </a:solidFill>
+                          <a:latin typeface="맑은 고딕"/>
+                          <a:ea typeface="맑은 고딕"/>
+                          <a:cs typeface="맑은 고딕"/>
+                        </a:rPr>
+                        <a:t>외부 상용 AI</a:t>
+                      </a:r>
+                    </a:p>
+                  </a:txBody>
+                  <a:tcPr marL="36000" marR="36000" marT="18000" marB="18000" anchor="ctr">
+                    <a:lnL w="10160">
+                      <a:solidFill>
+                        <a:srgbClr val="C8D3E0"/>
+                      </a:solidFill>
+                    </a:lnL>
+                    <a:lnR w="10160">
+                      <a:solidFill>
+                        <a:srgbClr val="C8D3E0"/>
+                      </a:solidFill>
+                    </a:lnR>
+                    <a:lnT w="10160">
+                      <a:solidFill>
+                        <a:srgbClr val="C8D3E0"/>
+                      </a:solidFill>
+                    </a:lnT>
+                    <a:lnB w="10160">
+                      <a:solidFill>
+                        <a:srgbClr val="C8D3E0"/>
+                      </a:solidFill>
+                    </a:lnB>
+                    <a:solidFill>
+                      <a:srgbClr val="EEF3F9"/>
+                    </a:solidFill>
+                  </a:tcPr>
+                </a:tc>
+                <a:tc>
+                  <a:txBody>
+                    <a:bodyPr wrap="square"/>
+                    <a:lstStyle/>
+                    <a:p>
+                      <a:pPr algn="l">
+                        <a:lnSpc>
+                          <a:spcPct val="115000"/>
+                        </a:lnSpc>
+                        <a:spcBef>
+                          <a:spcPts val="0"/>
+                        </a:spcBef>
+                        <a:spcAft>
+                          <a:spcPts val="0"/>
+                        </a:spcAft>
+                      </a:pPr>
+                      <a:r>
+                        <a:rPr sz="1050" b="0">
+                          <a:solidFill>
+                            <a:srgbClr val="222222"/>
+                          </a:solidFill>
+                          <a:latin typeface="맑은 고딕"/>
+                          <a:ea typeface="맑은 고딕"/>
+                          <a:cs typeface="맑은 고딕"/>
+                        </a:rPr>
+                        <a:t>방안 제시: 업무 분류 · 보안 구조 · 3차 반영안 / 시범 연동: 비민감 업무 한정</a:t>
+                      </a:r>
+                    </a:p>
+                  </a:txBody>
+                  <a:tcPr marL="36000" marR="36000" marT="18000" marB="18000" anchor="ctr">
+                    <a:lnL w="10160">
+                      <a:solidFill>
+                        <a:srgbClr val="C8D3E0"/>
+                      </a:solidFill>
+                    </a:lnL>
+                    <a:lnR w="10160">
+                      <a:solidFill>
+                        <a:srgbClr val="C8D3E0"/>
+                      </a:solidFill>
+                    </a:lnR>
+                    <a:lnT w="10160">
+                      <a:solidFill>
+                        <a:srgbClr val="C8D3E0"/>
+                      </a:solidFill>
+                    </a:lnT>
+                    <a:lnB w="10160">
+                      <a:solidFill>
+                        <a:srgbClr val="C8D3E0"/>
+                      </a:solidFill>
+                    </a:lnB>
+                    <a:solidFill>
+                      <a:srgbClr val="FFFFFF"/>
+                    </a:solidFill>
+                  </a:tcPr>
+                </a:tc>
+              </a:tr>
+              <a:tr h="558000">
+                <a:tc>
+                  <a:txBody>
+                    <a:bodyPr wrap="square"/>
+                    <a:lstStyle/>
+                    <a:p>
+                      <a:pPr algn="ctr">
+                        <a:lnSpc>
+                          <a:spcPct val="115000"/>
+                        </a:lnSpc>
+                        <a:spcBef>
+                          <a:spcPts val="0"/>
+                        </a:spcBef>
+                        <a:spcAft>
+                          <a:spcPts val="0"/>
+                        </a:spcAft>
+                      </a:pPr>
+                      <a:r>
+                        <a:rPr sz="1050" b="1">
+                          <a:solidFill>
+                            <a:srgbClr val="222222"/>
+                          </a:solidFill>
+                          <a:latin typeface="맑은 고딕"/>
+                          <a:ea typeface="맑은 고딕"/>
+                          <a:cs typeface="맑은 고딕"/>
+                        </a:rPr>
+                        <a:t>작업장소</a:t>
+                      </a:r>
+                    </a:p>
+                  </a:txBody>
+                  <a:tcPr marL="36000" marR="36000" marT="18000" marB="18000" anchor="ctr">
+                    <a:lnL w="10160">
+                      <a:solidFill>
+                        <a:srgbClr val="C8D3E0"/>
+                      </a:solidFill>
+                    </a:lnL>
+                    <a:lnR w="10160">
+                      <a:solidFill>
+                        <a:srgbClr val="C8D3E0"/>
+                      </a:solidFill>
+                    </a:lnR>
+                    <a:lnT w="10160">
+                      <a:solidFill>
+                        <a:srgbClr val="C8D3E0"/>
+                      </a:solidFill>
+                    </a:lnT>
+                    <a:lnB w="10160">
+                      <a:solidFill>
+                        <a:srgbClr val="C8D3E0"/>
+                      </a:solidFill>
+                    </a:lnB>
+                    <a:solidFill>
+                      <a:srgbClr val="EEF3F9"/>
+                    </a:solidFill>
+                  </a:tcPr>
+                </a:tc>
+                <a:tc>
+                  <a:txBody>
+                    <a:bodyPr wrap="square"/>
+                    <a:lstStyle/>
+                    <a:p>
+                      <a:pPr algn="l">
+                        <a:lnSpc>
+                          <a:spcPct val="115000"/>
+                        </a:lnSpc>
+                        <a:spcBef>
+                          <a:spcPts val="0"/>
+                        </a:spcBef>
+                        <a:spcAft>
+                          <a:spcPts val="0"/>
+                        </a:spcAft>
+                      </a:pPr>
+                      <a:r>
+                        <a:rPr sz="1050" b="0">
+                          <a:solidFill>
+                            <a:srgbClr val="222222"/>
+                          </a:solidFill>
+                          <a:latin typeface="맑은 고딕"/>
+                          <a:ea typeface="맑은 고딕"/>
+                          <a:cs typeface="맑은 고딕"/>
+                        </a:rPr>
+                        <a:t>세종 상주: 인근 작업장 / 서울 원격지: 보안 작업장 + 원격지 보안대책</a:t>
+                      </a:r>
+                    </a:p>
+                  </a:txBody>
+                  <a:tcPr marL="36000" marR="36000" marT="18000" marB="18000" anchor="ctr">
+                    <a:lnL w="10160">
+                      <a:solidFill>
+                        <a:srgbClr val="C8D3E0"/>
+                      </a:solidFill>
+                    </a:lnL>
+                    <a:lnR w="10160">
+                      <a:solidFill>
+                        <a:srgbClr val="C8D3E0"/>
+                      </a:solidFill>
+                    </a:lnR>
+                    <a:lnT w="10160">
+                      <a:solidFill>
+                        <a:srgbClr val="C8D3E0"/>
+                      </a:solidFill>
+                    </a:lnT>
+                    <a:lnB w="10160">
+                      <a:solidFill>
+                        <a:srgbClr val="C8D3E0"/>
+                      </a:solidFill>
+                    </a:lnB>
+                    <a:solidFill>
+                      <a:srgbClr val="FFFFFF"/>
+                    </a:solidFill>
+                  </a:tcPr>
+                </a:tc>
+              </a:tr>
+              <a:tr h="620528">
+                <a:tc>
+                  <a:txBody>
+                    <a:bodyPr wrap="square"/>
+                    <a:lstStyle/>
+                    <a:p>
+                      <a:pPr algn="ctr">
+                        <a:lnSpc>
+                          <a:spcPct val="115000"/>
+                        </a:lnSpc>
+                        <a:spcBef>
+                          <a:spcPts val="0"/>
+                        </a:spcBef>
+                        <a:spcAft>
+                          <a:spcPts val="0"/>
+                        </a:spcAft>
+                      </a:pPr>
+                      <a:r>
+                        <a:rPr sz="1050" b="1">
+                          <a:solidFill>
+                            <a:srgbClr val="222222"/>
+                          </a:solidFill>
+                          <a:latin typeface="맑은 고딕"/>
+                          <a:ea typeface="맑은 고딕"/>
+                          <a:cs typeface="맑은 고딕"/>
+                        </a:rPr>
+                        <a:t>1차 산출물 · 의견 목록</a:t>
+                      </a:r>
+                    </a:p>
+                  </a:txBody>
+                  <a:tcPr marL="36000" marR="36000" marT="18000" marB="18000" anchor="ctr">
+                    <a:lnL w="10160">
+                      <a:solidFill>
+                        <a:srgbClr val="C8D3E0"/>
+                      </a:solidFill>
+                    </a:lnL>
+                    <a:lnR w="10160">
+                      <a:solidFill>
+                        <a:srgbClr val="C8D3E0"/>
+                      </a:solidFill>
+                    </a:lnR>
+                    <a:lnT w="10160">
+                      <a:solidFill>
+                        <a:srgbClr val="C8D3E0"/>
+                      </a:solidFill>
+                    </a:lnT>
+                    <a:lnB w="10160">
+                      <a:solidFill>
+                        <a:srgbClr val="C8D3E0"/>
+                      </a:solidFill>
+                    </a:lnB>
+                    <a:solidFill>
+                      <a:srgbClr val="EEF3F9"/>
+                    </a:solidFill>
+                  </a:tcPr>
+                </a:tc>
+                <a:tc>
+                  <a:txBody>
+                    <a:bodyPr wrap="square"/>
+                    <a:lstStyle/>
+                    <a:p>
+                      <a:pPr algn="l">
+                        <a:lnSpc>
+                          <a:spcPct val="115000"/>
+                        </a:lnSpc>
+                        <a:spcBef>
+                          <a:spcPts val="0"/>
+                        </a:spcBef>
+                        <a:spcAft>
+                          <a:spcPts val="0"/>
+                        </a:spcAft>
+                      </a:pPr>
+                      <a:r>
+                        <a:rPr sz="1050" b="0">
+                          <a:solidFill>
+                            <a:srgbClr val="222222"/>
+                          </a:solidFill>
+                          <a:latin typeface="맑은 고딕"/>
+                          <a:ea typeface="맑은 고딕"/>
+                          <a:cs typeface="맑은 고딕"/>
+                        </a:rPr>
+                        <a:t>전체 인수: 재활용 일정 / 일부 · 지연: 분석 기간 확보 / 목록 미제공: RFP 명시 항목 기준 이행</a:t>
+                      </a:r>
+                    </a:p>
+                  </a:txBody>
+                  <a:tcPr marL="36000" marR="36000" marT="18000" marB="18000" anchor="ctr">
+                    <a:lnL w="10160">
+                      <a:solidFill>
+                        <a:srgbClr val="C8D3E0"/>
+                      </a:solidFill>
+                    </a:lnL>
+                    <a:lnR w="10160">
+                      <a:solidFill>
+                        <a:srgbClr val="C8D3E0"/>
+                      </a:solidFill>
+                    </a:lnR>
+                    <a:lnT w="10160">
+                      <a:solidFill>
+                        <a:srgbClr val="C8D3E0"/>
+                      </a:solidFill>
+                    </a:lnT>
+                    <a:lnB w="10160">
+                      <a:solidFill>
+                        <a:srgbClr val="C8D3E0"/>
+                      </a:solidFill>
+                    </a:lnB>
+                    <a:solidFill>
+                      <a:srgbClr val="FFFFFF"/>
+                    </a:solidFill>
+                  </a:tcPr>
+                </a:tc>
+              </a:tr>
+            </a:tbl>
+          </a:graphicData>
+        </a:graphic>
+      </p:graphicFrame>
+      <p:sp>
+        <p:nvSpPr>
+          <p:cNvPr id="31" name="Rectangle 30"/>
+          <p:cNvSpPr/>
+          <p:nvPr/>
+        </p:nvSpPr>
+        <p:spPr>
+          <a:xfrm>
+            <a:off x="280800" y="7889698"/>
+            <a:ext cx="6332400" cy="772583"/>
+          </a:xfrm>
+          <a:prstGeom prst="rect">
+            <a:avLst/>
+          </a:prstGeom>
+          <a:solidFill>
+            <a:srgbClr val="1D4E89"/>
+          </a:solidFill>
+          <a:ln>
+            <a:noFill/>
+          </a:ln>
+          <a:effectLst/>
+        </p:spPr>
+        <p:style>
+          <a:lnRef idx="1">
+            <a:schemeClr val="accent1"/>
+          </a:lnRef>
+          <a:fillRef idx="3">
+            <a:schemeClr val="accent1"/>
+          </a:fillRef>
+          <a:effectRef idx="2">
+            <a:schemeClr val="accent1"/>
+          </a:effectRef>
+          <a:fontRef idx="minor">
+            <a:schemeClr val="lt1"/>
+          </a:fontRef>
+        </p:style>
+        <p:txBody>
+          <a:bodyPr rtlCol="0" anchor="ctr" wrap="square"/>
+          <a:lstStyle/>
+          <a:p>
+            <a:pPr algn="ctr"/>
+          </a:p>
+        </p:txBody>
+      </p:sp>
+      <p:sp>
+        <p:nvSpPr>
+          <p:cNvPr id="32" name="TextBox 31"/>
+          <p:cNvSpPr txBox="1"/>
+          <p:nvPr/>
+        </p:nvSpPr>
+        <p:spPr>
+          <a:xfrm>
+            <a:off x="406799" y="7943698"/>
+            <a:ext cx="6080400" cy="198000"/>
+          </a:xfrm>
+          <a:prstGeom prst="rect">
+            <a:avLst/>
+          </a:prstGeom>
+          <a:noFill/>
+        </p:spPr>
+        <p:txBody>
+          <a:bodyPr wrap="square" lIns="0" rIns="0" tIns="0" bIns="0" anchor="ctr">
+            <a:noAutofit/>
+          </a:bodyPr>
+          <a:lstStyle/>
+          <a:p>
+            <a:r>
+              <a:rPr sz="1050" b="1">
+                <a:solidFill>
+                  <a:srgbClr val="FFE699"/>
+                </a:solidFill>
+                <a:latin typeface="맑은 고딕"/>
+                <a:ea typeface="맑은 고딕"/>
+                <a:cs typeface="맑은 고딕"/>
+              </a:rPr>
+              <a:t>확정 원칙</a:t>
+            </a:r>
+          </a:p>
+        </p:txBody>
+      </p:sp>
+      <p:sp>
+        <p:nvSpPr>
+          <p:cNvPr id="33" name="TextBox 32"/>
+          <p:cNvSpPr txBox="1"/>
+          <p:nvPr/>
+        </p:nvSpPr>
+        <p:spPr>
+          <a:xfrm>
+            <a:off x="406799" y="8141698"/>
+            <a:ext cx="6080400" cy="466583"/>
+          </a:xfrm>
+          <a:prstGeom prst="rect">
+            <a:avLst/>
+          </a:prstGeom>
+          <a:noFill/>
+        </p:spPr>
+        <p:txBody>
+          <a:bodyPr wrap="square" lIns="7200" rIns="7200" tIns="7200" bIns="7200" anchor="t">
+            <a:noAutofit/>
+          </a:bodyPr>
+          <a:lstStyle/>
+          <a:p>
+            <a:pPr>
+              <a:lnSpc>
+                <a:spcPct val="135000"/>
+              </a:lnSpc>
+              <a:spcBef>
+                <a:spcPts val="0"/>
+              </a:spcBef>
+              <a:spcAft>
+                <a:spcPts val="0"/>
+              </a:spcAft>
+            </a:pPr>
+            <a:r>
+              <a:rPr sz="1150" b="0">
+                <a:solidFill>
+                  <a:srgbClr val="FFFFFF"/>
+                </a:solidFill>
+                <a:latin typeface="맑은 고딕"/>
+                <a:ea typeface="맑은 고딕"/>
+                <a:cs typeface="맑은 고딕"/>
+              </a:rPr>
+              <a:t>모든 조건은 착수보고회 전까지 발주기관과 서면으로 확정하고, 결과를 사업수행계획서의 성능 목표 · 일정 · 작업장소에 그대로 반영합니다.</a:t>
+            </a:r>
+          </a:p>
+        </p:txBody>
+      </p:sp>
+      <p:sp>
+        <p:nvSpPr>
+          <p:cNvPr id="34" name="Rectangle 33"/>
+          <p:cNvSpPr/>
+          <p:nvPr/>
+        </p:nvSpPr>
+        <p:spPr>
+          <a:xfrm>
+            <a:off x="2988000" y="9630000"/>
+            <a:ext cx="882000" cy="270000"/>
+          </a:xfrm>
+          <a:prstGeom prst="rect">
+            <a:avLst/>
+          </a:prstGeom>
+          <a:solidFill>
+            <a:srgbClr val="FFFFFF"/>
+          </a:solidFill>
+          <a:ln>
+            <a:noFill/>
+          </a:ln>
+          <a:effectLst/>
+        </p:spPr>
+        <p:style>
+          <a:lnRef idx="1">
+            <a:schemeClr val="accent1"/>
+          </a:lnRef>
+          <a:fillRef idx="3">
+            <a:schemeClr val="accent1"/>
+          </a:fillRef>
+          <a:effectRef idx="2">
+            <a:schemeClr val="accent1"/>
+          </a:effectRef>
+          <a:fontRef idx="minor">
+            <a:schemeClr val="lt1"/>
+          </a:fontRef>
+        </p:style>
+        <p:txBody>
+          <a:bodyPr rtlCol="0" anchor="ctr" wrap="square"/>
+          <a:lstStyle/>
+          <a:p>
+            <a:pPr algn="ctr"/>
+          </a:p>
+        </p:txBody>
+      </p:sp>
+      <p:sp>
+        <p:nvSpPr>
+          <p:cNvPr id="35" name="TextBox 34"/>
+          <p:cNvSpPr txBox="1"/>
+          <p:nvPr/>
+        </p:nvSpPr>
+        <p:spPr>
+          <a:xfrm>
+            <a:off x="2700000" y="9648000"/>
+            <a:ext cx="1458000" cy="234000"/>
+          </a:xfrm>
+          <a:prstGeom prst="rect">
+            <a:avLst/>
+          </a:prstGeom>
+          <a:noFill/>
+        </p:spPr>
+        <p:txBody>
+          <a:bodyPr wrap="square" lIns="0" rIns="0" tIns="0" bIns="0" anchor="ctr">
+            <a:noAutofit/>
+          </a:bodyPr>
+          <a:lstStyle/>
+          <a:p>
+            <a:pPr algn="ctr">
+              <a:lnSpc>
+                <a:spcPct val="120000"/>
+              </a:lnSpc>
+              <a:spcBef>
+                <a:spcPts val="0"/>
+              </a:spcBef>
+              <a:spcAft>
+                <a:spcPts val="0"/>
+              </a:spcAft>
+            </a:pPr>
+            <a:r>
+              <a:rPr sz="1000" b="0">
+                <a:solidFill>
+                  <a:srgbClr val="404040"/>
+                </a:solidFill>
+                <a:latin typeface="맑은 고딕"/>
+                <a:ea typeface="맑은 고딕"/>
+                <a:cs typeface="맑은 고딕"/>
+              </a:rPr>
+              <a:t>8</a:t>
+            </a:r>
+          </a:p>
+        </p:txBody>
+      </p:sp>
+    </p:spTree>
+  </p:cSld>
+  <p:clrMapOvr>
+    <a:masterClrMapping/>
+  </p:clrMapOvr>
+</p:sld>
+</file>
+
+<file path=ppt/slides/slide14.xml><?xml version="1.0" encoding="utf-8"?>
 <p:sld xmlns:a="http://schemas.openxmlformats.org/drawingml/2006/main" xmlns:p="http://schemas.openxmlformats.org/presentationml/2006/main" xmlns:r="http://schemas.openxmlformats.org/officeDocument/2006/relationships">
   <p:cSld>
     <p:spTree>
@@ -17855,7 +19447,7 @@
 </p:sld>
 </file>
 
-<file path=ppt/slides/slide14.xml><?xml version="1.0" encoding="utf-8"?>
+<file path=ppt/slides/slide15.xml><?xml version="1.0" encoding="utf-8"?>
 <p:sld xmlns:a="http://schemas.openxmlformats.org/drawingml/2006/main" xmlns:p="http://schemas.openxmlformats.org/presentationml/2006/main" xmlns:r="http://schemas.openxmlformats.org/officeDocument/2006/relationships">
   <p:cSld>
     <p:spTree>
@@ -18183,7 +19775,7 @@
                 <a:ea typeface="맑은 고딕" panose="00000800000000000000" pitchFamily="2" charset="-127"/>
                 <a:cs typeface="맑은 고딕" panose="00000800000000000000" pitchFamily="2" charset="-127"/>
               </a:rPr>
-              <a:t> 지식을 만들고, 직권조사 계획서와 판정서 검증에 함께 활용함 (→ 31~34)</a:t>
+              <a:t> 지식을 만들고, 직권조사 계획서와 판정서 검증에 함께 활용함 (→ 33~36)</a:t>
             </a:r>
           </a:p>
         </p:txBody>
@@ -20529,7 +22121,7 @@
                 <a:ea typeface="맑은 고딕"/>
                 <a:cs typeface="맑은 고딕"/>
               </a:rPr>
-              <a:t>9</a:t>
+              <a:t>10</a:t>
             </a:r>
           </a:p>
         </p:txBody>
@@ -20542,7 +22134,7 @@
 </p:sld>
 </file>
 
-<file path=ppt/slides/slide15.xml><?xml version="1.0" encoding="utf-8"?>
+<file path=ppt/slides/slide16.xml><?xml version="1.0" encoding="utf-8"?>
 <p:sld xmlns:a="http://schemas.openxmlformats.org/drawingml/2006/main" xmlns:p="http://schemas.openxmlformats.org/presentationml/2006/main" xmlns:r="http://schemas.openxmlformats.org/officeDocument/2006/relationships">
   <p:cSld>
     <p:spTree>
@@ -20870,7 +22462,7 @@
                 <a:ea typeface="맑은 고딕" panose="00000800000000000000" pitchFamily="2" charset="-127"/>
                 <a:cs typeface="맑은 고딕" panose="00000800000000000000" pitchFamily="2" charset="-127"/>
               </a:rPr>
-              <a:t>까지 넓힘 (→ 35~41)</a:t>
+              <a:t>까지 넓힘 (→ 37~43)</a:t>
             </a:r>
           </a:p>
         </p:txBody>
@@ -22438,7 +24030,7 @@
                 <a:ea typeface="맑은 고딕"/>
                 <a:cs typeface="맑은 고딕"/>
               </a:rPr>
-              <a:t>10</a:t>
+              <a:t>11</a:t>
             </a:r>
           </a:p>
         </p:txBody>
@@ -22451,7 +24043,7 @@
 </p:sld>
 </file>
 
-<file path=ppt/slides/slide16.xml><?xml version="1.0" encoding="utf-8"?>
+<file path=ppt/slides/slide17.xml><?xml version="1.0" encoding="utf-8"?>
 <p:sld xmlns:a="http://schemas.openxmlformats.org/drawingml/2006/main" xmlns:p="http://schemas.openxmlformats.org/presentationml/2006/main" xmlns:r="http://schemas.openxmlformats.org/officeDocument/2006/relationships">
   <p:cSld>
     <p:spTree>
@@ -22779,7 +24371,7 @@
                 <a:ea typeface="맑은 고딕" panose="00000800000000000000" pitchFamily="2" charset="-127"/>
                 <a:cs typeface="맑은 고딕" panose="00000800000000000000" pitchFamily="2" charset="-127"/>
               </a:rPr>
-              <a:t>로 조사관 수작업을 줄임 (→ 42~48)</a:t>
+              <a:t>로 조사관 수작업을 줄임 (→ 44~50)</a:t>
             </a:r>
           </a:p>
         </p:txBody>
@@ -25221,7 +26813,7 @@
                 <a:ea typeface="맑은 고딕"/>
                 <a:cs typeface="맑은 고딕"/>
               </a:rPr>
-              <a:t>11</a:t>
+              <a:t>12</a:t>
             </a:r>
           </a:p>
         </p:txBody>
@@ -25234,7 +26826,7 @@
 </p:sld>
 </file>
 
-<file path=ppt/slides/slide17.xml><?xml version="1.0" encoding="utf-8"?>
+<file path=ppt/slides/slide18.xml><?xml version="1.0" encoding="utf-8"?>
 <p:sld xmlns:a="http://schemas.openxmlformats.org/drawingml/2006/main" xmlns:p="http://schemas.openxmlformats.org/presentationml/2006/main" xmlns:r="http://schemas.openxmlformats.org/officeDocument/2006/relationships">
   <p:cSld>
     <p:spTree>
@@ -25562,7 +27154,7 @@
                 <a:ea typeface="맑은 고딕" panose="00000800000000000000" pitchFamily="2" charset="-127"/>
                 <a:cs typeface="맑은 고딕" panose="00000800000000000000" pitchFamily="2" charset="-127"/>
               </a:rPr>
-              <a:t>하며, DA · DBA가 데이터 표준과 품질을 관리함 (→ 49~56)</a:t>
+              <a:t>하며, DA · DBA가 데이터 표준과 품질을 관리함 (→ 51~58)</a:t>
             </a:r>
           </a:p>
         </p:txBody>
@@ -27896,7 +29488,7 @@
                 <a:ea typeface="맑은 고딕"/>
                 <a:cs typeface="맑은 고딕"/>
               </a:rPr>
-              <a:t>12</a:t>
+              <a:t>13</a:t>
             </a:r>
           </a:p>
         </p:txBody>
@@ -27909,7 +29501,7 @@
 </p:sld>
 </file>
 
-<file path=ppt/slides/slide18.xml><?xml version="1.0" encoding="utf-8"?>
+<file path=ppt/slides/slide19.xml><?xml version="1.0" encoding="utf-8"?>
 <p:sld xmlns:a="http://schemas.openxmlformats.org/drawingml/2006/main" xmlns:p="http://schemas.openxmlformats.org/presentationml/2006/main" xmlns:r="http://schemas.openxmlformats.org/officeDocument/2006/relationships">
   <p:cSld>
     <p:spTree>
@@ -28228,7 +29820,7 @@
 </p:sld>
 </file>
 
-<file path=ppt/slides/slide19.xml><?xml version="1.0" encoding="utf-8"?>
+<file path=ppt/slides/slide20.xml><?xml version="1.0" encoding="utf-8"?>
 <p:sld xmlns:a="http://schemas.openxmlformats.org/drawingml/2006/main" xmlns:p="http://schemas.openxmlformats.org/presentationml/2006/main" xmlns:r="http://schemas.openxmlformats.org/officeDocument/2006/relationships">
   <p:cSld>
     <p:spTree>
@@ -28556,7 +30148,7 @@
                 <a:ea typeface="맑은 고딕" panose="00000800000000000000" pitchFamily="2" charset="-127"/>
                 <a:cs typeface="맑은 고딕" panose="00000800000000000000" pitchFamily="2" charset="-127"/>
               </a:rPr>
-              <a:t>로 제거하고, 구간 분할 처리로 대용량 첨부의 누락을 막음 (→ 58~60)</a:t>
+              <a:t>로 제거하고, 구간 분할 처리로 대용량 첨부의 누락을 막음 (→ 60~62)</a:t>
             </a:r>
           </a:p>
         </p:txBody>
@@ -29826,7 +31418,7 @@
                 <a:ea typeface="맑은 고딕"/>
                 <a:cs typeface="맑은 고딕"/>
               </a:rPr>
-              <a:t>14</a:t>
+              <a:t>15</a:t>
             </a:r>
           </a:p>
         </p:txBody>
@@ -29839,7 +31431,7 @@
 </p:sld>
 </file>
 
-<file path=ppt/slides/slide20.xml><?xml version="1.0" encoding="utf-8"?>
+<file path=ppt/slides/slide21.xml><?xml version="1.0" encoding="utf-8"?>
 <p:sld xmlns:a="http://schemas.openxmlformats.org/drawingml/2006/main" xmlns:p="http://schemas.openxmlformats.org/presentationml/2006/main" xmlns:r="http://schemas.openxmlformats.org/officeDocument/2006/relationships">
   <p:cSld>
     <p:spTree>
@@ -30167,7 +31759,7 @@
                 <a:ea typeface="맑은 고딕" panose="00000800000000000000" pitchFamily="2" charset="-127"/>
                 <a:cs typeface="맑은 고딕" panose="00000800000000000000" pitchFamily="2" charset="-127"/>
               </a:rPr>
-              <a:t>을 수행하고, 연계는 기관별 최적 방식(EAI · ESB · DB 복제 · API)을 적용함 (→ 61~66)</a:t>
+              <a:t>을 수행하고, 연계는 기관별 최적 방식(EAI · ESB · DB 복제 · API)을 적용함 (→ 63~68)</a:t>
             </a:r>
           </a:p>
         </p:txBody>
@@ -31702,7 +33294,7 @@
                 <a:ea typeface="맑은 고딕"/>
                 <a:cs typeface="맑은 고딕"/>
               </a:rPr>
-              <a:t>15</a:t>
+              <a:t>16</a:t>
             </a:r>
           </a:p>
         </p:txBody>
@@ -31715,7 +33307,7 @@
 </p:sld>
 </file>
 
-<file path=ppt/slides/slide21.xml><?xml version="1.0" encoding="utf-8"?>
+<file path=ppt/slides/slide22.xml><?xml version="1.0" encoding="utf-8"?>
 <p:sld xmlns:a="http://schemas.openxmlformats.org/drawingml/2006/main" xmlns:p="http://schemas.openxmlformats.org/presentationml/2006/main" xmlns:r="http://schemas.openxmlformats.org/officeDocument/2006/relationships">
   <p:cSld>
     <p:spTree>
@@ -32034,7 +33626,7 @@
 </p:sld>
 </file>
 
-<file path=ppt/slides/slide22.xml><?xml version="1.0" encoding="utf-8"?>
+<file path=ppt/slides/slide23.xml><?xml version="1.0" encoding="utf-8"?>
 <p:sld xmlns:a="http://schemas.openxmlformats.org/drawingml/2006/main" xmlns:p="http://schemas.openxmlformats.org/presentationml/2006/main" xmlns:r="http://schemas.openxmlformats.org/officeDocument/2006/relationships">
   <p:cSld>
     <p:spTree>
@@ -32362,7 +33954,7 @@
                 <a:ea typeface="맑은 고딕" panose="00000800000000000000" pitchFamily="2" charset="-127"/>
                 <a:cs typeface="맑은 고딕" panose="00000800000000000000" pitchFamily="2" charset="-127"/>
               </a:rPr>
-              <a:t>을 두고, 착수 · 중간 · 완료 보고회와 주간 · 월간 회의로 관리함 (→ 11~13, 68~73)</a:t>
+              <a:t>을 두고, 착수 · 중간 · 완료 보고회와 주간 · 월간 회의로 관리함 (→ 11~13, 70~75)</a:t>
             </a:r>
           </a:p>
         </p:txBody>
@@ -35042,7 +36634,7 @@
                 <a:ea typeface="맑은 고딕"/>
                 <a:cs typeface="맑은 고딕"/>
               </a:rPr>
-              <a:t>17</a:t>
+              <a:t>18</a:t>
             </a:r>
           </a:p>
         </p:txBody>
@@ -35055,7 +36647,7 @@
 </p:sld>
 </file>
 
-<file path=ppt/slides/slide23.xml><?xml version="1.0" encoding="utf-8"?>
+<file path=ppt/slides/slide24.xml><?xml version="1.0" encoding="utf-8"?>
 <p:sld xmlns:a="http://schemas.openxmlformats.org/drawingml/2006/main" xmlns:p="http://schemas.openxmlformats.org/presentationml/2006/main" xmlns:r="http://schemas.openxmlformats.org/officeDocument/2006/relationships">
   <p:cSld>
     <p:spTree>
@@ -35383,7 +36975,7 @@
                 <a:ea typeface="맑은 고딕" panose="00000800000000000000" pitchFamily="2" charset="-127"/>
                 <a:cs typeface="맑은 고딕" panose="00000800000000000000" pitchFamily="2" charset="-127"/>
               </a:rPr>
-              <a:t>, 인원 · 문서 · 장비 · 시스템 보안대책을 제공함 (→ 75~79)</a:t>
+              <a:t>, 인원 · 문서 · 장비 · 시스템 보안대책을 제공함 (→ 77~81)</a:t>
             </a:r>
           </a:p>
         </p:txBody>
@@ -36420,7 +38012,7 @@
                 <a:ea typeface="맑은 고딕"/>
                 <a:cs typeface="맑은 고딕"/>
               </a:rPr>
-              <a:t>18</a:t>
+              <a:t>19</a:t>
             </a:r>
           </a:p>
         </p:txBody>

--- a/proposals/2026-11_nlrc-ai-labor-commission/nlrc_제안요약서.pptx
+++ b/proposals/2026-11_nlrc-ai-labor-commission/nlrc_제안요약서.pptx
@@ -41305,6 +41305,228 @@
                           <a:ea typeface="맑은 고딕"/>
                           <a:cs typeface="맑은 고딕"/>
                         </a:rPr>
+                        <a:t>SK가스 26년 Trading AI 사업(PP)</a:t>
+                      </a:r>
+                    </a:p>
+                  </a:txBody>
+                  <a:tcPr marL="36000" marR="36000" marT="18000" marB="18000" anchor="ctr">
+                    <a:lnL w="10160">
+                      <a:solidFill>
+                        <a:srgbClr val="C8D3E0"/>
+                      </a:solidFill>
+                    </a:lnL>
+                    <a:lnR w="10160">
+                      <a:solidFill>
+                        <a:srgbClr val="C8D3E0"/>
+                      </a:solidFill>
+                    </a:lnR>
+                    <a:lnT w="10160">
+                      <a:solidFill>
+                        <a:srgbClr val="C8D3E0"/>
+                      </a:solidFill>
+                    </a:lnT>
+                    <a:lnB w="10160">
+                      <a:solidFill>
+                        <a:srgbClr val="C8D3E0"/>
+                      </a:solidFill>
+                    </a:lnB>
+                    <a:solidFill>
+                      <a:srgbClr val="EEF3F9"/>
+                    </a:solidFill>
+                  </a:tcPr>
+                </a:tc>
+                <a:tc>
+                  <a:txBody>
+                    <a:bodyPr wrap="square"/>
+                    <a:lstStyle/>
+                    <a:p>
+                      <a:pPr algn="ctr">
+                        <a:lnSpc>
+                          <a:spcPct val="115000"/>
+                        </a:lnSpc>
+                        <a:spcBef>
+                          <a:spcPts val="0"/>
+                        </a:spcBef>
+                        <a:spcAft>
+                          <a:spcPts val="0"/>
+                        </a:spcAft>
+                      </a:pPr>
+                      <a:r>
+                        <a:rPr sz="1000" b="0">
+                          <a:solidFill>
+                            <a:srgbClr val="222222"/>
+                          </a:solidFill>
+                          <a:latin typeface="맑은 고딕"/>
+                          <a:ea typeface="맑은 고딕"/>
+                          <a:cs typeface="맑은 고딕"/>
+                        </a:rPr>
+                        <a:t>2026.07.01 ~ 2026.07.24</a:t>
+                      </a:r>
+                    </a:p>
+                  </a:txBody>
+                  <a:tcPr marL="36000" marR="36000" marT="18000" marB="18000" anchor="ctr">
+                    <a:lnL w="10160">
+                      <a:solidFill>
+                        <a:srgbClr val="C8D3E0"/>
+                      </a:solidFill>
+                    </a:lnL>
+                    <a:lnR w="10160">
+                      <a:solidFill>
+                        <a:srgbClr val="C8D3E0"/>
+                      </a:solidFill>
+                    </a:lnR>
+                    <a:lnT w="10160">
+                      <a:solidFill>
+                        <a:srgbClr val="C8D3E0"/>
+                      </a:solidFill>
+                    </a:lnT>
+                    <a:lnB w="10160">
+                      <a:solidFill>
+                        <a:srgbClr val="C8D3E0"/>
+                      </a:solidFill>
+                    </a:lnB>
+                    <a:solidFill>
+                      <a:srgbClr val="FFFFFF"/>
+                    </a:solidFill>
+                  </a:tcPr>
+                </a:tc>
+                <a:tc>
+                  <a:txBody>
+                    <a:bodyPr wrap="square"/>
+                    <a:lstStyle/>
+                    <a:p>
+                      <a:pPr algn="ctr">
+                        <a:lnSpc>
+                          <a:spcPct val="115000"/>
+                        </a:lnSpc>
+                        <a:spcBef>
+                          <a:spcPts val="0"/>
+                        </a:spcBef>
+                        <a:spcAft>
+                          <a:spcPts val="0"/>
+                        </a:spcAft>
+                      </a:pPr>
+                      <a:r>
+                        <a:rPr sz="1000" b="0">
+                          <a:solidFill>
+                            <a:srgbClr val="222222"/>
+                          </a:solidFill>
+                          <a:latin typeface="맑은 고딕"/>
+                          <a:ea typeface="맑은 고딕"/>
+                          <a:cs typeface="맑은 고딕"/>
+                        </a:rPr>
+                        <a:t>32</a:t>
+                      </a:r>
+                    </a:p>
+                  </a:txBody>
+                  <a:tcPr marL="36000" marR="36000" marT="18000" marB="18000" anchor="ctr">
+                    <a:lnL w="10160">
+                      <a:solidFill>
+                        <a:srgbClr val="C8D3E0"/>
+                      </a:solidFill>
+                    </a:lnL>
+                    <a:lnR w="10160">
+                      <a:solidFill>
+                        <a:srgbClr val="C8D3E0"/>
+                      </a:solidFill>
+                    </a:lnR>
+                    <a:lnT w="10160">
+                      <a:solidFill>
+                        <a:srgbClr val="C8D3E0"/>
+                      </a:solidFill>
+                    </a:lnT>
+                    <a:lnB w="10160">
+                      <a:solidFill>
+                        <a:srgbClr val="C8D3E0"/>
+                      </a:solidFill>
+                    </a:lnB>
+                    <a:solidFill>
+                      <a:srgbClr val="FFFFFF"/>
+                    </a:solidFill>
+                  </a:tcPr>
+                </a:tc>
+                <a:tc>
+                  <a:txBody>
+                    <a:bodyPr wrap="square"/>
+                    <a:lstStyle/>
+                    <a:p>
+                      <a:pPr algn="l">
+                        <a:lnSpc>
+                          <a:spcPct val="115000"/>
+                        </a:lnSpc>
+                        <a:spcBef>
+                          <a:spcPts val="0"/>
+                        </a:spcBef>
+                        <a:spcAft>
+                          <a:spcPts val="0"/>
+                        </a:spcAft>
+                      </a:pPr>
+                      <a:r>
+                        <a:rPr sz="1000" b="0">
+                          <a:solidFill>
+                            <a:srgbClr val="222222"/>
+                          </a:solidFill>
+                          <a:latin typeface="맑은 고딕"/>
+                          <a:ea typeface="맑은 고딕"/>
+                          <a:cs typeface="맑은 고딕"/>
+                        </a:rPr>
+                        <a:t>에스케이㈜</a:t>
+                      </a:r>
+                    </a:p>
+                  </a:txBody>
+                  <a:tcPr marL="36000" marR="36000" marT="18000" marB="18000" anchor="ctr">
+                    <a:lnL w="10160">
+                      <a:solidFill>
+                        <a:srgbClr val="C8D3E0"/>
+                      </a:solidFill>
+                    </a:lnL>
+                    <a:lnR w="10160">
+                      <a:solidFill>
+                        <a:srgbClr val="C8D3E0"/>
+                      </a:solidFill>
+                    </a:lnR>
+                    <a:lnT w="10160">
+                      <a:solidFill>
+                        <a:srgbClr val="C8D3E0"/>
+                      </a:solidFill>
+                    </a:lnT>
+                    <a:lnB w="10160">
+                      <a:solidFill>
+                        <a:srgbClr val="C8D3E0"/>
+                      </a:solidFill>
+                    </a:lnB>
+                    <a:solidFill>
+                      <a:srgbClr val="FFFFFF"/>
+                    </a:solidFill>
+                  </a:tcPr>
+                </a:tc>
+              </a:tr>
+              <a:tr h="517608">
+                <a:tc>
+                  <a:txBody>
+                    <a:bodyPr wrap="square"/>
+                    <a:lstStyle/>
+                    <a:p>
+                      <a:pPr algn="ctr">
+                        <a:lnSpc>
+                          <a:spcPct val="115000"/>
+                        </a:lnSpc>
+                        <a:spcBef>
+                          <a:spcPts val="0"/>
+                        </a:spcBef>
+                        <a:spcAft>
+                          <a:spcPts val="0"/>
+                        </a:spcAft>
+                      </a:pPr>
+                      <a:r>
+                        <a:rPr sz="1000" b="1">
+                          <a:solidFill>
+                            <a:srgbClr val="222222"/>
+                          </a:solidFill>
+                          <a:latin typeface="맑은 고딕"/>
+                          <a:ea typeface="맑은 고딕"/>
+                          <a:cs typeface="맑은 고딕"/>
+                        </a:rPr>
                         <a:t>Trading AI Agent 개발 및 ML/DL 분석</a:t>
                       </a:r>
                     </a:p>
@@ -41416,228 +41638,6 @@
                           <a:cs typeface="맑은 고딕"/>
                         </a:rPr>
                         <a:t>129</a:t>
-                      </a:r>
-                    </a:p>
-                  </a:txBody>
-                  <a:tcPr marL="36000" marR="36000" marT="18000" marB="18000" anchor="ctr">
-                    <a:lnL w="10160">
-                      <a:solidFill>
-                        <a:srgbClr val="C8D3E0"/>
-                      </a:solidFill>
-                    </a:lnL>
-                    <a:lnR w="10160">
-                      <a:solidFill>
-                        <a:srgbClr val="C8D3E0"/>
-                      </a:solidFill>
-                    </a:lnR>
-                    <a:lnT w="10160">
-                      <a:solidFill>
-                        <a:srgbClr val="C8D3E0"/>
-                      </a:solidFill>
-                    </a:lnT>
-                    <a:lnB w="10160">
-                      <a:solidFill>
-                        <a:srgbClr val="C8D3E0"/>
-                      </a:solidFill>
-                    </a:lnB>
-                    <a:solidFill>
-                      <a:srgbClr val="FFFFFF"/>
-                    </a:solidFill>
-                  </a:tcPr>
-                </a:tc>
-                <a:tc>
-                  <a:txBody>
-                    <a:bodyPr wrap="square"/>
-                    <a:lstStyle/>
-                    <a:p>
-                      <a:pPr algn="l">
-                        <a:lnSpc>
-                          <a:spcPct val="115000"/>
-                        </a:lnSpc>
-                        <a:spcBef>
-                          <a:spcPts val="0"/>
-                        </a:spcBef>
-                        <a:spcAft>
-                          <a:spcPts val="0"/>
-                        </a:spcAft>
-                      </a:pPr>
-                      <a:r>
-                        <a:rPr sz="1000" b="0">
-                          <a:solidFill>
-                            <a:srgbClr val="222222"/>
-                          </a:solidFill>
-                          <a:latin typeface="맑은 고딕"/>
-                          <a:ea typeface="맑은 고딕"/>
-                          <a:cs typeface="맑은 고딕"/>
-                        </a:rPr>
-                        <a:t>에스케이㈜</a:t>
-                      </a:r>
-                    </a:p>
-                  </a:txBody>
-                  <a:tcPr marL="36000" marR="36000" marT="18000" marB="18000" anchor="ctr">
-                    <a:lnL w="10160">
-                      <a:solidFill>
-                        <a:srgbClr val="C8D3E0"/>
-                      </a:solidFill>
-                    </a:lnL>
-                    <a:lnR w="10160">
-                      <a:solidFill>
-                        <a:srgbClr val="C8D3E0"/>
-                      </a:solidFill>
-                    </a:lnR>
-                    <a:lnT w="10160">
-                      <a:solidFill>
-                        <a:srgbClr val="C8D3E0"/>
-                      </a:solidFill>
-                    </a:lnT>
-                    <a:lnB w="10160">
-                      <a:solidFill>
-                        <a:srgbClr val="C8D3E0"/>
-                      </a:solidFill>
-                    </a:lnB>
-                    <a:solidFill>
-                      <a:srgbClr val="FFFFFF"/>
-                    </a:solidFill>
-                  </a:tcPr>
-                </a:tc>
-              </a:tr>
-              <a:tr h="517608">
-                <a:tc>
-                  <a:txBody>
-                    <a:bodyPr wrap="square"/>
-                    <a:lstStyle/>
-                    <a:p>
-                      <a:pPr algn="ctr">
-                        <a:lnSpc>
-                          <a:spcPct val="115000"/>
-                        </a:lnSpc>
-                        <a:spcBef>
-                          <a:spcPts val="0"/>
-                        </a:spcBef>
-                        <a:spcAft>
-                          <a:spcPts val="0"/>
-                        </a:spcAft>
-                      </a:pPr>
-                      <a:r>
-                        <a:rPr sz="1000" b="1">
-                          <a:solidFill>
-                            <a:srgbClr val="222222"/>
-                          </a:solidFill>
-                          <a:latin typeface="맑은 고딕"/>
-                          <a:ea typeface="맑은 고딕"/>
-                          <a:cs typeface="맑은 고딕"/>
-                        </a:rPr>
-                        <a:t>SK가스 26년 Trading AI 사업(PP)</a:t>
-                      </a:r>
-                    </a:p>
-                  </a:txBody>
-                  <a:tcPr marL="36000" marR="36000" marT="18000" marB="18000" anchor="ctr">
-                    <a:lnL w="10160">
-                      <a:solidFill>
-                        <a:srgbClr val="C8D3E0"/>
-                      </a:solidFill>
-                    </a:lnL>
-                    <a:lnR w="10160">
-                      <a:solidFill>
-                        <a:srgbClr val="C8D3E0"/>
-                      </a:solidFill>
-                    </a:lnR>
-                    <a:lnT w="10160">
-                      <a:solidFill>
-                        <a:srgbClr val="C8D3E0"/>
-                      </a:solidFill>
-                    </a:lnT>
-                    <a:lnB w="10160">
-                      <a:solidFill>
-                        <a:srgbClr val="C8D3E0"/>
-                      </a:solidFill>
-                    </a:lnB>
-                    <a:solidFill>
-                      <a:srgbClr val="EEF3F9"/>
-                    </a:solidFill>
-                  </a:tcPr>
-                </a:tc>
-                <a:tc>
-                  <a:txBody>
-                    <a:bodyPr wrap="square"/>
-                    <a:lstStyle/>
-                    <a:p>
-                      <a:pPr algn="ctr">
-                        <a:lnSpc>
-                          <a:spcPct val="115000"/>
-                        </a:lnSpc>
-                        <a:spcBef>
-                          <a:spcPts val="0"/>
-                        </a:spcBef>
-                        <a:spcAft>
-                          <a:spcPts val="0"/>
-                        </a:spcAft>
-                      </a:pPr>
-                      <a:r>
-                        <a:rPr sz="1000" b="0">
-                          <a:solidFill>
-                            <a:srgbClr val="222222"/>
-                          </a:solidFill>
-                          <a:latin typeface="맑은 고딕"/>
-                          <a:ea typeface="맑은 고딕"/>
-                          <a:cs typeface="맑은 고딕"/>
-                        </a:rPr>
-                        <a:t>2026.07.01 ~ 2026.07.24</a:t>
-                      </a:r>
-                    </a:p>
-                  </a:txBody>
-                  <a:tcPr marL="36000" marR="36000" marT="18000" marB="18000" anchor="ctr">
-                    <a:lnL w="10160">
-                      <a:solidFill>
-                        <a:srgbClr val="C8D3E0"/>
-                      </a:solidFill>
-                    </a:lnL>
-                    <a:lnR w="10160">
-                      <a:solidFill>
-                        <a:srgbClr val="C8D3E0"/>
-                      </a:solidFill>
-                    </a:lnR>
-                    <a:lnT w="10160">
-                      <a:solidFill>
-                        <a:srgbClr val="C8D3E0"/>
-                      </a:solidFill>
-                    </a:lnT>
-                    <a:lnB w="10160">
-                      <a:solidFill>
-                        <a:srgbClr val="C8D3E0"/>
-                      </a:solidFill>
-                    </a:lnB>
-                    <a:solidFill>
-                      <a:srgbClr val="FFFFFF"/>
-                    </a:solidFill>
-                  </a:tcPr>
-                </a:tc>
-                <a:tc>
-                  <a:txBody>
-                    <a:bodyPr wrap="square"/>
-                    <a:lstStyle/>
-                    <a:p>
-                      <a:pPr algn="ctr">
-                        <a:lnSpc>
-                          <a:spcPct val="115000"/>
-                        </a:lnSpc>
-                        <a:spcBef>
-                          <a:spcPts val="0"/>
-                        </a:spcBef>
-                        <a:spcAft>
-                          <a:spcPts val="0"/>
-                        </a:spcAft>
-                      </a:pPr>
-                      <a:r>
-                        <a:rPr sz="1000" b="0">
-                          <a:solidFill>
-                            <a:srgbClr val="222222"/>
-                          </a:solidFill>
-                          <a:latin typeface="맑은 고딕"/>
-                          <a:ea typeface="맑은 고딕"/>
-                          <a:cs typeface="맑은 고딕"/>
-                        </a:rPr>
-                        <a:t>32</a:t>
                       </a:r>
                     </a:p>
                   </a:txBody>

--- a/proposals/2026-11_nlrc-ai-labor-commission/nlrc_제안요약서.pptx
+++ b/proposals/2026-11_nlrc-ai-labor-commission/nlrc_제안요약서.pptx
@@ -40290,7 +40290,7 @@
                 <a:ea typeface="맑은 고딕" panose="00000800000000000000" pitchFamily="2" charset="-127"/>
                 <a:cs typeface="맑은 고딕" panose="00000800000000000000" pitchFamily="2" charset="-127"/>
               </a:rPr>
-              <a:t>(생성형 AI 업무 적용 + 업무 시스템 구축) 16년간 디지털 서비스를 구축해 온 기업으로, 최근 </a:t>
+              <a:t>(생성형 AI 업무 적용 + 업무 시스템 구축) 16년간 디지털 서비스를 구축해 온 기업으로, 최근 3년간 </a:t>
             </a:r>
             <a:r>
               <a:rPr lang="ko-KR" altLang="en-US" sz="1200" b="1">
@@ -40308,7 +40308,7 @@
                 <a:ea typeface="맑은 고딕" panose="00000800000000000000" pitchFamily="2" charset="-127"/>
                 <a:cs typeface="맑은 고딕" panose="00000800000000000000" pitchFamily="2" charset="-127"/>
               </a:rPr>
-              <a:t>근거 제시형 AI Agent와 운영 중 업무 시스템 확산</a:t>
+              <a:t>AI · 정보시스템 구축 9건(5,095백만원)</a:t>
             </a:r>
             <a:r>
               <a:rPr lang="ko-KR" altLang="en-US" sz="1200" b="1">
@@ -40338,7 +40338,7 @@
         </p:nvGraphicFramePr>
         <p:xfrm>
           <a:off x="316800" y="2358000"/>
-          <a:ext cx="6260400" cy="2568124"/>
+          <a:ext cx="6260400" cy="2019204"/>
         </p:xfrm>
         <a:graphic>
           <a:graphicData uri="http://schemas.openxmlformats.org/drawingml/2006/table">
@@ -40348,7 +40348,7 @@
                 <a:gridCol w="1330335"/>
                 <a:gridCol w="4930065"/>
               </a:tblGrid>
-              <a:tr h="378000">
+              <a:tr h="309204">
                 <a:tc>
                   <a:txBody>
                     <a:bodyPr wrap="square"/>
@@ -40366,7 +40366,7 @@
                         </a:spcAft>
                       </a:pPr>
                       <a:r>
-                        <a:rPr sz="1100" b="1">
+                        <a:rPr sz="1050" b="1">
                           <a:solidFill>
                             <a:srgbClr val="FFFFFF"/>
                           </a:solidFill>
@@ -40421,7 +40421,7 @@
                         </a:spcAft>
                       </a:pPr>
                       <a:r>
-                        <a:rPr sz="1100" b="1">
+                        <a:rPr sz="1050" b="1">
                           <a:solidFill>
                             <a:srgbClr val="FFFFFF"/>
                           </a:solidFill>
@@ -40460,7 +40460,7 @@
                   </a:tcPr>
                 </a:tc>
               </a:tr>
-              <a:tr h="413999">
+              <a:tr h="342000">
                 <a:tc>
                   <a:txBody>
                     <a:bodyPr wrap="square"/>
@@ -40478,7 +40478,7 @@
                         </a:spcAft>
                       </a:pPr>
                       <a:r>
-                        <a:rPr sz="1050" b="1">
+                        <a:rPr sz="1000" b="1">
                           <a:solidFill>
                             <a:srgbClr val="222222"/>
                           </a:solidFill>
@@ -40533,7 +40533,7 @@
                         </a:spcAft>
                       </a:pPr>
                       <a:r>
-                        <a:rPr sz="1050" b="0">
+                        <a:rPr sz="1000" b="0">
                           <a:solidFill>
                             <a:srgbClr val="222222"/>
                           </a:solidFill>
@@ -40572,7 +40572,7 @@
                   </a:tcPr>
                 </a:tc>
               </a:tr>
-              <a:tr h="413999">
+              <a:tr h="342000">
                 <a:tc>
                   <a:txBody>
                     <a:bodyPr wrap="square"/>
@@ -40590,7 +40590,7 @@
                         </a:spcAft>
                       </a:pPr>
                       <a:r>
-                        <a:rPr sz="1050" b="1">
+                        <a:rPr sz="1000" b="1">
                           <a:solidFill>
                             <a:srgbClr val="222222"/>
                           </a:solidFill>
@@ -40645,7 +40645,7 @@
                         </a:spcAft>
                       </a:pPr>
                       <a:r>
-                        <a:rPr sz="1050" b="0">
+                        <a:rPr sz="1000" b="0">
                           <a:solidFill>
                             <a:srgbClr val="222222"/>
                           </a:solidFill>
@@ -40684,7 +40684,7 @@
                   </a:tcPr>
                 </a:tc>
               </a:tr>
-              <a:tr h="413999">
+              <a:tr h="342000">
                 <a:tc>
                   <a:txBody>
                     <a:bodyPr wrap="square"/>
@@ -40702,7 +40702,7 @@
                         </a:spcAft>
                       </a:pPr>
                       <a:r>
-                        <a:rPr sz="1050" b="1">
+                        <a:rPr sz="1000" b="1">
                           <a:solidFill>
                             <a:srgbClr val="222222"/>
                           </a:solidFill>
@@ -40757,7 +40757,7 @@
                         </a:spcAft>
                       </a:pPr>
                       <a:r>
-                        <a:rPr sz="1050" b="0">
+                        <a:rPr sz="1000" b="0">
                           <a:solidFill>
                             <a:srgbClr val="222222"/>
                           </a:solidFill>
@@ -40796,7 +40796,7 @@
                   </a:tcPr>
                 </a:tc>
               </a:tr>
-              <a:tr h="534128">
+              <a:tr h="342000">
                 <a:tc>
                   <a:txBody>
                     <a:bodyPr wrap="square"/>
@@ -40814,7 +40814,7 @@
                         </a:spcAft>
                       </a:pPr>
                       <a:r>
-                        <a:rPr sz="1050" b="1">
+                        <a:rPr sz="1000" b="1">
                           <a:solidFill>
                             <a:srgbClr val="222222"/>
                           </a:solidFill>
@@ -40869,7 +40869,7 @@
                         </a:spcAft>
                       </a:pPr>
                       <a:r>
-                        <a:rPr sz="1050" b="0">
+                        <a:rPr sz="1000" b="0">
                           <a:solidFill>
                             <a:srgbClr val="222222"/>
                           </a:solidFill>
@@ -40908,7 +40908,7 @@
                   </a:tcPr>
                 </a:tc>
               </a:tr>
-              <a:tr h="413999">
+              <a:tr h="342000">
                 <a:tc>
                   <a:txBody>
                     <a:bodyPr wrap="square"/>
@@ -40926,7 +40926,7 @@
                         </a:spcAft>
                       </a:pPr>
                       <a:r>
-                        <a:rPr sz="1050" b="1">
+                        <a:rPr sz="1000" b="1">
                           <a:solidFill>
                             <a:srgbClr val="222222"/>
                           </a:solidFill>
@@ -40981,7 +40981,7 @@
                         </a:spcAft>
                       </a:pPr>
                       <a:r>
-                        <a:rPr sz="1050" b="0">
+                        <a:rPr sz="1000" b="0">
                           <a:solidFill>
                             <a:srgbClr val="222222"/>
                           </a:solidFill>
@@ -40992,7 +40992,7 @@
                         <a:t>BBB0 </a:t>
                       </a:r>
                       <a:r>
-                        <a:rPr sz="1050" b="1">
+                        <a:rPr sz="1000" b="1">
                           <a:solidFill>
                             <a:srgbClr val="E00000"/>
                           </a:solidFill>
@@ -41044,8 +41044,8 @@
           <p:nvPr/>
         </p:nvGraphicFramePr>
         <p:xfrm>
-          <a:off x="316800" y="5034128"/>
-          <a:ext cx="6260399" cy="2484431"/>
+          <a:off x="316800" y="4485204"/>
+          <a:ext cx="6260399" cy="3205209"/>
         </p:xfrm>
         <a:graphic>
           <a:graphicData uri="http://schemas.openxmlformats.org/drawingml/2006/table">
@@ -41057,7 +41057,7 @@
                 <a:gridCol w="860805"/>
                 <a:gridCol w="1017315"/>
               </a:tblGrid>
-              <a:tr h="517608">
+              <a:tr h="457887">
                 <a:tc>
                   <a:txBody>
                     <a:bodyPr wrap="square"/>
@@ -41075,7 +41075,7 @@
                         </a:spcAft>
                       </a:pPr>
                       <a:r>
-                        <a:rPr sz="1050" b="1">
+                        <a:rPr sz="1000" b="1">
                           <a:solidFill>
                             <a:srgbClr val="FFFFFF"/>
                           </a:solidFill>
@@ -41130,7 +41130,7 @@
                         </a:spcAft>
                       </a:pPr>
                       <a:r>
-                        <a:rPr sz="1050" b="1">
+                        <a:rPr sz="1000" b="1">
                           <a:solidFill>
                             <a:srgbClr val="FFFFFF"/>
                           </a:solidFill>
@@ -41185,7 +41185,7 @@
                         </a:spcAft>
                       </a:pPr>
                       <a:r>
-                        <a:rPr sz="1050" b="1">
+                        <a:rPr sz="1000" b="1">
                           <a:solidFill>
                             <a:srgbClr val="FFFFFF"/>
                           </a:solidFill>
@@ -41240,7 +41240,7 @@
                         </a:spcAft>
                       </a:pPr>
                       <a:r>
-                        <a:rPr sz="1050" b="1">
+                        <a:rPr sz="1000" b="1">
                           <a:solidFill>
                             <a:srgbClr val="FFFFFF"/>
                           </a:solidFill>
@@ -41279,7 +41279,7 @@
                   </a:tcPr>
                 </a:tc>
               </a:tr>
-              <a:tr h="517608">
+              <a:tr h="457887">
                 <a:tc>
                   <a:txBody>
                     <a:bodyPr wrap="square"/>
@@ -41297,7 +41297,7 @@
                         </a:spcAft>
                       </a:pPr>
                       <a:r>
-                        <a:rPr sz="1000" b="1">
+                        <a:rPr sz="950" b="1">
                           <a:solidFill>
                             <a:srgbClr val="222222"/>
                           </a:solidFill>
@@ -41352,7 +41352,7 @@
                         </a:spcAft>
                       </a:pPr>
                       <a:r>
-                        <a:rPr sz="1000" b="0">
+                        <a:rPr sz="950" b="0">
                           <a:solidFill>
                             <a:srgbClr val="222222"/>
                           </a:solidFill>
@@ -41407,7 +41407,7 @@
                         </a:spcAft>
                       </a:pPr>
                       <a:r>
-                        <a:rPr sz="1000" b="0">
+                        <a:rPr sz="950" b="0">
                           <a:solidFill>
                             <a:srgbClr val="222222"/>
                           </a:solidFill>
@@ -41462,7 +41462,7 @@
                         </a:spcAft>
                       </a:pPr>
                       <a:r>
-                        <a:rPr sz="1000" b="0">
+                        <a:rPr sz="950" b="0">
                           <a:solidFill>
                             <a:srgbClr val="222222"/>
                           </a:solidFill>
@@ -41501,7 +41501,7 @@
                   </a:tcPr>
                 </a:tc>
               </a:tr>
-              <a:tr h="517608">
+              <a:tr h="457887">
                 <a:tc>
                   <a:txBody>
                     <a:bodyPr wrap="square"/>
@@ -41519,7 +41519,7 @@
                         </a:spcAft>
                       </a:pPr>
                       <a:r>
-                        <a:rPr sz="1000" b="1">
+                        <a:rPr sz="950" b="1">
                           <a:solidFill>
                             <a:srgbClr val="222222"/>
                           </a:solidFill>
@@ -41574,7 +41574,7 @@
                         </a:spcAft>
                       </a:pPr>
                       <a:r>
-                        <a:rPr sz="1000" b="0">
+                        <a:rPr sz="950" b="0">
                           <a:solidFill>
                             <a:srgbClr val="222222"/>
                           </a:solidFill>
@@ -41629,7 +41629,7 @@
                         </a:spcAft>
                       </a:pPr>
                       <a:r>
-                        <a:rPr sz="1000" b="0">
+                        <a:rPr sz="950" b="0">
                           <a:solidFill>
                             <a:srgbClr val="222222"/>
                           </a:solidFill>
@@ -41684,7 +41684,7 @@
                         </a:spcAft>
                       </a:pPr>
                       <a:r>
-                        <a:rPr sz="1000" b="0">
+                        <a:rPr sz="950" b="0">
                           <a:solidFill>
                             <a:srgbClr val="222222"/>
                           </a:solidFill>
@@ -41723,7 +41723,7 @@
                   </a:tcPr>
                 </a:tc>
               </a:tr>
-              <a:tr h="517608">
+              <a:tr h="457887">
                 <a:tc>
                   <a:txBody>
                     <a:bodyPr wrap="square"/>
@@ -41741,7 +41741,7 @@
                         </a:spcAft>
                       </a:pPr>
                       <a:r>
-                        <a:rPr sz="1000" b="1">
+                        <a:rPr sz="950" b="1">
                           <a:solidFill>
                             <a:srgbClr val="222222"/>
                           </a:solidFill>
@@ -41749,7 +41749,7 @@
                           <a:ea typeface="맑은 고딕"/>
                           <a:cs typeface="맑은 고딕"/>
                         </a:rPr>
-                        <a:t>SKHy 차세대 제조 시스템 FAB MOS (M14 · M15X · 용인 Y1, 3건)</a:t>
+                        <a:t>SKHy FAB MOS 확산 3건 (용인 Y1 · M14 · M15X)</a:t>
                       </a:r>
                     </a:p>
                   </a:txBody>
@@ -41796,7 +41796,7 @@
                         </a:spcAft>
                       </a:pPr>
                       <a:r>
-                        <a:rPr sz="1000" b="0">
+                        <a:rPr sz="950" b="0">
                           <a:solidFill>
                             <a:srgbClr val="222222"/>
                           </a:solidFill>
@@ -41851,7 +41851,7 @@
                         </a:spcAft>
                       </a:pPr>
                       <a:r>
-                        <a:rPr sz="1000" b="0">
+                        <a:rPr sz="950" b="0">
                           <a:solidFill>
                             <a:srgbClr val="222222"/>
                           </a:solidFill>
@@ -41906,7 +41906,7 @@
                         </a:spcAft>
                       </a:pPr>
                       <a:r>
-                        <a:rPr sz="1000" b="0">
+                        <a:rPr sz="950" b="0">
                           <a:solidFill>
                             <a:srgbClr val="222222"/>
                           </a:solidFill>
@@ -41945,7 +41945,7 @@
                   </a:tcPr>
                 </a:tc>
               </a:tr>
-              <a:tr h="413999">
+              <a:tr h="457887">
                 <a:tc>
                   <a:txBody>
                     <a:bodyPr wrap="square"/>
@@ -41963,15 +41963,15 @@
                         </a:spcAft>
                       </a:pPr>
                       <a:r>
-                        <a:rPr sz="1000" b="1">
+                        <a:rPr sz="950" b="1">
                           <a:solidFill>
-                            <a:srgbClr val="E00000"/>
+                            <a:srgbClr val="222222"/>
                           </a:solidFill>
                           <a:latin typeface="맑은 고딕"/>
                           <a:ea typeface="맑은 고딕"/>
                           <a:cs typeface="맑은 고딕"/>
                         </a:rPr>
-                        <a:t>【최근 3년 완료 정보시스템 구축 · 개발 실적】</a:t>
+                        <a:t>SKHy 표준 아키텍처 구축 Ph1 ~ Ph3 (3건)</a:t>
                       </a:r>
                     </a:p>
                   </a:txBody>
@@ -42018,15 +42018,15 @@
                         </a:spcAft>
                       </a:pPr>
                       <a:r>
-                        <a:rPr sz="1000" b="1">
+                        <a:rPr sz="950" b="0">
                           <a:solidFill>
-                            <a:srgbClr val="E00000"/>
+                            <a:srgbClr val="222222"/>
                           </a:solidFill>
                           <a:latin typeface="맑은 고딕"/>
                           <a:ea typeface="맑은 고딕"/>
                           <a:cs typeface="맑은 고딕"/>
                         </a:rPr>
-                        <a:t>【기간】</a:t>
+                        <a:t>2024.12.01 ~ 2026.06.30</a:t>
                       </a:r>
                     </a:p>
                   </a:txBody>
@@ -42073,15 +42073,15 @@
                         </a:spcAft>
                       </a:pPr>
                       <a:r>
-                        <a:rPr sz="1000" b="1">
+                        <a:rPr sz="950" b="0">
                           <a:solidFill>
-                            <a:srgbClr val="E00000"/>
+                            <a:srgbClr val="222222"/>
                           </a:solidFill>
                           <a:latin typeface="맑은 고딕"/>
                           <a:ea typeface="맑은 고딕"/>
                           <a:cs typeface="맑은 고딕"/>
                         </a:rPr>
-                        <a:t>【금액】</a:t>
+                        <a:t>3,390</a:t>
                       </a:r>
                     </a:p>
                   </a:txBody>
@@ -42128,15 +42128,459 @@
                         </a:spcAft>
                       </a:pPr>
                       <a:r>
-                        <a:rPr sz="1000" b="1">
+                        <a:rPr sz="950" b="0">
                           <a:solidFill>
-                            <a:srgbClr val="E00000"/>
+                            <a:srgbClr val="222222"/>
                           </a:solidFill>
                           <a:latin typeface="맑은 고딕"/>
                           <a:ea typeface="맑은 고딕"/>
                           <a:cs typeface="맑은 고딕"/>
                         </a:rPr>
-                        <a:t>【발주처】</a:t>
+                        <a:t>에스케이㈜</a:t>
+                      </a:r>
+                    </a:p>
+                  </a:txBody>
+                  <a:tcPr marL="36000" marR="36000" marT="18000" marB="18000" anchor="ctr">
+                    <a:lnL w="10160">
+                      <a:solidFill>
+                        <a:srgbClr val="C8D3E0"/>
+                      </a:solidFill>
+                    </a:lnL>
+                    <a:lnR w="10160">
+                      <a:solidFill>
+                        <a:srgbClr val="C8D3E0"/>
+                      </a:solidFill>
+                    </a:lnR>
+                    <a:lnT w="10160">
+                      <a:solidFill>
+                        <a:srgbClr val="C8D3E0"/>
+                      </a:solidFill>
+                    </a:lnT>
+                    <a:lnB w="10160">
+                      <a:solidFill>
+                        <a:srgbClr val="C8D3E0"/>
+                      </a:solidFill>
+                    </a:lnB>
+                    <a:solidFill>
+                      <a:srgbClr val="FFFFFF"/>
+                    </a:solidFill>
+                  </a:tcPr>
+                </a:tc>
+              </a:tr>
+              <a:tr h="457887">
+                <a:tc>
+                  <a:txBody>
+                    <a:bodyPr wrap="square"/>
+                    <a:lstStyle/>
+                    <a:p>
+                      <a:pPr algn="ctr">
+                        <a:lnSpc>
+                          <a:spcPct val="115000"/>
+                        </a:lnSpc>
+                        <a:spcBef>
+                          <a:spcPts val="0"/>
+                        </a:spcBef>
+                        <a:spcAft>
+                          <a:spcPts val="0"/>
+                        </a:spcAft>
+                      </a:pPr>
+                      <a:r>
+                        <a:rPr sz="950" b="1">
+                          <a:solidFill>
+                            <a:srgbClr val="222222"/>
+                          </a:solidFill>
+                          <a:latin typeface="맑은 고딕"/>
+                          <a:ea typeface="맑은 고딕"/>
+                          <a:cs typeface="맑은 고딕"/>
+                        </a:rPr>
+                        <a:t>CELLO SQUARE 통합운영플랫폼 구축</a:t>
+                      </a:r>
+                    </a:p>
+                  </a:txBody>
+                  <a:tcPr marL="36000" marR="36000" marT="18000" marB="18000" anchor="ctr">
+                    <a:lnL w="10160">
+                      <a:solidFill>
+                        <a:srgbClr val="C8D3E0"/>
+                      </a:solidFill>
+                    </a:lnL>
+                    <a:lnR w="10160">
+                      <a:solidFill>
+                        <a:srgbClr val="C8D3E0"/>
+                      </a:solidFill>
+                    </a:lnR>
+                    <a:lnT w="10160">
+                      <a:solidFill>
+                        <a:srgbClr val="C8D3E0"/>
+                      </a:solidFill>
+                    </a:lnT>
+                    <a:lnB w="10160">
+                      <a:solidFill>
+                        <a:srgbClr val="C8D3E0"/>
+                      </a:solidFill>
+                    </a:lnB>
+                    <a:solidFill>
+                      <a:srgbClr val="EEF3F9"/>
+                    </a:solidFill>
+                  </a:tcPr>
+                </a:tc>
+                <a:tc>
+                  <a:txBody>
+                    <a:bodyPr wrap="square"/>
+                    <a:lstStyle/>
+                    <a:p>
+                      <a:pPr algn="ctr">
+                        <a:lnSpc>
+                          <a:spcPct val="115000"/>
+                        </a:lnSpc>
+                        <a:spcBef>
+                          <a:spcPts val="0"/>
+                        </a:spcBef>
+                        <a:spcAft>
+                          <a:spcPts val="0"/>
+                        </a:spcAft>
+                      </a:pPr>
+                      <a:r>
+                        <a:rPr sz="950" b="0">
+                          <a:solidFill>
+                            <a:srgbClr val="222222"/>
+                          </a:solidFill>
+                          <a:latin typeface="맑은 고딕"/>
+                          <a:ea typeface="맑은 고딕"/>
+                          <a:cs typeface="맑은 고딕"/>
+                        </a:rPr>
+                        <a:t>2024.04.02 ~ 2024.12.31</a:t>
+                      </a:r>
+                    </a:p>
+                  </a:txBody>
+                  <a:tcPr marL="36000" marR="36000" marT="18000" marB="18000" anchor="ctr">
+                    <a:lnL w="10160">
+                      <a:solidFill>
+                        <a:srgbClr val="C8D3E0"/>
+                      </a:solidFill>
+                    </a:lnL>
+                    <a:lnR w="10160">
+                      <a:solidFill>
+                        <a:srgbClr val="C8D3E0"/>
+                      </a:solidFill>
+                    </a:lnR>
+                    <a:lnT w="10160">
+                      <a:solidFill>
+                        <a:srgbClr val="C8D3E0"/>
+                      </a:solidFill>
+                    </a:lnT>
+                    <a:lnB w="10160">
+                      <a:solidFill>
+                        <a:srgbClr val="C8D3E0"/>
+                      </a:solidFill>
+                    </a:lnB>
+                    <a:solidFill>
+                      <a:srgbClr val="FFFFFF"/>
+                    </a:solidFill>
+                  </a:tcPr>
+                </a:tc>
+                <a:tc>
+                  <a:txBody>
+                    <a:bodyPr wrap="square"/>
+                    <a:lstStyle/>
+                    <a:p>
+                      <a:pPr algn="ctr">
+                        <a:lnSpc>
+                          <a:spcPct val="115000"/>
+                        </a:lnSpc>
+                        <a:spcBef>
+                          <a:spcPts val="0"/>
+                        </a:spcBef>
+                        <a:spcAft>
+                          <a:spcPts val="0"/>
+                        </a:spcAft>
+                      </a:pPr>
+                      <a:r>
+                        <a:rPr sz="950" b="0">
+                          <a:solidFill>
+                            <a:srgbClr val="222222"/>
+                          </a:solidFill>
+                          <a:latin typeface="맑은 고딕"/>
+                          <a:ea typeface="맑은 고딕"/>
+                          <a:cs typeface="맑은 고딕"/>
+                        </a:rPr>
+                        <a:t>1,445</a:t>
+                      </a:r>
+                    </a:p>
+                  </a:txBody>
+                  <a:tcPr marL="36000" marR="36000" marT="18000" marB="18000" anchor="ctr">
+                    <a:lnL w="10160">
+                      <a:solidFill>
+                        <a:srgbClr val="C8D3E0"/>
+                      </a:solidFill>
+                    </a:lnL>
+                    <a:lnR w="10160">
+                      <a:solidFill>
+                        <a:srgbClr val="C8D3E0"/>
+                      </a:solidFill>
+                    </a:lnR>
+                    <a:lnT w="10160">
+                      <a:solidFill>
+                        <a:srgbClr val="C8D3E0"/>
+                      </a:solidFill>
+                    </a:lnT>
+                    <a:lnB w="10160">
+                      <a:solidFill>
+                        <a:srgbClr val="C8D3E0"/>
+                      </a:solidFill>
+                    </a:lnB>
+                    <a:solidFill>
+                      <a:srgbClr val="FFFFFF"/>
+                    </a:solidFill>
+                  </a:tcPr>
+                </a:tc>
+                <a:tc>
+                  <a:txBody>
+                    <a:bodyPr wrap="square"/>
+                    <a:lstStyle/>
+                    <a:p>
+                      <a:pPr algn="l">
+                        <a:lnSpc>
+                          <a:spcPct val="115000"/>
+                        </a:lnSpc>
+                        <a:spcBef>
+                          <a:spcPts val="0"/>
+                        </a:spcBef>
+                        <a:spcAft>
+                          <a:spcPts val="0"/>
+                        </a:spcAft>
+                      </a:pPr>
+                      <a:r>
+                        <a:rPr sz="950" b="0">
+                          <a:solidFill>
+                            <a:srgbClr val="222222"/>
+                          </a:solidFill>
+                          <a:latin typeface="맑은 고딕"/>
+                          <a:ea typeface="맑은 고딕"/>
+                          <a:cs typeface="맑은 고딕"/>
+                        </a:rPr>
+                        <a:t>삼성에스디에스㈜</a:t>
+                      </a:r>
+                    </a:p>
+                  </a:txBody>
+                  <a:tcPr marL="36000" marR="36000" marT="18000" marB="18000" anchor="ctr">
+                    <a:lnL w="10160">
+                      <a:solidFill>
+                        <a:srgbClr val="C8D3E0"/>
+                      </a:solidFill>
+                    </a:lnL>
+                    <a:lnR w="10160">
+                      <a:solidFill>
+                        <a:srgbClr val="C8D3E0"/>
+                      </a:solidFill>
+                    </a:lnR>
+                    <a:lnT w="10160">
+                      <a:solidFill>
+                        <a:srgbClr val="C8D3E0"/>
+                      </a:solidFill>
+                    </a:lnT>
+                    <a:lnB w="10160">
+                      <a:solidFill>
+                        <a:srgbClr val="C8D3E0"/>
+                      </a:solidFill>
+                    </a:lnB>
+                    <a:solidFill>
+                      <a:srgbClr val="FFFFFF"/>
+                    </a:solidFill>
+                  </a:tcPr>
+                </a:tc>
+              </a:tr>
+              <a:tr h="457887">
+                <a:tc>
+                  <a:txBody>
+                    <a:bodyPr wrap="square"/>
+                    <a:lstStyle/>
+                    <a:p>
+                      <a:pPr algn="ctr">
+                        <a:lnSpc>
+                          <a:spcPct val="115000"/>
+                        </a:lnSpc>
+                        <a:spcBef>
+                          <a:spcPts val="0"/>
+                        </a:spcBef>
+                        <a:spcAft>
+                          <a:spcPts val="0"/>
+                        </a:spcAft>
+                      </a:pPr>
+                      <a:r>
+                        <a:rPr sz="950" b="1">
+                          <a:solidFill>
+                            <a:srgbClr val="222222"/>
+                          </a:solidFill>
+                          <a:latin typeface="맑은 고딕"/>
+                          <a:ea typeface="맑은 고딕"/>
+                          <a:cs typeface="맑은 고딕"/>
+                        </a:rPr>
+                        <a:t>합계 (9건)</a:t>
+                      </a:r>
+                    </a:p>
+                  </a:txBody>
+                  <a:tcPr marL="36000" marR="36000" marT="18000" marB="18000" anchor="ctr">
+                    <a:lnL w="10160">
+                      <a:solidFill>
+                        <a:srgbClr val="C8D3E0"/>
+                      </a:solidFill>
+                    </a:lnL>
+                    <a:lnR w="10160">
+                      <a:solidFill>
+                        <a:srgbClr val="C8D3E0"/>
+                      </a:solidFill>
+                    </a:lnR>
+                    <a:lnT w="10160">
+                      <a:solidFill>
+                        <a:srgbClr val="C8D3E0"/>
+                      </a:solidFill>
+                    </a:lnT>
+                    <a:lnB w="10160">
+                      <a:solidFill>
+                        <a:srgbClr val="C8D3E0"/>
+                      </a:solidFill>
+                    </a:lnB>
+                    <a:solidFill>
+                      <a:srgbClr val="EEF3F9"/>
+                    </a:solidFill>
+                  </a:tcPr>
+                </a:tc>
+                <a:tc>
+                  <a:txBody>
+                    <a:bodyPr wrap="square"/>
+                    <a:lstStyle/>
+                    <a:p>
+                      <a:pPr algn="ctr">
+                        <a:lnSpc>
+                          <a:spcPct val="115000"/>
+                        </a:lnSpc>
+                        <a:spcBef>
+                          <a:spcPts val="0"/>
+                        </a:spcBef>
+                        <a:spcAft>
+                          <a:spcPts val="0"/>
+                        </a:spcAft>
+                      </a:pPr>
+                      <a:r>
+                        <a:rPr sz="950" b="0">
+                          <a:solidFill>
+                            <a:srgbClr val="222222"/>
+                          </a:solidFill>
+                          <a:latin typeface="맑은 고딕"/>
+                          <a:ea typeface="맑은 고딕"/>
+                          <a:cs typeface="맑은 고딕"/>
+                        </a:rPr>
+                        <a:t>-</a:t>
+                      </a:r>
+                    </a:p>
+                  </a:txBody>
+                  <a:tcPr marL="36000" marR="36000" marT="18000" marB="18000" anchor="ctr">
+                    <a:lnL w="10160">
+                      <a:solidFill>
+                        <a:srgbClr val="C8D3E0"/>
+                      </a:solidFill>
+                    </a:lnL>
+                    <a:lnR w="10160">
+                      <a:solidFill>
+                        <a:srgbClr val="C8D3E0"/>
+                      </a:solidFill>
+                    </a:lnR>
+                    <a:lnT w="10160">
+                      <a:solidFill>
+                        <a:srgbClr val="C8D3E0"/>
+                      </a:solidFill>
+                    </a:lnT>
+                    <a:lnB w="10160">
+                      <a:solidFill>
+                        <a:srgbClr val="C8D3E0"/>
+                      </a:solidFill>
+                    </a:lnB>
+                    <a:solidFill>
+                      <a:srgbClr val="FFFFFF"/>
+                    </a:solidFill>
+                  </a:tcPr>
+                </a:tc>
+                <a:tc>
+                  <a:txBody>
+                    <a:bodyPr wrap="square"/>
+                    <a:lstStyle/>
+                    <a:p>
+                      <a:pPr algn="ctr">
+                        <a:lnSpc>
+                          <a:spcPct val="115000"/>
+                        </a:lnSpc>
+                        <a:spcBef>
+                          <a:spcPts val="0"/>
+                        </a:spcBef>
+                        <a:spcAft>
+                          <a:spcPts val="0"/>
+                        </a:spcAft>
+                      </a:pPr>
+                      <a:r>
+                        <a:rPr sz="950" b="0">
+                          <a:solidFill>
+                            <a:srgbClr val="222222"/>
+                          </a:solidFill>
+                          <a:latin typeface="맑은 고딕"/>
+                          <a:ea typeface="맑은 고딕"/>
+                          <a:cs typeface="맑은 고딕"/>
+                        </a:rPr>
+                        <a:t>5,095</a:t>
+                      </a:r>
+                    </a:p>
+                  </a:txBody>
+                  <a:tcPr marL="36000" marR="36000" marT="18000" marB="18000" anchor="ctr">
+                    <a:lnL w="10160">
+                      <a:solidFill>
+                        <a:srgbClr val="C8D3E0"/>
+                      </a:solidFill>
+                    </a:lnL>
+                    <a:lnR w="10160">
+                      <a:solidFill>
+                        <a:srgbClr val="C8D3E0"/>
+                      </a:solidFill>
+                    </a:lnR>
+                    <a:lnT w="10160">
+                      <a:solidFill>
+                        <a:srgbClr val="C8D3E0"/>
+                      </a:solidFill>
+                    </a:lnT>
+                    <a:lnB w="10160">
+                      <a:solidFill>
+                        <a:srgbClr val="C8D3E0"/>
+                      </a:solidFill>
+                    </a:lnB>
+                    <a:solidFill>
+                      <a:srgbClr val="FFFFFF"/>
+                    </a:solidFill>
+                  </a:tcPr>
+                </a:tc>
+                <a:tc>
+                  <a:txBody>
+                    <a:bodyPr wrap="square"/>
+                    <a:lstStyle/>
+                    <a:p>
+                      <a:pPr algn="l">
+                        <a:lnSpc>
+                          <a:spcPct val="115000"/>
+                        </a:lnSpc>
+                        <a:spcBef>
+                          <a:spcPts val="0"/>
+                        </a:spcBef>
+                        <a:spcAft>
+                          <a:spcPts val="0"/>
+                        </a:spcAft>
+                      </a:pPr>
+                      <a:r>
+                        <a:rPr sz="950" b="0">
+                          <a:solidFill>
+                            <a:srgbClr val="222222"/>
+                          </a:solidFill>
+                          <a:latin typeface="맑은 고딕"/>
+                          <a:ea typeface="맑은 고딕"/>
+                          <a:cs typeface="맑은 고딕"/>
+                        </a:rPr>
+                        <a:t>사업규모 대비 449%</a:t>
                       </a:r>
                     </a:p>
                   </a:txBody>
@@ -42179,8 +42623,8 @@
         </p:nvSpPr>
         <p:spPr>
           <a:xfrm>
-            <a:off x="316800" y="7626560"/>
-            <a:ext cx="2026800" cy="1007999"/>
+            <a:off x="316800" y="7798417"/>
+            <a:ext cx="2026800" cy="900000"/>
           </a:xfrm>
           <a:prstGeom prst="rect">
             <a:avLst/>
@@ -42225,7 +42669,7 @@
         </p:nvSpPr>
         <p:spPr>
           <a:xfrm>
-            <a:off x="316800" y="7626560"/>
+            <a:off x="316800" y="7798417"/>
             <a:ext cx="2026800" cy="234000"/>
           </a:xfrm>
           <a:prstGeom prst="rect">
@@ -42290,8 +42734,8 @@
         </p:nvSpPr>
         <p:spPr>
           <a:xfrm>
-            <a:off x="352800" y="7885760"/>
-            <a:ext cx="1954800" cy="756000"/>
+            <a:off x="352800" y="8057617"/>
+            <a:ext cx="1954800" cy="648000"/>
           </a:xfrm>
           <a:prstGeom prst="rect">
             <a:avLst/>
@@ -42316,7 +42760,7 @@
               </a:spcAft>
             </a:pPr>
             <a:r>
-              <a:rPr sz="1050" b="0">
+              <a:rPr sz="1000" b="0">
                 <a:solidFill>
                   <a:srgbClr val="000000"/>
                 </a:solidFill>
@@ -42337,8 +42781,8 @@
         </p:nvSpPr>
         <p:spPr>
           <a:xfrm>
-            <a:off x="2433600" y="7626560"/>
-            <a:ext cx="2026800" cy="1007999"/>
+            <a:off x="2433600" y="7798417"/>
+            <a:ext cx="2026800" cy="900000"/>
           </a:xfrm>
           <a:prstGeom prst="rect">
             <a:avLst/>
@@ -42383,7 +42827,7 @@
         </p:nvSpPr>
         <p:spPr>
           <a:xfrm>
-            <a:off x="2433600" y="7626560"/>
+            <a:off x="2433600" y="7798417"/>
             <a:ext cx="2026800" cy="234000"/>
           </a:xfrm>
           <a:prstGeom prst="rect">
@@ -42448,8 +42892,8 @@
         </p:nvSpPr>
         <p:spPr>
           <a:xfrm>
-            <a:off x="2469600" y="7885760"/>
-            <a:ext cx="1954800" cy="756000"/>
+            <a:off x="2469600" y="8057617"/>
+            <a:ext cx="1954800" cy="648000"/>
           </a:xfrm>
           <a:prstGeom prst="rect">
             <a:avLst/>
@@ -42474,7 +42918,7 @@
               </a:spcAft>
             </a:pPr>
             <a:r>
-              <a:rPr sz="1050" b="0">
+              <a:rPr sz="1000" b="0">
                 <a:solidFill>
                   <a:srgbClr val="000000"/>
                 </a:solidFill>
@@ -42495,8 +42939,8 @@
         </p:nvSpPr>
         <p:spPr>
           <a:xfrm>
-            <a:off x="4550400" y="7626560"/>
-            <a:ext cx="2026800" cy="1007999"/>
+            <a:off x="4550400" y="7798417"/>
+            <a:ext cx="2026800" cy="900000"/>
           </a:xfrm>
           <a:prstGeom prst="rect">
             <a:avLst/>
@@ -42541,7 +42985,7 @@
         </p:nvSpPr>
         <p:spPr>
           <a:xfrm>
-            <a:off x="4550400" y="7626560"/>
+            <a:off x="4550400" y="7798417"/>
             <a:ext cx="2026800" cy="234000"/>
           </a:xfrm>
           <a:prstGeom prst="rect">
@@ -42593,7 +43037,7 @@
                 <a:ea typeface="맑은 고딕"/>
                 <a:cs typeface="맑은 고딕"/>
               </a:rPr>
-              <a:t>무중단 확산</a:t>
+              <a:t>데이터 표준 · 업무 플랫폼</a:t>
             </a:r>
           </a:p>
         </p:txBody>
@@ -42606,8 +43050,8 @@
         </p:nvSpPr>
         <p:spPr>
           <a:xfrm>
-            <a:off x="4586400" y="7885760"/>
-            <a:ext cx="1954800" cy="756000"/>
+            <a:off x="4586400" y="8057617"/>
+            <a:ext cx="1954800" cy="648000"/>
           </a:xfrm>
           <a:prstGeom prst="rect">
             <a:avLst/>
@@ -42632,7 +43076,7 @@
               </a:spcAft>
             </a:pPr>
             <a:r>
-              <a:rPr sz="1050" b="0">
+              <a:rPr sz="1000" b="0">
                 <a:solidFill>
                   <a:srgbClr val="000000"/>
                 </a:solidFill>
@@ -42640,7 +43084,7 @@
                 <a:ea typeface="맑은 고딕"/>
                 <a:cs typeface="맑은 고딕"/>
               </a:rPr>
-              <a:t>가동 중 시스템 고도화 → 노사마루 · 연계 단계 오픈</a:t>
+              <a:t>표준 아키텍처 Ph1~Ph3 · CELLO SQUARE → 통계 표준화 · 노사마루 고도화</a:t>
             </a:r>
           </a:p>
         </p:txBody>
